--- a/exports/pptx/lessons/middle-module-15-project-implementation/day-03-research-1.pptx
+++ b/exports/pptx/lessons/middle-module-15-project-implementation/day-03-research-1.pptx
@@ -16,9 +16,17 @@
     <p:sldId id="264" r:id="rId10"/>
     <p:sldId id="265" r:id="rId11"/>
     <p:sldId id="266" r:id="rId12"/>
+    <p:sldId id="267" r:id="rId13"/>
+    <p:sldId id="268" r:id="rId14"/>
+    <p:sldId id="269" r:id="rId15"/>
+    <p:sldId id="270" r:id="rId16"/>
+    <p:sldId id="271" r:id="rId17"/>
+    <p:sldId id="272" r:id="rId18"/>
+    <p:sldId id="273" r:id="rId19"/>
+    <p:sldId id="274" r:id="rId20"/>
   </p:sldIdLst>
   <p:notesMasterIdLst>
-    <p:notesMasterId r:id="rId13"/>
+    <p:notesMasterId r:id="rId21"/>
   </p:notesMasterIdLst>
   <p:sldSz cx="9144000" cy="5143500"/>
   <p:notesSz cx="5143500" cy="9144000"/>
@@ -712,6 +720,710 @@
             <a:fld id="{F7021451-1387-4CA6-816F-3879F97B5CBC}" type="slidenum">
               <a:rPr lang="en-US"/>
               <a:t>11</a:t>
+            </a:fld>
+            <a:endParaRPr lang="en-US"/>
+          </a:p>
+        </p:txBody>
+      </p:sp>
+    </p:spTree>
+    <p:extLst>
+      <p:ext uri="{BB962C8B-B14F-4D97-AF65-F5344CB8AC3E}">
+        <p14:creationId xmlns:p14="http://schemas.microsoft.com/office/powerpoint/2010/main" val="1024086991"/>
+      </p:ext>
+    </p:extLst>
+  </p:cSld>
+  <p:clrMapOvr>
+    <a:masterClrMapping/>
+  </p:clrMapOvr>
+</p:notes>
+</file>
+
+<file path=ppt/notesSlides/notesSlide12.xml><?xml version="1.0" encoding="utf-8"?>
+<p:notes xmlns:a="http://schemas.openxmlformats.org/drawingml/2006/main" xmlns:r="http://schemas.openxmlformats.org/officeDocument/2006/relationships" xmlns:p="http://schemas.openxmlformats.org/presentationml/2006/main">
+  <p:cSld>
+    <p:spTree>
+      <p:nvGrpSpPr>
+        <p:cNvPr id="1" name=""/>
+        <p:cNvGrpSpPr/>
+        <p:nvPr/>
+      </p:nvGrpSpPr>
+      <p:grpSpPr>
+        <a:xfrm>
+          <a:off x="0" y="0"/>
+          <a:ext cx="0" cy="0"/>
+          <a:chOff x="0" y="0"/>
+          <a:chExt cx="0" cy="0"/>
+        </a:xfrm>
+      </p:grpSpPr>
+      <p:sp>
+        <p:nvSpPr>
+          <p:cNvPr id="2" name="Slide Image Placeholder 1"/>
+          <p:cNvSpPr>
+            <a:spLocks noGrp="1" noRot="1" noChangeAspect="1"/>
+          </p:cNvSpPr>
+          <p:nvPr>
+            <p:ph type="sldImg"/>
+          </p:nvPr>
+        </p:nvSpPr>
+        <p:spPr/>
+      </p:sp>
+      <p:sp>
+        <p:nvSpPr>
+          <p:cNvPr id="3" name="Notes Placeholder 2"/>
+          <p:cNvSpPr>
+            <a:spLocks noGrp="1"/>
+          </p:cNvSpPr>
+          <p:nvPr>
+            <p:ph type="body" idx="1"/>
+          </p:nvPr>
+        </p:nvSpPr>
+        <p:spPr/>
+        <p:txBody>
+          <a:bodyPr/>
+          <a:lstStyle/>
+          <a:p>
+            <a:r>
+              <a:rPr lang="en-US" dirty="0"/>
+              <a:t/>
+            </a:r>
+            <a:endParaRPr lang="en-US" dirty="0"/>
+          </a:p>
+        </p:txBody>
+      </p:sp>
+      <p:sp>
+        <p:nvSpPr>
+          <p:cNvPr id="4" name="Slide Number Placeholder 3"/>
+          <p:cNvSpPr>
+            <a:spLocks noGrp="1"/>
+          </p:cNvSpPr>
+          <p:nvPr>
+            <p:ph type="sldNum" sz="quarter" idx="10"/>
+          </p:nvPr>
+        </p:nvSpPr>
+        <p:spPr/>
+        <p:txBody>
+          <a:bodyPr/>
+          <a:lstStyle/>
+          <a:p>
+            <a:fld id="{F7021451-1387-4CA6-816F-3879F97B5CBC}" type="slidenum">
+              <a:rPr lang="en-US"/>
+              <a:t>12</a:t>
+            </a:fld>
+            <a:endParaRPr lang="en-US"/>
+          </a:p>
+        </p:txBody>
+      </p:sp>
+    </p:spTree>
+    <p:extLst>
+      <p:ext uri="{BB962C8B-B14F-4D97-AF65-F5344CB8AC3E}">
+        <p14:creationId xmlns:p14="http://schemas.microsoft.com/office/powerpoint/2010/main" val="1024086991"/>
+      </p:ext>
+    </p:extLst>
+  </p:cSld>
+  <p:clrMapOvr>
+    <a:masterClrMapping/>
+  </p:clrMapOvr>
+</p:notes>
+</file>
+
+<file path=ppt/notesSlides/notesSlide13.xml><?xml version="1.0" encoding="utf-8"?>
+<p:notes xmlns:a="http://schemas.openxmlformats.org/drawingml/2006/main" xmlns:r="http://schemas.openxmlformats.org/officeDocument/2006/relationships" xmlns:p="http://schemas.openxmlformats.org/presentationml/2006/main">
+  <p:cSld>
+    <p:spTree>
+      <p:nvGrpSpPr>
+        <p:cNvPr id="1" name=""/>
+        <p:cNvGrpSpPr/>
+        <p:nvPr/>
+      </p:nvGrpSpPr>
+      <p:grpSpPr>
+        <a:xfrm>
+          <a:off x="0" y="0"/>
+          <a:ext cx="0" cy="0"/>
+          <a:chOff x="0" y="0"/>
+          <a:chExt cx="0" cy="0"/>
+        </a:xfrm>
+      </p:grpSpPr>
+      <p:sp>
+        <p:nvSpPr>
+          <p:cNvPr id="2" name="Slide Image Placeholder 1"/>
+          <p:cNvSpPr>
+            <a:spLocks noGrp="1" noRot="1" noChangeAspect="1"/>
+          </p:cNvSpPr>
+          <p:nvPr>
+            <p:ph type="sldImg"/>
+          </p:nvPr>
+        </p:nvSpPr>
+        <p:spPr/>
+      </p:sp>
+      <p:sp>
+        <p:nvSpPr>
+          <p:cNvPr id="3" name="Notes Placeholder 2"/>
+          <p:cNvSpPr>
+            <a:spLocks noGrp="1"/>
+          </p:cNvSpPr>
+          <p:nvPr>
+            <p:ph type="body" idx="1"/>
+          </p:nvPr>
+        </p:nvSpPr>
+        <p:spPr/>
+        <p:txBody>
+          <a:bodyPr/>
+          <a:lstStyle/>
+          <a:p>
+            <a:r>
+              <a:rPr lang="en-US" dirty="0"/>
+              <a:t/>
+            </a:r>
+            <a:endParaRPr lang="en-US" dirty="0"/>
+          </a:p>
+        </p:txBody>
+      </p:sp>
+      <p:sp>
+        <p:nvSpPr>
+          <p:cNvPr id="4" name="Slide Number Placeholder 3"/>
+          <p:cNvSpPr>
+            <a:spLocks noGrp="1"/>
+          </p:cNvSpPr>
+          <p:nvPr>
+            <p:ph type="sldNum" sz="quarter" idx="10"/>
+          </p:nvPr>
+        </p:nvSpPr>
+        <p:spPr/>
+        <p:txBody>
+          <a:bodyPr/>
+          <a:lstStyle/>
+          <a:p>
+            <a:fld id="{F7021451-1387-4CA6-816F-3879F97B5CBC}" type="slidenum">
+              <a:rPr lang="en-US"/>
+              <a:t>13</a:t>
+            </a:fld>
+            <a:endParaRPr lang="en-US"/>
+          </a:p>
+        </p:txBody>
+      </p:sp>
+    </p:spTree>
+    <p:extLst>
+      <p:ext uri="{BB962C8B-B14F-4D97-AF65-F5344CB8AC3E}">
+        <p14:creationId xmlns:p14="http://schemas.microsoft.com/office/powerpoint/2010/main" val="1024086991"/>
+      </p:ext>
+    </p:extLst>
+  </p:cSld>
+  <p:clrMapOvr>
+    <a:masterClrMapping/>
+  </p:clrMapOvr>
+</p:notes>
+</file>
+
+<file path=ppt/notesSlides/notesSlide14.xml><?xml version="1.0" encoding="utf-8"?>
+<p:notes xmlns:a="http://schemas.openxmlformats.org/drawingml/2006/main" xmlns:r="http://schemas.openxmlformats.org/officeDocument/2006/relationships" xmlns:p="http://schemas.openxmlformats.org/presentationml/2006/main">
+  <p:cSld>
+    <p:spTree>
+      <p:nvGrpSpPr>
+        <p:cNvPr id="1" name=""/>
+        <p:cNvGrpSpPr/>
+        <p:nvPr/>
+      </p:nvGrpSpPr>
+      <p:grpSpPr>
+        <a:xfrm>
+          <a:off x="0" y="0"/>
+          <a:ext cx="0" cy="0"/>
+          <a:chOff x="0" y="0"/>
+          <a:chExt cx="0" cy="0"/>
+        </a:xfrm>
+      </p:grpSpPr>
+      <p:sp>
+        <p:nvSpPr>
+          <p:cNvPr id="2" name="Slide Image Placeholder 1"/>
+          <p:cNvSpPr>
+            <a:spLocks noGrp="1" noRot="1" noChangeAspect="1"/>
+          </p:cNvSpPr>
+          <p:nvPr>
+            <p:ph type="sldImg"/>
+          </p:nvPr>
+        </p:nvSpPr>
+        <p:spPr/>
+      </p:sp>
+      <p:sp>
+        <p:nvSpPr>
+          <p:cNvPr id="3" name="Notes Placeholder 2"/>
+          <p:cNvSpPr>
+            <a:spLocks noGrp="1"/>
+          </p:cNvSpPr>
+          <p:nvPr>
+            <p:ph type="body" idx="1"/>
+          </p:nvPr>
+        </p:nvSpPr>
+        <p:spPr/>
+        <p:txBody>
+          <a:bodyPr/>
+          <a:lstStyle/>
+          <a:p>
+            <a:r>
+              <a:rPr lang="en-US" dirty="0"/>
+              <a:t/>
+            </a:r>
+            <a:endParaRPr lang="en-US" dirty="0"/>
+          </a:p>
+        </p:txBody>
+      </p:sp>
+      <p:sp>
+        <p:nvSpPr>
+          <p:cNvPr id="4" name="Slide Number Placeholder 3"/>
+          <p:cNvSpPr>
+            <a:spLocks noGrp="1"/>
+          </p:cNvSpPr>
+          <p:nvPr>
+            <p:ph type="sldNum" sz="quarter" idx="10"/>
+          </p:nvPr>
+        </p:nvSpPr>
+        <p:spPr/>
+        <p:txBody>
+          <a:bodyPr/>
+          <a:lstStyle/>
+          <a:p>
+            <a:fld id="{F7021451-1387-4CA6-816F-3879F97B5CBC}" type="slidenum">
+              <a:rPr lang="en-US"/>
+              <a:t>14</a:t>
+            </a:fld>
+            <a:endParaRPr lang="en-US"/>
+          </a:p>
+        </p:txBody>
+      </p:sp>
+    </p:spTree>
+    <p:extLst>
+      <p:ext uri="{BB962C8B-B14F-4D97-AF65-F5344CB8AC3E}">
+        <p14:creationId xmlns:p14="http://schemas.microsoft.com/office/powerpoint/2010/main" val="1024086991"/>
+      </p:ext>
+    </p:extLst>
+  </p:cSld>
+  <p:clrMapOvr>
+    <a:masterClrMapping/>
+  </p:clrMapOvr>
+</p:notes>
+</file>
+
+<file path=ppt/notesSlides/notesSlide15.xml><?xml version="1.0" encoding="utf-8"?>
+<p:notes xmlns:a="http://schemas.openxmlformats.org/drawingml/2006/main" xmlns:r="http://schemas.openxmlformats.org/officeDocument/2006/relationships" xmlns:p="http://schemas.openxmlformats.org/presentationml/2006/main">
+  <p:cSld>
+    <p:spTree>
+      <p:nvGrpSpPr>
+        <p:cNvPr id="1" name=""/>
+        <p:cNvGrpSpPr/>
+        <p:nvPr/>
+      </p:nvGrpSpPr>
+      <p:grpSpPr>
+        <a:xfrm>
+          <a:off x="0" y="0"/>
+          <a:ext cx="0" cy="0"/>
+          <a:chOff x="0" y="0"/>
+          <a:chExt cx="0" cy="0"/>
+        </a:xfrm>
+      </p:grpSpPr>
+      <p:sp>
+        <p:nvSpPr>
+          <p:cNvPr id="2" name="Slide Image Placeholder 1"/>
+          <p:cNvSpPr>
+            <a:spLocks noGrp="1" noRot="1" noChangeAspect="1"/>
+          </p:cNvSpPr>
+          <p:nvPr>
+            <p:ph type="sldImg"/>
+          </p:nvPr>
+        </p:nvSpPr>
+        <p:spPr/>
+      </p:sp>
+      <p:sp>
+        <p:nvSpPr>
+          <p:cNvPr id="3" name="Notes Placeholder 2"/>
+          <p:cNvSpPr>
+            <a:spLocks noGrp="1"/>
+          </p:cNvSpPr>
+          <p:nvPr>
+            <p:ph type="body" idx="1"/>
+          </p:nvPr>
+        </p:nvSpPr>
+        <p:spPr/>
+        <p:txBody>
+          <a:bodyPr/>
+          <a:lstStyle/>
+          <a:p>
+            <a:r>
+              <a:rPr lang="en-US" dirty="0"/>
+              <a:t/>
+            </a:r>
+            <a:endParaRPr lang="en-US" dirty="0"/>
+          </a:p>
+        </p:txBody>
+      </p:sp>
+      <p:sp>
+        <p:nvSpPr>
+          <p:cNvPr id="4" name="Slide Number Placeholder 3"/>
+          <p:cNvSpPr>
+            <a:spLocks noGrp="1"/>
+          </p:cNvSpPr>
+          <p:nvPr>
+            <p:ph type="sldNum" sz="quarter" idx="10"/>
+          </p:nvPr>
+        </p:nvSpPr>
+        <p:spPr/>
+        <p:txBody>
+          <a:bodyPr/>
+          <a:lstStyle/>
+          <a:p>
+            <a:fld id="{F7021451-1387-4CA6-816F-3879F97B5CBC}" type="slidenum">
+              <a:rPr lang="en-US"/>
+              <a:t>15</a:t>
+            </a:fld>
+            <a:endParaRPr lang="en-US"/>
+          </a:p>
+        </p:txBody>
+      </p:sp>
+    </p:spTree>
+    <p:extLst>
+      <p:ext uri="{BB962C8B-B14F-4D97-AF65-F5344CB8AC3E}">
+        <p14:creationId xmlns:p14="http://schemas.microsoft.com/office/powerpoint/2010/main" val="1024086991"/>
+      </p:ext>
+    </p:extLst>
+  </p:cSld>
+  <p:clrMapOvr>
+    <a:masterClrMapping/>
+  </p:clrMapOvr>
+</p:notes>
+</file>
+
+<file path=ppt/notesSlides/notesSlide16.xml><?xml version="1.0" encoding="utf-8"?>
+<p:notes xmlns:a="http://schemas.openxmlformats.org/drawingml/2006/main" xmlns:r="http://schemas.openxmlformats.org/officeDocument/2006/relationships" xmlns:p="http://schemas.openxmlformats.org/presentationml/2006/main">
+  <p:cSld>
+    <p:spTree>
+      <p:nvGrpSpPr>
+        <p:cNvPr id="1" name=""/>
+        <p:cNvGrpSpPr/>
+        <p:nvPr/>
+      </p:nvGrpSpPr>
+      <p:grpSpPr>
+        <a:xfrm>
+          <a:off x="0" y="0"/>
+          <a:ext cx="0" cy="0"/>
+          <a:chOff x="0" y="0"/>
+          <a:chExt cx="0" cy="0"/>
+        </a:xfrm>
+      </p:grpSpPr>
+      <p:sp>
+        <p:nvSpPr>
+          <p:cNvPr id="2" name="Slide Image Placeholder 1"/>
+          <p:cNvSpPr>
+            <a:spLocks noGrp="1" noRot="1" noChangeAspect="1"/>
+          </p:cNvSpPr>
+          <p:nvPr>
+            <p:ph type="sldImg"/>
+          </p:nvPr>
+        </p:nvSpPr>
+        <p:spPr/>
+      </p:sp>
+      <p:sp>
+        <p:nvSpPr>
+          <p:cNvPr id="3" name="Notes Placeholder 2"/>
+          <p:cNvSpPr>
+            <a:spLocks noGrp="1"/>
+          </p:cNvSpPr>
+          <p:nvPr>
+            <p:ph type="body" idx="1"/>
+          </p:nvPr>
+        </p:nvSpPr>
+        <p:spPr/>
+        <p:txBody>
+          <a:bodyPr/>
+          <a:lstStyle/>
+          <a:p>
+            <a:r>
+              <a:rPr lang="en-US" dirty="0"/>
+              <a:t/>
+            </a:r>
+            <a:endParaRPr lang="en-US" dirty="0"/>
+          </a:p>
+        </p:txBody>
+      </p:sp>
+      <p:sp>
+        <p:nvSpPr>
+          <p:cNvPr id="4" name="Slide Number Placeholder 3"/>
+          <p:cNvSpPr>
+            <a:spLocks noGrp="1"/>
+          </p:cNvSpPr>
+          <p:nvPr>
+            <p:ph type="sldNum" sz="quarter" idx="10"/>
+          </p:nvPr>
+        </p:nvSpPr>
+        <p:spPr/>
+        <p:txBody>
+          <a:bodyPr/>
+          <a:lstStyle/>
+          <a:p>
+            <a:fld id="{F7021451-1387-4CA6-816F-3879F97B5CBC}" type="slidenum">
+              <a:rPr lang="en-US"/>
+              <a:t>16</a:t>
+            </a:fld>
+            <a:endParaRPr lang="en-US"/>
+          </a:p>
+        </p:txBody>
+      </p:sp>
+    </p:spTree>
+    <p:extLst>
+      <p:ext uri="{BB962C8B-B14F-4D97-AF65-F5344CB8AC3E}">
+        <p14:creationId xmlns:p14="http://schemas.microsoft.com/office/powerpoint/2010/main" val="1024086991"/>
+      </p:ext>
+    </p:extLst>
+  </p:cSld>
+  <p:clrMapOvr>
+    <a:masterClrMapping/>
+  </p:clrMapOvr>
+</p:notes>
+</file>
+
+<file path=ppt/notesSlides/notesSlide17.xml><?xml version="1.0" encoding="utf-8"?>
+<p:notes xmlns:a="http://schemas.openxmlformats.org/drawingml/2006/main" xmlns:r="http://schemas.openxmlformats.org/officeDocument/2006/relationships" xmlns:p="http://schemas.openxmlformats.org/presentationml/2006/main">
+  <p:cSld>
+    <p:spTree>
+      <p:nvGrpSpPr>
+        <p:cNvPr id="1" name=""/>
+        <p:cNvGrpSpPr/>
+        <p:nvPr/>
+      </p:nvGrpSpPr>
+      <p:grpSpPr>
+        <a:xfrm>
+          <a:off x="0" y="0"/>
+          <a:ext cx="0" cy="0"/>
+          <a:chOff x="0" y="0"/>
+          <a:chExt cx="0" cy="0"/>
+        </a:xfrm>
+      </p:grpSpPr>
+      <p:sp>
+        <p:nvSpPr>
+          <p:cNvPr id="2" name="Slide Image Placeholder 1"/>
+          <p:cNvSpPr>
+            <a:spLocks noGrp="1" noRot="1" noChangeAspect="1"/>
+          </p:cNvSpPr>
+          <p:nvPr>
+            <p:ph type="sldImg"/>
+          </p:nvPr>
+        </p:nvSpPr>
+        <p:spPr/>
+      </p:sp>
+      <p:sp>
+        <p:nvSpPr>
+          <p:cNvPr id="3" name="Notes Placeholder 2"/>
+          <p:cNvSpPr>
+            <a:spLocks noGrp="1"/>
+          </p:cNvSpPr>
+          <p:nvPr>
+            <p:ph type="body" idx="1"/>
+          </p:nvPr>
+        </p:nvSpPr>
+        <p:spPr/>
+        <p:txBody>
+          <a:bodyPr/>
+          <a:lstStyle/>
+          <a:p>
+            <a:r>
+              <a:rPr lang="en-US" dirty="0"/>
+              <a:t/>
+            </a:r>
+            <a:endParaRPr lang="en-US" dirty="0"/>
+          </a:p>
+        </p:txBody>
+      </p:sp>
+      <p:sp>
+        <p:nvSpPr>
+          <p:cNvPr id="4" name="Slide Number Placeholder 3"/>
+          <p:cNvSpPr>
+            <a:spLocks noGrp="1"/>
+          </p:cNvSpPr>
+          <p:nvPr>
+            <p:ph type="sldNum" sz="quarter" idx="10"/>
+          </p:nvPr>
+        </p:nvSpPr>
+        <p:spPr/>
+        <p:txBody>
+          <a:bodyPr/>
+          <a:lstStyle/>
+          <a:p>
+            <a:fld id="{F7021451-1387-4CA6-816F-3879F97B5CBC}" type="slidenum">
+              <a:rPr lang="en-US"/>
+              <a:t>17</a:t>
+            </a:fld>
+            <a:endParaRPr lang="en-US"/>
+          </a:p>
+        </p:txBody>
+      </p:sp>
+    </p:spTree>
+    <p:extLst>
+      <p:ext uri="{BB962C8B-B14F-4D97-AF65-F5344CB8AC3E}">
+        <p14:creationId xmlns:p14="http://schemas.microsoft.com/office/powerpoint/2010/main" val="1024086991"/>
+      </p:ext>
+    </p:extLst>
+  </p:cSld>
+  <p:clrMapOvr>
+    <a:masterClrMapping/>
+  </p:clrMapOvr>
+</p:notes>
+</file>
+
+<file path=ppt/notesSlides/notesSlide18.xml><?xml version="1.0" encoding="utf-8"?>
+<p:notes xmlns:a="http://schemas.openxmlformats.org/drawingml/2006/main" xmlns:r="http://schemas.openxmlformats.org/officeDocument/2006/relationships" xmlns:p="http://schemas.openxmlformats.org/presentationml/2006/main">
+  <p:cSld>
+    <p:spTree>
+      <p:nvGrpSpPr>
+        <p:cNvPr id="1" name=""/>
+        <p:cNvGrpSpPr/>
+        <p:nvPr/>
+      </p:nvGrpSpPr>
+      <p:grpSpPr>
+        <a:xfrm>
+          <a:off x="0" y="0"/>
+          <a:ext cx="0" cy="0"/>
+          <a:chOff x="0" y="0"/>
+          <a:chExt cx="0" cy="0"/>
+        </a:xfrm>
+      </p:grpSpPr>
+      <p:sp>
+        <p:nvSpPr>
+          <p:cNvPr id="2" name="Slide Image Placeholder 1"/>
+          <p:cNvSpPr>
+            <a:spLocks noGrp="1" noRot="1" noChangeAspect="1"/>
+          </p:cNvSpPr>
+          <p:nvPr>
+            <p:ph type="sldImg"/>
+          </p:nvPr>
+        </p:nvSpPr>
+        <p:spPr/>
+      </p:sp>
+      <p:sp>
+        <p:nvSpPr>
+          <p:cNvPr id="3" name="Notes Placeholder 2"/>
+          <p:cNvSpPr>
+            <a:spLocks noGrp="1"/>
+          </p:cNvSpPr>
+          <p:nvPr>
+            <p:ph type="body" idx="1"/>
+          </p:nvPr>
+        </p:nvSpPr>
+        <p:spPr/>
+        <p:txBody>
+          <a:bodyPr/>
+          <a:lstStyle/>
+          <a:p>
+            <a:r>
+              <a:rPr lang="en-US" dirty="0"/>
+              <a:t/>
+            </a:r>
+            <a:endParaRPr lang="en-US" dirty="0"/>
+          </a:p>
+        </p:txBody>
+      </p:sp>
+      <p:sp>
+        <p:nvSpPr>
+          <p:cNvPr id="4" name="Slide Number Placeholder 3"/>
+          <p:cNvSpPr>
+            <a:spLocks noGrp="1"/>
+          </p:cNvSpPr>
+          <p:nvPr>
+            <p:ph type="sldNum" sz="quarter" idx="10"/>
+          </p:nvPr>
+        </p:nvSpPr>
+        <p:spPr/>
+        <p:txBody>
+          <a:bodyPr/>
+          <a:lstStyle/>
+          <a:p>
+            <a:fld id="{F7021451-1387-4CA6-816F-3879F97B5CBC}" type="slidenum">
+              <a:rPr lang="en-US"/>
+              <a:t>18</a:t>
+            </a:fld>
+            <a:endParaRPr lang="en-US"/>
+          </a:p>
+        </p:txBody>
+      </p:sp>
+    </p:spTree>
+    <p:extLst>
+      <p:ext uri="{BB962C8B-B14F-4D97-AF65-F5344CB8AC3E}">
+        <p14:creationId xmlns:p14="http://schemas.microsoft.com/office/powerpoint/2010/main" val="1024086991"/>
+      </p:ext>
+    </p:extLst>
+  </p:cSld>
+  <p:clrMapOvr>
+    <a:masterClrMapping/>
+  </p:clrMapOvr>
+</p:notes>
+</file>
+
+<file path=ppt/notesSlides/notesSlide19.xml><?xml version="1.0" encoding="utf-8"?>
+<p:notes xmlns:a="http://schemas.openxmlformats.org/drawingml/2006/main" xmlns:r="http://schemas.openxmlformats.org/officeDocument/2006/relationships" xmlns:p="http://schemas.openxmlformats.org/presentationml/2006/main">
+  <p:cSld>
+    <p:spTree>
+      <p:nvGrpSpPr>
+        <p:cNvPr id="1" name=""/>
+        <p:cNvGrpSpPr/>
+        <p:nvPr/>
+      </p:nvGrpSpPr>
+      <p:grpSpPr>
+        <a:xfrm>
+          <a:off x="0" y="0"/>
+          <a:ext cx="0" cy="0"/>
+          <a:chOff x="0" y="0"/>
+          <a:chExt cx="0" cy="0"/>
+        </a:xfrm>
+      </p:grpSpPr>
+      <p:sp>
+        <p:nvSpPr>
+          <p:cNvPr id="2" name="Slide Image Placeholder 1"/>
+          <p:cNvSpPr>
+            <a:spLocks noGrp="1" noRot="1" noChangeAspect="1"/>
+          </p:cNvSpPr>
+          <p:nvPr>
+            <p:ph type="sldImg"/>
+          </p:nvPr>
+        </p:nvSpPr>
+        <p:spPr/>
+      </p:sp>
+      <p:sp>
+        <p:nvSpPr>
+          <p:cNvPr id="3" name="Notes Placeholder 2"/>
+          <p:cNvSpPr>
+            <a:spLocks noGrp="1"/>
+          </p:cNvSpPr>
+          <p:nvPr>
+            <p:ph type="body" idx="1"/>
+          </p:nvPr>
+        </p:nvSpPr>
+        <p:spPr/>
+        <p:txBody>
+          <a:bodyPr/>
+          <a:lstStyle/>
+          <a:p>
+            <a:r>
+              <a:rPr lang="en-US" dirty="0"/>
+              <a:t/>
+            </a:r>
+            <a:endParaRPr lang="en-US" dirty="0"/>
+          </a:p>
+        </p:txBody>
+      </p:sp>
+      <p:sp>
+        <p:nvSpPr>
+          <p:cNvPr id="4" name="Slide Number Placeholder 3"/>
+          <p:cNvSpPr>
+            <a:spLocks noGrp="1"/>
+          </p:cNvSpPr>
+          <p:nvPr>
+            <p:ph type="sldNum" sz="quarter" idx="10"/>
+          </p:nvPr>
+        </p:nvSpPr>
+        <p:spPr/>
+        <p:txBody>
+          <a:bodyPr/>
+          <a:lstStyle/>
+          <a:p>
+            <a:fld id="{F7021451-1387-4CA6-816F-3879F97B5CBC}" type="slidenum">
+              <a:rPr lang="en-US"/>
+              <a:t>19</a:t>
             </a:fld>
             <a:endParaRPr lang="en-US"/>
           </a:p>
@@ -2011,102 +2723,6 @@
         </p:nvSpPr>
         <p:spPr>
           <a:xfrm>
-            <a:off x="406301" y="1223963"/>
-            <a:ext cx="8498026" cy="274290"/>
-          </a:xfrm>
-          <a:prstGeom prst="rect">
-            <a:avLst/>
-          </a:prstGeom>
-          <a:noFill/>
-          <a:ln/>
-        </p:spPr>
-        <p:txBody>
-          <a:bodyPr wrap="square" lIns="0" tIns="0" rIns="0" bIns="0" rtlCol="0" anchor="t"/>
-          <a:lstStyle/>
-          <a:p>
-            <a:pPr algn="l" indent="0" marL="0">
-              <a:lnSpc>
-                <a:spcPts val="2160"/>
-              </a:lnSpc>
-              <a:spcBef>
-                <a:spcPts val="600"/>
-              </a:spcBef>
-              <a:spcAft>
-                <a:spcPts val="800"/>
-              </a:spcAft>
-              <a:buNone/>
-            </a:pPr>
-            <a:r>
-              <a:rPr lang="en-US" sz="1800" b="1" dirty="0">
-                <a:solidFill>
-                  <a:srgbClr val="FE4447"/>
-                </a:solidFill>
-                <a:latin typeface="Georgia" pitchFamily="34" charset="0"/>
-                <a:ea typeface="Georgia" pitchFamily="34" charset="-122"/>
-                <a:cs typeface="Georgia" pitchFamily="34" charset="-120"/>
-              </a:rPr>
-              <a:t>Learning objective</a:t>
-            </a:r>
-            <a:endParaRPr lang="en-US" sz="1800" dirty="0"/>
-          </a:p>
-        </p:txBody>
-      </p:sp>
-      <p:sp>
-        <p:nvSpPr>
-          <p:cNvPr id="6" name="Text 4"/>
-          <p:cNvSpPr/>
-          <p:nvPr/>
-        </p:nvSpPr>
-        <p:spPr>
-          <a:xfrm>
-            <a:off x="406301" y="1637854"/>
-            <a:ext cx="8498026" cy="639812"/>
-          </a:xfrm>
-          <a:prstGeom prst="rect">
-            <a:avLst/>
-          </a:prstGeom>
-          <a:noFill/>
-          <a:ln/>
-        </p:spPr>
-        <p:txBody>
-          <a:bodyPr wrap="square" lIns="0" tIns="0" rIns="0" bIns="0" rtlCol="0" anchor="t"/>
-          <a:lstStyle/>
-          <a:p>
-            <a:pPr algn="l" indent="0" marL="0">
-              <a:lnSpc>
-                <a:spcPts val="1680"/>
-              </a:lnSpc>
-              <a:spcBef>
-                <a:spcPts val="300"/>
-              </a:spcBef>
-              <a:spcAft>
-                <a:spcPts val="300"/>
-              </a:spcAft>
-              <a:buNone/>
-            </a:pPr>
-            <a:r>
-              <a:rPr lang="en-US" sz="1200" dirty="0">
-                <a:solidFill>
-                  <a:srgbClr val="1C2833"/>
-                </a:solidFill>
-                <a:latin typeface="Arial" pitchFamily="34" charset="0"/>
-                <a:ea typeface="Arial" pitchFamily="34" charset="-122"/>
-                <a:cs typeface="Arial" pitchFamily="34" charset="-120"/>
-              </a:rPr>
-              <a:t>By the end of this lesson, students will have identified at least one verifiable source from their anchor module and one verifiable secondary source, recorded each in their journal with the exact citation, and made initial notes on what each source contributes to their project.</a:t>
-            </a:r>
-            <a:endParaRPr lang="en-US" sz="1200" dirty="0"/>
-          </a:p>
-        </p:txBody>
-      </p:sp>
-      <p:sp>
-        <p:nvSpPr>
-          <p:cNvPr id="7" name="Text 5"/>
-          <p:cNvSpPr/>
-          <p:nvPr/>
-        </p:nvSpPr>
-        <p:spPr>
-          <a:xfrm>
             <a:off x="406301" y="4434929"/>
             <a:ext cx="8498026" cy="213271"/>
           </a:xfrm>
@@ -2251,7 +2867,7 @@
                 <a:ea typeface="Georgia" pitchFamily="34" charset="-122"/>
                 <a:cs typeface="Georgia" pitchFamily="34" charset="-120"/>
               </a:rPr>
-              <a:t>Teacher notes</a:t>
+              <a:t>Activity (25 min) — Source hunt</a:t>
             </a:r>
             <a:endParaRPr lang="en-US" sz="1800" dirty="0"/>
           </a:p>
@@ -2266,7 +2882,7 @@
         <p:spPr>
           <a:xfrm>
             <a:off x="406301" y="870942"/>
-            <a:ext cx="8498026" cy="1289149"/>
+            <a:ext cx="8498026" cy="222796"/>
           </a:xfrm>
           <a:prstGeom prst="rect">
             <a:avLst/>
@@ -2299,7 +2915,7 @@
                 <a:ea typeface="Arial" pitchFamily="34" charset="-122"/>
                 <a:cs typeface="Arial" pitchFamily="34" charset="-120"/>
               </a:rPr>
-              <a:t>– Some students will find no relevant sources in their anchor module's cache. Walk over and help — sometimes the relevant verse is in a </a:t>
+              <a:t>Refer to </a:t>
             </a:r>
             <a:pPr algn="l" indent="0" marL="0">
               <a:lnSpc>
@@ -2314,15 +2930,15 @@
               <a:buNone/>
             </a:pPr>
             <a:r>
-              <a:rPr lang="en-US" sz="1200" i="1" dirty="0">
-                <a:solidFill>
-                  <a:srgbClr val="1C2833"/>
-                </a:solidFill>
-                <a:latin typeface="Arial" pitchFamily="34" charset="0"/>
-                <a:ea typeface="Arial" pitchFamily="34" charset="-122"/>
-                <a:cs typeface="Arial" pitchFamily="34" charset="-120"/>
-              </a:rPr>
-              <a:t>different</a:t>
+              <a:rPr lang="en-US" sz="1200" dirty="0">
+                <a:solidFill>
+                  <a:srgbClr val="1C2833"/>
+                </a:solidFill>
+                <a:latin typeface="Arial" pitchFamily="34" charset="0"/>
+                <a:ea typeface="Arial" pitchFamily="34" charset="-122"/>
+                <a:cs typeface="Arial" pitchFamily="34" charset="-120"/>
+              </a:rPr>
+              <a:t>activities/activity-01-source-hunt.md</a:t>
             </a:r>
             <a:pPr algn="l" indent="0" marL="0">
               <a:lnSpc>
@@ -2345,99 +2961,7 @@
                 <a:ea typeface="Arial" pitchFamily="34" charset="-122"/>
                 <a:cs typeface="Arial" pitchFamily="34" charset="-120"/>
               </a:rPr>
-              <a:t> module (e.g. a Doṣa project may pull from Module 3 Ayurveda rather than Module 4). – The Project 9 (multiplication comparison) anchor sources are slightly different — they include Tirthaji's book and the day-by-day worked examples from Modules 7, 9, 11. Help these students locate the right pages. – Project 7 (sustainability audit) students often want to leap straight to primary observation. Hold them: they need at least one </a:t>
-            </a:r>
-            <a:pPr algn="l" indent="0" marL="0">
-              <a:lnSpc>
-                <a:spcPts val="1680"/>
-              </a:lnSpc>
-              <a:spcBef>
-                <a:spcPts val="300"/>
-              </a:spcBef>
-              <a:spcAft>
-                <a:spcPts val="300"/>
-              </a:spcAft>
-              <a:buNone/>
-            </a:pPr>
-            <a:r>
-              <a:rPr lang="en-US" sz="1200" i="1" dirty="0">
-                <a:solidFill>
-                  <a:srgbClr val="1C2833"/>
-                </a:solidFill>
-                <a:latin typeface="Arial" pitchFamily="34" charset="0"/>
-                <a:ea typeface="Arial" pitchFamily="34" charset="-122"/>
-                <a:cs typeface="Arial" pitchFamily="34" charset="-120"/>
-              </a:rPr>
-              <a:t>prior</a:t>
-            </a:r>
-            <a:pPr algn="l" indent="0" marL="0">
-              <a:lnSpc>
-                <a:spcPts val="1680"/>
-              </a:lnSpc>
-              <a:spcBef>
-                <a:spcPts val="300"/>
-              </a:spcBef>
-              <a:spcAft>
-                <a:spcPts val="300"/>
-              </a:spcAft>
-              <a:buNone/>
-            </a:pPr>
-            <a:r>
-              <a:rPr lang="en-US" sz="1200" dirty="0">
-                <a:solidFill>
-                  <a:srgbClr val="1C2833"/>
-                </a:solidFill>
-                <a:latin typeface="Arial" pitchFamily="34" charset="0"/>
-                <a:ea typeface="Arial" pitchFamily="34" charset="-122"/>
-                <a:cs typeface="Arial" pitchFamily="34" charset="-120"/>
-              </a:rPr>
-              <a:t> source to anchor their framework first. Module 13's </a:t>
-            </a:r>
-            <a:pPr algn="l" indent="0" marL="0">
-              <a:lnSpc>
-                <a:spcPts val="1680"/>
-              </a:lnSpc>
-              <a:spcBef>
-                <a:spcPts val="300"/>
-              </a:spcBef>
-              <a:spcAft>
-                <a:spcPts val="300"/>
-              </a:spcAft>
-              <a:buNone/>
-            </a:pPr>
-            <a:r>
-              <a:rPr lang="en-US" sz="1200" dirty="0">
-                <a:solidFill>
-                  <a:srgbClr val="1C2833"/>
-                </a:solidFill>
-                <a:latin typeface="Arial" pitchFamily="34" charset="0"/>
-                <a:ea typeface="Arial" pitchFamily="34" charset="-122"/>
-                <a:cs typeface="Arial" pitchFamily="34" charset="-120"/>
-              </a:rPr>
-              <a:t>sources.md</a:t>
-            </a:r>
-            <a:pPr algn="l" indent="0" marL="0">
-              <a:lnSpc>
-                <a:spcPts val="1680"/>
-              </a:lnSpc>
-              <a:spcBef>
-                <a:spcPts val="300"/>
-              </a:spcBef>
-              <a:spcAft>
-                <a:spcPts val="300"/>
-              </a:spcAft>
-              <a:buNone/>
-            </a:pPr>
-            <a:r>
-              <a:rPr lang="en-US" sz="1200" dirty="0">
-                <a:solidFill>
-                  <a:srgbClr val="1C2833"/>
-                </a:solidFill>
-                <a:latin typeface="Arial" pitchFamily="34" charset="0"/>
-                <a:ea typeface="Arial" pitchFamily="34" charset="-122"/>
-                <a:cs typeface="Arial" pitchFamily="34" charset="-120"/>
-              </a:rPr>
-              <a:t> (when available) is the place.</a:t>
+              <a:t> for the full activity. Quick summary:</a:t>
             </a:r>
             <a:endParaRPr lang="en-US" sz="1200" dirty="0"/>
           </a:p>
@@ -2595,6 +3119,3157 @@
                 <a:ea typeface="Georgia" pitchFamily="34" charset="-122"/>
                 <a:cs typeface="Georgia" pitchFamily="34" charset="-120"/>
               </a:rPr>
+              <a:t>Activity (25 min) — Source hunt (cont.)</a:t>
+            </a:r>
+            <a:endParaRPr lang="en-US" sz="1800" dirty="0"/>
+          </a:p>
+        </p:txBody>
+      </p:sp>
+      <p:sp>
+        <p:nvSpPr>
+          <p:cNvPr id="4" name="Text 2"/>
+          <p:cNvSpPr/>
+          <p:nvPr/>
+        </p:nvSpPr>
+        <p:spPr>
+          <a:xfrm>
+            <a:off x="634901" y="883593"/>
+            <a:ext cx="8102798" cy="1237952"/>
+          </a:xfrm>
+          <a:prstGeom prst="rect">
+            <a:avLst/>
+          </a:prstGeom>
+          <a:noFill/>
+          <a:ln/>
+        </p:spPr>
+        <p:txBody>
+          <a:bodyPr wrap="square" lIns="0" tIns="0" rIns="0" bIns="0" rtlCol="0" anchor="t"/>
+          <a:lstStyle/>
+          <a:p>
+            <a:pPr algn="l" marL="342900" indent="-342900">
+              <a:lnSpc>
+                <a:spcPts val="1620"/>
+              </a:lnSpc>
+              <a:spcAft>
+                <a:spcPts val="300"/>
+              </a:spcAft>
+              <a:buSzPct val="100000"/>
+              <a:buChar char="•"/>
+            </a:pPr>
+            <a:r>
+              <a:rPr lang="en-US" sz="1200" dirty="0">
+                <a:solidFill>
+                  <a:srgbClr val="1C2833"/>
+                </a:solidFill>
+                <a:latin typeface="Arial" pitchFamily="34" charset="0"/>
+                <a:ea typeface="Arial" pitchFamily="34" charset="-122"/>
+                <a:cs typeface="Arial" pitchFamily="34" charset="-120"/>
+              </a:rPr>
+              <a:t>Students sit in clusters by anchor module (all Module 10 students together, all Module 4 together, etc.). This lets them help each other find the right cache file.</a:t>
+            </a:r>
+            <a:endParaRPr lang="en-US" sz="1200" dirty="0"/>
+          </a:p>
+          <a:p>
+            <a:pPr algn="l" marL="342900" indent="-342900">
+              <a:lnSpc>
+                <a:spcPts val="1620"/>
+              </a:lnSpc>
+              <a:spcAft>
+                <a:spcPts val="300"/>
+              </a:spcAft>
+              <a:buSzPct val="100000"/>
+              <a:buChar char="•"/>
+            </a:pPr>
+            <a:r>
+              <a:rPr lang="en-US" sz="1200" dirty="0">
+                <a:solidFill>
+                  <a:srgbClr val="1C2833"/>
+                </a:solidFill>
+                <a:latin typeface="Arial" pitchFamily="34" charset="0"/>
+                <a:ea typeface="Arial" pitchFamily="34" charset="-122"/>
+                <a:cs typeface="Arial" pitchFamily="34" charset="-120"/>
+              </a:rPr>
+              <a:t>Each student opens their anchor module's </a:t>
+            </a:r>
+            <a:pPr algn="l" indent="0" marL="0">
+              <a:lnSpc>
+                <a:spcPts val="1620"/>
+              </a:lnSpc>
+              <a:spcAft>
+                <a:spcPts val="300"/>
+              </a:spcAft>
+              <a:buNone/>
+            </a:pPr>
+            <a:r>
+              <a:rPr lang="en-US" sz="1200" dirty="0">
+                <a:solidFill>
+                  <a:srgbClr val="1C2833"/>
+                </a:solidFill>
+                <a:latin typeface="Arial" pitchFamily="34" charset="0"/>
+                <a:ea typeface="Arial" pitchFamily="34" charset="-122"/>
+                <a:cs typeface="Arial" pitchFamily="34" charset="-120"/>
+              </a:rPr>
+              <a:t>sources.md</a:t>
+            </a:r>
+            <a:pPr algn="l" indent="0" marL="0">
+              <a:lnSpc>
+                <a:spcPts val="1620"/>
+              </a:lnSpc>
+              <a:spcAft>
+                <a:spcPts val="300"/>
+              </a:spcAft>
+              <a:buNone/>
+            </a:pPr>
+            <a:r>
+              <a:rPr lang="en-US" sz="1200" dirty="0">
+                <a:solidFill>
+                  <a:srgbClr val="1C2833"/>
+                </a:solidFill>
+                <a:latin typeface="Arial" pitchFamily="34" charset="0"/>
+                <a:ea typeface="Arial" pitchFamily="34" charset="-122"/>
+                <a:cs typeface="Arial" pitchFamily="34" charset="-120"/>
+              </a:rPr>
+              <a:t> and </a:t>
+            </a:r>
+            <a:pPr algn="l" indent="0" marL="0">
+              <a:lnSpc>
+                <a:spcPts val="1620"/>
+              </a:lnSpc>
+              <a:spcAft>
+                <a:spcPts val="300"/>
+              </a:spcAft>
+              <a:buNone/>
+            </a:pPr>
+            <a:r>
+              <a:rPr lang="en-US" sz="1200" dirty="0">
+                <a:solidFill>
+                  <a:srgbClr val="1C2833"/>
+                </a:solidFill>
+                <a:latin typeface="Arial" pitchFamily="34" charset="0"/>
+                <a:ea typeface="Arial" pitchFamily="34" charset="-122"/>
+                <a:cs typeface="Arial" pitchFamily="34" charset="-120"/>
+              </a:rPr>
+              <a:t>.rag-cache/</a:t>
+            </a:r>
+            <a:pPr algn="l" indent="0" marL="0">
+              <a:lnSpc>
+                <a:spcPts val="1620"/>
+              </a:lnSpc>
+              <a:spcAft>
+                <a:spcPts val="300"/>
+              </a:spcAft>
+              <a:buNone/>
+            </a:pPr>
+            <a:r>
+              <a:rPr lang="en-US" sz="1200" dirty="0">
+                <a:solidFill>
+                  <a:srgbClr val="1C2833"/>
+                </a:solidFill>
+                <a:latin typeface="Arial" pitchFamily="34" charset="0"/>
+                <a:ea typeface="Arial" pitchFamily="34" charset="-122"/>
+                <a:cs typeface="Arial" pitchFamily="34" charset="-120"/>
+              </a:rPr>
+              <a:t>. They scan for relevant entries.</a:t>
+            </a:r>
+            <a:endParaRPr lang="en-US" sz="1200" dirty="0"/>
+          </a:p>
+          <a:p>
+            <a:pPr algn="l" marL="342900" indent="-342900">
+              <a:lnSpc>
+                <a:spcPts val="1620"/>
+              </a:lnSpc>
+              <a:spcAft>
+                <a:spcPts val="300"/>
+              </a:spcAft>
+              <a:buSzPct val="100000"/>
+              <a:buChar char="•"/>
+            </a:pPr>
+            <a:r>
+              <a:rPr lang="en-US" sz="1200" dirty="0">
+                <a:solidFill>
+                  <a:srgbClr val="1C2833"/>
+                </a:solidFill>
+                <a:latin typeface="Arial" pitchFamily="34" charset="0"/>
+                <a:ea typeface="Arial" pitchFamily="34" charset="-122"/>
+                <a:cs typeface="Arial" pitchFamily="34" charset="-120"/>
+              </a:rPr>
+              <a:t>For each candidate source they want to use, they fill in a </a:t>
+            </a:r>
+            <a:pPr algn="l" indent="0" marL="0">
+              <a:lnSpc>
+                <a:spcPts val="1620"/>
+              </a:lnSpc>
+              <a:spcAft>
+                <a:spcPts val="300"/>
+              </a:spcAft>
+              <a:buNone/>
+            </a:pPr>
+            <a:r>
+              <a:rPr lang="en-US" sz="1200" b="1" dirty="0">
+                <a:solidFill>
+                  <a:srgbClr val="1C2833"/>
+                </a:solidFill>
+                <a:latin typeface="Arial" pitchFamily="34" charset="0"/>
+                <a:ea typeface="Arial" pitchFamily="34" charset="-122"/>
+                <a:cs typeface="Arial" pitchFamily="34" charset="-120"/>
+              </a:rPr>
+              <a:t>citation slip</a:t>
+            </a:r>
+            <a:pPr algn="l" indent="0" marL="0">
+              <a:lnSpc>
+                <a:spcPts val="1620"/>
+              </a:lnSpc>
+              <a:spcAft>
+                <a:spcPts val="300"/>
+              </a:spcAft>
+              <a:buNone/>
+            </a:pPr>
+            <a:r>
+              <a:rPr lang="en-US" sz="1200" dirty="0">
+                <a:solidFill>
+                  <a:srgbClr val="1C2833"/>
+                </a:solidFill>
+                <a:latin typeface="Arial" pitchFamily="34" charset="0"/>
+                <a:ea typeface="Arial" pitchFamily="34" charset="-122"/>
+                <a:cs typeface="Arial" pitchFamily="34" charset="-120"/>
+              </a:rPr>
+              <a:t> (template below).</a:t>
+            </a:r>
+            <a:endParaRPr lang="en-US" sz="1200" dirty="0"/>
+          </a:p>
+          <a:p>
+            <a:pPr algn="l" marL="342900" indent="-342900">
+              <a:lnSpc>
+                <a:spcPts val="1620"/>
+              </a:lnSpc>
+              <a:spcAft>
+                <a:spcPts val="300"/>
+              </a:spcAft>
+              <a:buSzPct val="100000"/>
+              <a:buChar char="•"/>
+            </a:pPr>
+            <a:r>
+              <a:rPr lang="en-US" sz="1200" dirty="0">
+                <a:solidFill>
+                  <a:srgbClr val="1C2833"/>
+                </a:solidFill>
+                <a:latin typeface="Arial" pitchFamily="34" charset="0"/>
+                <a:ea typeface="Arial" pitchFamily="34" charset="-122"/>
+                <a:cs typeface="Arial" pitchFamily="34" charset="-120"/>
+              </a:rPr>
+              <a:t>Minimum: 2 completed slips by end of class.</a:t>
+            </a:r>
+            <a:endParaRPr lang="en-US" sz="1200" dirty="0"/>
+          </a:p>
+        </p:txBody>
+      </p:sp>
+      <p:sp>
+        <p:nvSpPr>
+          <p:cNvPr id="5" name="Text 3"/>
+          <p:cNvSpPr/>
+          <p:nvPr/>
+        </p:nvSpPr>
+        <p:spPr>
+          <a:xfrm>
+            <a:off x="406301" y="4434929"/>
+            <a:ext cx="8498026" cy="213271"/>
+          </a:xfrm>
+          <a:prstGeom prst="rect">
+            <a:avLst/>
+          </a:prstGeom>
+          <a:noFill/>
+          <a:ln/>
+        </p:spPr>
+        <p:txBody>
+          <a:bodyPr wrap="square" lIns="0" tIns="0" rIns="0" bIns="0" rtlCol="0" anchor="t"/>
+          <a:lstStyle/>
+          <a:p>
+            <a:pPr algn="l" indent="0" marL="0">
+              <a:lnSpc>
+                <a:spcPts val="1680"/>
+              </a:lnSpc>
+              <a:spcBef>
+                <a:spcPts val="300"/>
+              </a:spcBef>
+              <a:spcAft>
+                <a:spcPts val="300"/>
+              </a:spcAft>
+              <a:buNone/>
+            </a:pPr>
+            <a:r>
+              <a:rPr lang="en-US" sz="1200" dirty="0">
+                <a:solidFill>
+                  <a:srgbClr val="1C2833"/>
+                </a:solidFill>
+                <a:latin typeface="Arial" pitchFamily="34" charset="0"/>
+                <a:ea typeface="Arial" pitchFamily="34" charset="-122"/>
+                <a:cs typeface="Arial" pitchFamily="34" charset="-120"/>
+              </a:rPr>
+              <a:t>Middle ·  · IKS Curriculum</a:t>
+            </a:r>
+            <a:endParaRPr lang="en-US" sz="1200" dirty="0"/>
+          </a:p>
+        </p:txBody>
+      </p:sp>
+    </p:spTree>
+  </p:cSld>
+  <p:clrMapOvr>
+    <a:masterClrMapping/>
+  </p:clrMapOvr>
+</p:sld>
+</file>
+
+<file path=ppt/slides/slide12.xml><?xml version="1.0" encoding="utf-8"?>
+<p:sld xmlns:a="http://schemas.openxmlformats.org/drawingml/2006/main" xmlns:r="http://schemas.openxmlformats.org/officeDocument/2006/relationships" xmlns:p="http://schemas.openxmlformats.org/presentationml/2006/main">
+  <p:cSld name="Slide 12">
+    <p:bg>
+      <p:bgPr>
+        <a:solidFill>
+          <a:srgbClr val="FFFFFF"/>
+        </a:solidFill>
+      </p:bgPr>
+    </p:bg>
+    <p:spTree>
+      <p:nvGrpSpPr>
+        <p:cNvPr id="1" name=""/>
+        <p:cNvGrpSpPr/>
+        <p:nvPr/>
+      </p:nvGrpSpPr>
+      <p:grpSpPr>
+        <a:xfrm>
+          <a:off x="0" y="0"/>
+          <a:ext cx="0" cy="0"/>
+          <a:chOff x="0" y="0"/>
+          <a:chExt cx="0" cy="0"/>
+        </a:xfrm>
+      </p:grpSpPr>
+      <p:sp>
+        <p:nvSpPr>
+          <p:cNvPr id="2" name="Text 0"/>
+          <p:cNvSpPr/>
+          <p:nvPr/>
+        </p:nvSpPr>
+        <p:spPr>
+          <a:xfrm>
+            <a:off x="0" y="0"/>
+            <a:ext cx="9144000" cy="101501"/>
+          </a:xfrm>
+          <a:prstGeom prst="rect">
+            <a:avLst/>
+          </a:prstGeom>
+          <a:solidFill>
+            <a:srgbClr val="277884"/>
+          </a:solidFill>
+          <a:ln/>
+        </p:spPr>
+        <p:txBody>
+          <a:bodyPr wrap="square" rtlCol="0" anchor="ctr"/>
+          <a:lstStyle/>
+          <a:p>
+            <a:pPr indent="0" marL="0">
+              <a:buNone/>
+            </a:pPr>
+            <a:endParaRPr lang="en-US" dirty="0"/>
+          </a:p>
+        </p:txBody>
+      </p:sp>
+      <p:sp>
+        <p:nvSpPr>
+          <p:cNvPr id="3" name="Text 1"/>
+          <p:cNvSpPr/>
+          <p:nvPr/>
+        </p:nvSpPr>
+        <p:spPr>
+          <a:xfrm>
+            <a:off x="406301" y="457051"/>
+            <a:ext cx="8498026" cy="274290"/>
+          </a:xfrm>
+          <a:prstGeom prst="rect">
+            <a:avLst/>
+          </a:prstGeom>
+          <a:noFill/>
+          <a:ln/>
+        </p:spPr>
+        <p:txBody>
+          <a:bodyPr wrap="square" lIns="0" tIns="0" rIns="0" bIns="0" rtlCol="0" anchor="t"/>
+          <a:lstStyle/>
+          <a:p>
+            <a:pPr algn="l" indent="0" marL="0">
+              <a:lnSpc>
+                <a:spcPts val="2160"/>
+              </a:lnSpc>
+              <a:spcBef>
+                <a:spcPts val="600"/>
+              </a:spcBef>
+              <a:spcAft>
+                <a:spcPts val="800"/>
+              </a:spcAft>
+              <a:buNone/>
+            </a:pPr>
+            <a:r>
+              <a:rPr lang="en-US" sz="1800" b="1" dirty="0">
+                <a:solidFill>
+                  <a:srgbClr val="FE4447"/>
+                </a:solidFill>
+                <a:latin typeface="Georgia" pitchFamily="34" charset="0"/>
+                <a:ea typeface="Georgia" pitchFamily="34" charset="-122"/>
+                <a:cs typeface="Georgia" pitchFamily="34" charset="-120"/>
+              </a:rPr>
+              <a:t>Activity (25 min) — Source hunt (cont.)</a:t>
+            </a:r>
+            <a:endParaRPr lang="en-US" sz="1800" dirty="0"/>
+          </a:p>
+        </p:txBody>
+      </p:sp>
+      <p:sp>
+        <p:nvSpPr>
+          <p:cNvPr id="4" name="Text 2"/>
+          <p:cNvSpPr/>
+          <p:nvPr/>
+        </p:nvSpPr>
+        <p:spPr>
+          <a:xfrm>
+            <a:off x="406301" y="909042"/>
+            <a:ext cx="8498026" cy="209550"/>
+          </a:xfrm>
+          <a:prstGeom prst="rect">
+            <a:avLst/>
+          </a:prstGeom>
+          <a:noFill/>
+          <a:ln/>
+        </p:spPr>
+        <p:txBody>
+          <a:bodyPr wrap="square" lIns="0" tIns="0" rIns="0" bIns="0" rtlCol="0" anchor="t"/>
+          <a:lstStyle/>
+          <a:p>
+            <a:pPr algn="l" indent="0" marL="0">
+              <a:spcBef>
+                <a:spcPts val="600"/>
+              </a:spcBef>
+              <a:spcAft>
+                <a:spcPts val="400"/>
+              </a:spcAft>
+              <a:buNone/>
+            </a:pPr>
+            <a:r>
+              <a:rPr lang="en-US" sz="1400" b="1" dirty="0">
+                <a:solidFill>
+                  <a:srgbClr val="1C2833"/>
+                </a:solidFill>
+                <a:latin typeface="Arial" pitchFamily="34" charset="0"/>
+                <a:ea typeface="Arial" pitchFamily="34" charset="-122"/>
+                <a:cs typeface="Arial" pitchFamily="34" charset="-120"/>
+              </a:rPr>
+              <a:t>Citation slip template</a:t>
+            </a:r>
+            <a:endParaRPr lang="en-US" sz="1400" dirty="0"/>
+          </a:p>
+        </p:txBody>
+      </p:sp>
+      <p:sp>
+        <p:nvSpPr>
+          <p:cNvPr id="5" name="Text 3"/>
+          <p:cNvSpPr/>
+          <p:nvPr/>
+        </p:nvSpPr>
+        <p:spPr>
+          <a:xfrm>
+            <a:off x="406301" y="4434929"/>
+            <a:ext cx="8498026" cy="213271"/>
+          </a:xfrm>
+          <a:prstGeom prst="rect">
+            <a:avLst/>
+          </a:prstGeom>
+          <a:noFill/>
+          <a:ln/>
+        </p:spPr>
+        <p:txBody>
+          <a:bodyPr wrap="square" lIns="0" tIns="0" rIns="0" bIns="0" rtlCol="0" anchor="t"/>
+          <a:lstStyle/>
+          <a:p>
+            <a:pPr algn="l" indent="0" marL="0">
+              <a:lnSpc>
+                <a:spcPts val="1680"/>
+              </a:lnSpc>
+              <a:spcBef>
+                <a:spcPts val="300"/>
+              </a:spcBef>
+              <a:spcAft>
+                <a:spcPts val="300"/>
+              </a:spcAft>
+              <a:buNone/>
+            </a:pPr>
+            <a:r>
+              <a:rPr lang="en-US" sz="1200" dirty="0">
+                <a:solidFill>
+                  <a:srgbClr val="1C2833"/>
+                </a:solidFill>
+                <a:latin typeface="Arial" pitchFamily="34" charset="0"/>
+                <a:ea typeface="Arial" pitchFamily="34" charset="-122"/>
+                <a:cs typeface="Arial" pitchFamily="34" charset="-120"/>
+              </a:rPr>
+              <a:t>Middle ·  · IKS Curriculum</a:t>
+            </a:r>
+            <a:endParaRPr lang="en-US" sz="1200" dirty="0"/>
+          </a:p>
+        </p:txBody>
+      </p:sp>
+    </p:spTree>
+  </p:cSld>
+  <p:clrMapOvr>
+    <a:masterClrMapping/>
+  </p:clrMapOvr>
+</p:sld>
+</file>
+
+<file path=ppt/slides/slide13.xml><?xml version="1.0" encoding="utf-8"?>
+<p:sld xmlns:a="http://schemas.openxmlformats.org/drawingml/2006/main" xmlns:r="http://schemas.openxmlformats.org/officeDocument/2006/relationships" xmlns:p="http://schemas.openxmlformats.org/presentationml/2006/main">
+  <p:cSld name="Slide 13">
+    <p:bg>
+      <p:bgPr>
+        <a:solidFill>
+          <a:srgbClr val="FFFFFF"/>
+        </a:solidFill>
+      </p:bgPr>
+    </p:bg>
+    <p:spTree>
+      <p:nvGrpSpPr>
+        <p:cNvPr id="1" name=""/>
+        <p:cNvGrpSpPr/>
+        <p:nvPr/>
+      </p:nvGrpSpPr>
+      <p:grpSpPr>
+        <a:xfrm>
+          <a:off x="0" y="0"/>
+          <a:ext cx="0" cy="0"/>
+          <a:chOff x="0" y="0"/>
+          <a:chExt cx="0" cy="0"/>
+        </a:xfrm>
+      </p:grpSpPr>
+      <p:sp>
+        <p:nvSpPr>
+          <p:cNvPr id="2" name="Text 0"/>
+          <p:cNvSpPr/>
+          <p:nvPr/>
+        </p:nvSpPr>
+        <p:spPr>
+          <a:xfrm>
+            <a:off x="0" y="0"/>
+            <a:ext cx="9144000" cy="101501"/>
+          </a:xfrm>
+          <a:prstGeom prst="rect">
+            <a:avLst/>
+          </a:prstGeom>
+          <a:solidFill>
+            <a:srgbClr val="277884"/>
+          </a:solidFill>
+          <a:ln/>
+        </p:spPr>
+        <p:txBody>
+          <a:bodyPr wrap="square" rtlCol="0" anchor="ctr"/>
+          <a:lstStyle/>
+          <a:p>
+            <a:pPr indent="0" marL="0">
+              <a:buNone/>
+            </a:pPr>
+            <a:endParaRPr lang="en-US" dirty="0"/>
+          </a:p>
+        </p:txBody>
+      </p:sp>
+      <p:sp>
+        <p:nvSpPr>
+          <p:cNvPr id="3" name="Text 1"/>
+          <p:cNvSpPr/>
+          <p:nvPr/>
+        </p:nvSpPr>
+        <p:spPr>
+          <a:xfrm>
+            <a:off x="406301" y="457051"/>
+            <a:ext cx="8498026" cy="274290"/>
+          </a:xfrm>
+          <a:prstGeom prst="rect">
+            <a:avLst/>
+          </a:prstGeom>
+          <a:noFill/>
+          <a:ln/>
+        </p:spPr>
+        <p:txBody>
+          <a:bodyPr wrap="square" lIns="0" tIns="0" rIns="0" bIns="0" rtlCol="0" anchor="t"/>
+          <a:lstStyle/>
+          <a:p>
+            <a:pPr algn="l" indent="0" marL="0">
+              <a:lnSpc>
+                <a:spcPts val="2160"/>
+              </a:lnSpc>
+              <a:spcBef>
+                <a:spcPts val="600"/>
+              </a:spcBef>
+              <a:spcAft>
+                <a:spcPts val="800"/>
+              </a:spcAft>
+              <a:buNone/>
+            </a:pPr>
+            <a:r>
+              <a:rPr lang="en-US" sz="1800" b="1" dirty="0">
+                <a:solidFill>
+                  <a:srgbClr val="FE4447"/>
+                </a:solidFill>
+                <a:latin typeface="Georgia" pitchFamily="34" charset="0"/>
+                <a:ea typeface="Georgia" pitchFamily="34" charset="-122"/>
+                <a:cs typeface="Georgia" pitchFamily="34" charset="-120"/>
+              </a:rPr>
+              <a:t>Activity (25 min) — Source hunt (cont.)</a:t>
+            </a:r>
+            <a:endParaRPr lang="en-US" sz="1800" dirty="0"/>
+          </a:p>
+        </p:txBody>
+      </p:sp>
+      <p:sp>
+        <p:nvSpPr>
+          <p:cNvPr id="4" name="Text 2"/>
+          <p:cNvSpPr/>
+          <p:nvPr/>
+        </p:nvSpPr>
+        <p:spPr>
+          <a:xfrm>
+            <a:off x="406301" y="883593"/>
+            <a:ext cx="8331398" cy="2697956"/>
+          </a:xfrm>
+          <a:prstGeom prst="rect">
+            <a:avLst/>
+          </a:prstGeom>
+          <a:solidFill>
+            <a:srgbClr val="F4F8F9"/>
+          </a:solidFill>
+          <a:ln/>
+        </p:spPr>
+        <p:txBody>
+          <a:bodyPr wrap="square" rtlCol="0" anchor="ctr"/>
+          <a:lstStyle/>
+          <a:p>
+            <a:pPr indent="0" marL="0">
+              <a:buNone/>
+            </a:pPr>
+            <a:endParaRPr lang="en-US" dirty="0"/>
+          </a:p>
+        </p:txBody>
+      </p:sp>
+      <p:sp>
+        <p:nvSpPr>
+          <p:cNvPr id="5" name="Shape 3"/>
+          <p:cNvSpPr/>
+          <p:nvPr/>
+        </p:nvSpPr>
+        <p:spPr>
+          <a:xfrm>
+            <a:off x="430113" y="883593"/>
+            <a:ext cx="0" cy="2697956"/>
+          </a:xfrm>
+          <a:prstGeom prst="line">
+            <a:avLst/>
+          </a:prstGeom>
+          <a:noFill/>
+          <a:ln w="47625">
+            <a:solidFill>
+              <a:srgbClr val="277884"/>
+            </a:solidFill>
+            <a:prstDash val="solid"/>
+          </a:ln>
+        </p:spPr>
+      </p:sp>
+      <p:sp>
+        <p:nvSpPr>
+          <p:cNvPr id="6" name="Text 4"/>
+          <p:cNvSpPr/>
+          <p:nvPr/>
+        </p:nvSpPr>
+        <p:spPr>
+          <a:xfrm>
+            <a:off x="631627" y="1010543"/>
+            <a:ext cx="8086939" cy="174575"/>
+          </a:xfrm>
+          <a:prstGeom prst="rect">
+            <a:avLst/>
+          </a:prstGeom>
+          <a:noFill/>
+          <a:ln/>
+        </p:spPr>
+        <p:txBody>
+          <a:bodyPr wrap="square" lIns="0" tIns="0" rIns="0" bIns="0" rtlCol="0" anchor="t"/>
+          <a:lstStyle/>
+          <a:p>
+            <a:pPr algn="l" indent="0" marL="0">
+              <a:lnSpc>
+                <a:spcPts val="1375"/>
+              </a:lnSpc>
+              <a:buNone/>
+            </a:pPr>
+            <a:r>
+              <a:rPr lang="en-US" sz="1100" dirty="0">
+                <a:solidFill>
+                  <a:srgbClr val="1C2833"/>
+                </a:solidFill>
+                <a:latin typeface="Courier New" pitchFamily="34" charset="0"/>
+                <a:ea typeface="Courier New" pitchFamily="34" charset="-122"/>
+                <a:cs typeface="Courier New" pitchFamily="34" charset="-120"/>
+              </a:rPr>
+              <a:t>CITATION SLIP — Source #__</a:t>
+            </a:r>
+            <a:endParaRPr lang="en-US" sz="1100" dirty="0"/>
+          </a:p>
+        </p:txBody>
+      </p:sp>
+      <p:sp>
+        <p:nvSpPr>
+          <p:cNvPr id="7" name="Text 5"/>
+          <p:cNvSpPr/>
+          <p:nvPr/>
+        </p:nvSpPr>
+        <p:spPr>
+          <a:xfrm>
+            <a:off x="631627" y="1359694"/>
+            <a:ext cx="8086939" cy="174575"/>
+          </a:xfrm>
+          <a:prstGeom prst="rect">
+            <a:avLst/>
+          </a:prstGeom>
+          <a:noFill/>
+          <a:ln/>
+        </p:spPr>
+        <p:txBody>
+          <a:bodyPr wrap="square" lIns="0" tIns="0" rIns="0" bIns="0" rtlCol="0" anchor="t"/>
+          <a:lstStyle/>
+          <a:p>
+            <a:pPr algn="l" indent="0" marL="0">
+              <a:lnSpc>
+                <a:spcPts val="1375"/>
+              </a:lnSpc>
+              <a:buNone/>
+            </a:pPr>
+            <a:r>
+              <a:rPr lang="en-US" sz="1100" dirty="0">
+                <a:solidFill>
+                  <a:srgbClr val="1C2833"/>
+                </a:solidFill>
+                <a:latin typeface="Courier New" pitchFamily="34" charset="0"/>
+                <a:ea typeface="Courier New" pitchFamily="34" charset="-122"/>
+                <a:cs typeface="Courier New" pitchFamily="34" charset="-120"/>
+              </a:rPr>
+              <a:t>Source identifier: __________________________________</a:t>
+            </a:r>
+            <a:endParaRPr lang="en-US" sz="1100" dirty="0"/>
+          </a:p>
+        </p:txBody>
+      </p:sp>
+      <p:sp>
+        <p:nvSpPr>
+          <p:cNvPr id="8" name="Text 6"/>
+          <p:cNvSpPr/>
+          <p:nvPr/>
+        </p:nvSpPr>
+        <p:spPr>
+          <a:xfrm>
+            <a:off x="631627" y="1708845"/>
+            <a:ext cx="8086939" cy="174575"/>
+          </a:xfrm>
+          <a:prstGeom prst="rect">
+            <a:avLst/>
+          </a:prstGeom>
+          <a:noFill/>
+          <a:ln/>
+        </p:spPr>
+        <p:txBody>
+          <a:bodyPr wrap="square" lIns="0" tIns="0" rIns="0" bIns="0" rtlCol="0" anchor="t"/>
+          <a:lstStyle/>
+          <a:p>
+            <a:pPr algn="l" indent="0" marL="0">
+              <a:lnSpc>
+                <a:spcPts val="1375"/>
+              </a:lnSpc>
+              <a:buNone/>
+            </a:pPr>
+            <a:r>
+              <a:rPr lang="en-US" sz="1100" dirty="0">
+                <a:solidFill>
+                  <a:srgbClr val="1C2833"/>
+                </a:solidFill>
+                <a:latin typeface="Courier New" pitchFamily="34" charset="0"/>
+                <a:ea typeface="Courier New" pitchFamily="34" charset="-122"/>
+                <a:cs typeface="Courier New" pitchFamily="34" charset="-120"/>
+              </a:rPr>
+              <a:t>Where I found it: __________________________________</a:t>
+            </a:r>
+            <a:endParaRPr lang="en-US" sz="1100" dirty="0"/>
+          </a:p>
+        </p:txBody>
+      </p:sp>
+      <p:sp>
+        <p:nvSpPr>
+          <p:cNvPr id="9" name="Text 7"/>
+          <p:cNvSpPr/>
+          <p:nvPr/>
+        </p:nvSpPr>
+        <p:spPr>
+          <a:xfrm>
+            <a:off x="631627" y="2057995"/>
+            <a:ext cx="8086939" cy="174575"/>
+          </a:xfrm>
+          <a:prstGeom prst="rect">
+            <a:avLst/>
+          </a:prstGeom>
+          <a:noFill/>
+          <a:ln/>
+        </p:spPr>
+        <p:txBody>
+          <a:bodyPr wrap="square" lIns="0" tIns="0" rIns="0" bIns="0" rtlCol="0" anchor="t"/>
+          <a:lstStyle/>
+          <a:p>
+            <a:pPr algn="l" indent="0" marL="0">
+              <a:lnSpc>
+                <a:spcPts val="1375"/>
+              </a:lnSpc>
+              <a:buNone/>
+            </a:pPr>
+            <a:r>
+              <a:rPr lang="en-US" sz="1100" dirty="0">
+                <a:solidFill>
+                  <a:srgbClr val="1C2833"/>
+                </a:solidFill>
+                <a:latin typeface="Courier New" pitchFamily="34" charset="0"/>
+                <a:ea typeface="Courier New" pitchFamily="34" charset="-122"/>
+                <a:cs typeface="Courier New" pitchFamily="34" charset="-120"/>
+              </a:rPr>
+              <a:t>What it says (1–2 sentences in my own words):</a:t>
+            </a:r>
+            <a:endParaRPr lang="en-US" sz="1100" dirty="0"/>
+          </a:p>
+        </p:txBody>
+      </p:sp>
+      <p:sp>
+        <p:nvSpPr>
+          <p:cNvPr id="10" name="Text 8"/>
+          <p:cNvSpPr/>
+          <p:nvPr/>
+        </p:nvSpPr>
+        <p:spPr>
+          <a:xfrm>
+            <a:off x="631627" y="2232571"/>
+            <a:ext cx="8086939" cy="174575"/>
+          </a:xfrm>
+          <a:prstGeom prst="rect">
+            <a:avLst/>
+          </a:prstGeom>
+          <a:noFill/>
+          <a:ln/>
+        </p:spPr>
+        <p:txBody>
+          <a:bodyPr wrap="square" lIns="0" tIns="0" rIns="0" bIns="0" rtlCol="0" anchor="t"/>
+          <a:lstStyle/>
+          <a:p>
+            <a:pPr algn="l" indent="0" marL="0">
+              <a:lnSpc>
+                <a:spcPts val="1375"/>
+              </a:lnSpc>
+              <a:buNone/>
+            </a:pPr>
+            <a:r>
+              <a:rPr lang="en-US" sz="1100" dirty="0">
+                <a:solidFill>
+                  <a:srgbClr val="1C2833"/>
+                </a:solidFill>
+                <a:latin typeface="Courier New" pitchFamily="34" charset="0"/>
+                <a:ea typeface="Courier New" pitchFamily="34" charset="-122"/>
+                <a:cs typeface="Courier New" pitchFamily="34" charset="-120"/>
+              </a:rPr>
+              <a:t>_______________________________________________</a:t>
+            </a:r>
+            <a:endParaRPr lang="en-US" sz="1100" dirty="0"/>
+          </a:p>
+        </p:txBody>
+      </p:sp>
+      <p:sp>
+        <p:nvSpPr>
+          <p:cNvPr id="11" name="Text 9"/>
+          <p:cNvSpPr/>
+          <p:nvPr/>
+        </p:nvSpPr>
+        <p:spPr>
+          <a:xfrm>
+            <a:off x="631627" y="2407146"/>
+            <a:ext cx="8086939" cy="174575"/>
+          </a:xfrm>
+          <a:prstGeom prst="rect">
+            <a:avLst/>
+          </a:prstGeom>
+          <a:noFill/>
+          <a:ln/>
+        </p:spPr>
+        <p:txBody>
+          <a:bodyPr wrap="square" lIns="0" tIns="0" rIns="0" bIns="0" rtlCol="0" anchor="t"/>
+          <a:lstStyle/>
+          <a:p>
+            <a:pPr algn="l" indent="0" marL="0">
+              <a:lnSpc>
+                <a:spcPts val="1375"/>
+              </a:lnSpc>
+              <a:buNone/>
+            </a:pPr>
+            <a:r>
+              <a:rPr lang="en-US" sz="1100" dirty="0">
+                <a:solidFill>
+                  <a:srgbClr val="1C2833"/>
+                </a:solidFill>
+                <a:latin typeface="Courier New" pitchFamily="34" charset="0"/>
+                <a:ea typeface="Courier New" pitchFamily="34" charset="-122"/>
+                <a:cs typeface="Courier New" pitchFamily="34" charset="-120"/>
+              </a:rPr>
+              <a:t>_______________________________________________</a:t>
+            </a:r>
+            <a:endParaRPr lang="en-US" sz="1100" dirty="0"/>
+          </a:p>
+        </p:txBody>
+      </p:sp>
+      <p:sp>
+        <p:nvSpPr>
+          <p:cNvPr id="12" name="Text 10"/>
+          <p:cNvSpPr/>
+          <p:nvPr/>
+        </p:nvSpPr>
+        <p:spPr>
+          <a:xfrm>
+            <a:off x="631627" y="2756297"/>
+            <a:ext cx="8086939" cy="174575"/>
+          </a:xfrm>
+          <a:prstGeom prst="rect">
+            <a:avLst/>
+          </a:prstGeom>
+          <a:noFill/>
+          <a:ln/>
+        </p:spPr>
+        <p:txBody>
+          <a:bodyPr wrap="square" lIns="0" tIns="0" rIns="0" bIns="0" rtlCol="0" anchor="t"/>
+          <a:lstStyle/>
+          <a:p>
+            <a:pPr algn="l" indent="0" marL="0">
+              <a:lnSpc>
+                <a:spcPts val="1375"/>
+              </a:lnSpc>
+              <a:buNone/>
+            </a:pPr>
+            <a:r>
+              <a:rPr lang="en-US" sz="1100" dirty="0">
+                <a:solidFill>
+                  <a:srgbClr val="1C2833"/>
+                </a:solidFill>
+                <a:latin typeface="Courier New" pitchFamily="34" charset="0"/>
+                <a:ea typeface="Courier New" pitchFamily="34" charset="-122"/>
+                <a:cs typeface="Courier New" pitchFamily="34" charset="-120"/>
+              </a:rPr>
+              <a:t>How this relates to my project (1 sentence):</a:t>
+            </a:r>
+            <a:endParaRPr lang="en-US" sz="1100" dirty="0"/>
+          </a:p>
+        </p:txBody>
+      </p:sp>
+      <p:sp>
+        <p:nvSpPr>
+          <p:cNvPr id="13" name="Text 11"/>
+          <p:cNvSpPr/>
+          <p:nvPr/>
+        </p:nvSpPr>
+        <p:spPr>
+          <a:xfrm>
+            <a:off x="631627" y="2930872"/>
+            <a:ext cx="8086939" cy="174575"/>
+          </a:xfrm>
+          <a:prstGeom prst="rect">
+            <a:avLst/>
+          </a:prstGeom>
+          <a:noFill/>
+          <a:ln/>
+        </p:spPr>
+        <p:txBody>
+          <a:bodyPr wrap="square" lIns="0" tIns="0" rIns="0" bIns="0" rtlCol="0" anchor="t"/>
+          <a:lstStyle/>
+          <a:p>
+            <a:pPr algn="l" indent="0" marL="0">
+              <a:lnSpc>
+                <a:spcPts val="1375"/>
+              </a:lnSpc>
+              <a:buNone/>
+            </a:pPr>
+            <a:r>
+              <a:rPr lang="en-US" sz="1100" dirty="0">
+                <a:solidFill>
+                  <a:srgbClr val="1C2833"/>
+                </a:solidFill>
+                <a:latin typeface="Courier New" pitchFamily="34" charset="0"/>
+                <a:ea typeface="Courier New" pitchFamily="34" charset="-122"/>
+                <a:cs typeface="Courier New" pitchFamily="34" charset="-120"/>
+              </a:rPr>
+              <a:t>_______________________________________________</a:t>
+            </a:r>
+            <a:endParaRPr lang="en-US" sz="1100" dirty="0"/>
+          </a:p>
+        </p:txBody>
+      </p:sp>
+      <p:sp>
+        <p:nvSpPr>
+          <p:cNvPr id="14" name="Text 12"/>
+          <p:cNvSpPr/>
+          <p:nvPr/>
+        </p:nvSpPr>
+        <p:spPr>
+          <a:xfrm>
+            <a:off x="631627" y="3280023"/>
+            <a:ext cx="8086939" cy="174575"/>
+          </a:xfrm>
+          <a:prstGeom prst="rect">
+            <a:avLst/>
+          </a:prstGeom>
+          <a:noFill/>
+          <a:ln/>
+        </p:spPr>
+        <p:txBody>
+          <a:bodyPr wrap="square" lIns="0" tIns="0" rIns="0" bIns="0" rtlCol="0" anchor="t"/>
+          <a:lstStyle/>
+          <a:p>
+            <a:pPr algn="l" indent="0" marL="0">
+              <a:lnSpc>
+                <a:spcPts val="1375"/>
+              </a:lnSpc>
+              <a:buNone/>
+            </a:pPr>
+            <a:r>
+              <a:rPr lang="en-US" sz="1100" dirty="0">
+                <a:solidFill>
+                  <a:srgbClr val="1C2833"/>
+                </a:solidFill>
+                <a:latin typeface="Courier New" pitchFamily="34" charset="0"/>
+                <a:ea typeface="Courier New" pitchFamily="34" charset="-122"/>
+                <a:cs typeface="Courier New" pitchFamily="34" charset="-120"/>
+              </a:rPr>
+              <a:t>This is a [primary text / secondary reference / primary observation] source.</a:t>
+            </a:r>
+            <a:endParaRPr lang="en-US" sz="1100" dirty="0"/>
+          </a:p>
+        </p:txBody>
+      </p:sp>
+      <p:sp>
+        <p:nvSpPr>
+          <p:cNvPr id="15" name="Text 13"/>
+          <p:cNvSpPr/>
+          <p:nvPr/>
+        </p:nvSpPr>
+        <p:spPr>
+          <a:xfrm>
+            <a:off x="406301" y="4434929"/>
+            <a:ext cx="8498026" cy="213271"/>
+          </a:xfrm>
+          <a:prstGeom prst="rect">
+            <a:avLst/>
+          </a:prstGeom>
+          <a:noFill/>
+          <a:ln/>
+        </p:spPr>
+        <p:txBody>
+          <a:bodyPr wrap="square" lIns="0" tIns="0" rIns="0" bIns="0" rtlCol="0" anchor="t"/>
+          <a:lstStyle/>
+          <a:p>
+            <a:pPr algn="l" indent="0" marL="0">
+              <a:lnSpc>
+                <a:spcPts val="1680"/>
+              </a:lnSpc>
+              <a:spcBef>
+                <a:spcPts val="300"/>
+              </a:spcBef>
+              <a:spcAft>
+                <a:spcPts val="300"/>
+              </a:spcAft>
+              <a:buNone/>
+            </a:pPr>
+            <a:r>
+              <a:rPr lang="en-US" sz="1200" dirty="0">
+                <a:solidFill>
+                  <a:srgbClr val="1C2833"/>
+                </a:solidFill>
+                <a:latin typeface="Arial" pitchFamily="34" charset="0"/>
+                <a:ea typeface="Arial" pitchFamily="34" charset="-122"/>
+                <a:cs typeface="Arial" pitchFamily="34" charset="-120"/>
+              </a:rPr>
+              <a:t>Middle ·  · IKS Curriculum</a:t>
+            </a:r>
+            <a:endParaRPr lang="en-US" sz="1200" dirty="0"/>
+          </a:p>
+        </p:txBody>
+      </p:sp>
+    </p:spTree>
+  </p:cSld>
+  <p:clrMapOvr>
+    <a:masterClrMapping/>
+  </p:clrMapOvr>
+</p:sld>
+</file>
+
+<file path=ppt/slides/slide14.xml><?xml version="1.0" encoding="utf-8"?>
+<p:sld xmlns:a="http://schemas.openxmlformats.org/drawingml/2006/main" xmlns:r="http://schemas.openxmlformats.org/officeDocument/2006/relationships" xmlns:p="http://schemas.openxmlformats.org/presentationml/2006/main">
+  <p:cSld name="Slide 14">
+    <p:bg>
+      <p:bgPr>
+        <a:solidFill>
+          <a:srgbClr val="FFFFFF"/>
+        </a:solidFill>
+      </p:bgPr>
+    </p:bg>
+    <p:spTree>
+      <p:nvGrpSpPr>
+        <p:cNvPr id="1" name=""/>
+        <p:cNvGrpSpPr/>
+        <p:nvPr/>
+      </p:nvGrpSpPr>
+      <p:grpSpPr>
+        <a:xfrm>
+          <a:off x="0" y="0"/>
+          <a:ext cx="0" cy="0"/>
+          <a:chOff x="0" y="0"/>
+          <a:chExt cx="0" cy="0"/>
+        </a:xfrm>
+      </p:grpSpPr>
+      <p:sp>
+        <p:nvSpPr>
+          <p:cNvPr id="2" name="Text 0"/>
+          <p:cNvSpPr/>
+          <p:nvPr/>
+        </p:nvSpPr>
+        <p:spPr>
+          <a:xfrm>
+            <a:off x="0" y="0"/>
+            <a:ext cx="9144000" cy="101501"/>
+          </a:xfrm>
+          <a:prstGeom prst="rect">
+            <a:avLst/>
+          </a:prstGeom>
+          <a:solidFill>
+            <a:srgbClr val="277884"/>
+          </a:solidFill>
+          <a:ln/>
+        </p:spPr>
+        <p:txBody>
+          <a:bodyPr wrap="square" rtlCol="0" anchor="ctr"/>
+          <a:lstStyle/>
+          <a:p>
+            <a:pPr indent="0" marL="0">
+              <a:buNone/>
+            </a:pPr>
+            <a:endParaRPr lang="en-US" dirty="0"/>
+          </a:p>
+        </p:txBody>
+      </p:sp>
+      <p:sp>
+        <p:nvSpPr>
+          <p:cNvPr id="3" name="Text 1"/>
+          <p:cNvSpPr/>
+          <p:nvPr/>
+        </p:nvSpPr>
+        <p:spPr>
+          <a:xfrm>
+            <a:off x="406301" y="457051"/>
+            <a:ext cx="8498026" cy="274290"/>
+          </a:xfrm>
+          <a:prstGeom prst="rect">
+            <a:avLst/>
+          </a:prstGeom>
+          <a:noFill/>
+          <a:ln/>
+        </p:spPr>
+        <p:txBody>
+          <a:bodyPr wrap="square" lIns="0" tIns="0" rIns="0" bIns="0" rtlCol="0" anchor="t"/>
+          <a:lstStyle/>
+          <a:p>
+            <a:pPr algn="l" indent="0" marL="0">
+              <a:lnSpc>
+                <a:spcPts val="2160"/>
+              </a:lnSpc>
+              <a:spcBef>
+                <a:spcPts val="600"/>
+              </a:spcBef>
+              <a:spcAft>
+                <a:spcPts val="800"/>
+              </a:spcAft>
+              <a:buNone/>
+            </a:pPr>
+            <a:r>
+              <a:rPr lang="en-US" sz="1800" b="1" dirty="0">
+                <a:solidFill>
+                  <a:srgbClr val="FE4447"/>
+                </a:solidFill>
+                <a:latin typeface="Georgia" pitchFamily="34" charset="0"/>
+                <a:ea typeface="Georgia" pitchFamily="34" charset="-122"/>
+                <a:cs typeface="Georgia" pitchFamily="34" charset="-120"/>
+              </a:rPr>
+              <a:t>Wrap-up (5 min)</a:t>
+            </a:r>
+            <a:endParaRPr lang="en-US" sz="1800" dirty="0"/>
+          </a:p>
+        </p:txBody>
+      </p:sp>
+      <p:sp>
+        <p:nvSpPr>
+          <p:cNvPr id="4" name="Text 2"/>
+          <p:cNvSpPr/>
+          <p:nvPr/>
+        </p:nvSpPr>
+        <p:spPr>
+          <a:xfrm>
+            <a:off x="634901" y="883593"/>
+            <a:ext cx="8102798" cy="975122"/>
+          </a:xfrm>
+          <a:prstGeom prst="rect">
+            <a:avLst/>
+          </a:prstGeom>
+          <a:noFill/>
+          <a:ln/>
+        </p:spPr>
+        <p:txBody>
+          <a:bodyPr wrap="square" lIns="0" tIns="0" rIns="0" bIns="0" rtlCol="0" anchor="t"/>
+          <a:lstStyle/>
+          <a:p>
+            <a:pPr algn="l" marL="342900" indent="-342900">
+              <a:lnSpc>
+                <a:spcPts val="1620"/>
+              </a:lnSpc>
+              <a:spcAft>
+                <a:spcPts val="300"/>
+              </a:spcAft>
+              <a:buSzPct val="100000"/>
+              <a:buChar char="•"/>
+            </a:pPr>
+            <a:r>
+              <a:rPr lang="en-US" sz="1200" b="1" dirty="0">
+                <a:solidFill>
+                  <a:srgbClr val="1C2833"/>
+                </a:solidFill>
+                <a:latin typeface="Arial" pitchFamily="34" charset="0"/>
+                <a:ea typeface="Arial" pitchFamily="34" charset="-122"/>
+                <a:cs typeface="Arial" pitchFamily="34" charset="-120"/>
+              </a:rPr>
+              <a:t>Submit citation slips</a:t>
+            </a:r>
+            <a:pPr algn="l" indent="0" marL="0">
+              <a:lnSpc>
+                <a:spcPts val="1620"/>
+              </a:lnSpc>
+              <a:spcAft>
+                <a:spcPts val="300"/>
+              </a:spcAft>
+              <a:buNone/>
+            </a:pPr>
+            <a:r>
+              <a:rPr lang="en-US" sz="1200" dirty="0">
+                <a:solidFill>
+                  <a:srgbClr val="1C2833"/>
+                </a:solidFill>
+                <a:latin typeface="Arial" pitchFamily="34" charset="0"/>
+                <a:ea typeface="Arial" pitchFamily="34" charset="-122"/>
+                <a:cs typeface="Arial" pitchFamily="34" charset="-120"/>
+              </a:rPr>
+              <a:t> at the in-tray. Teacher reviews tonight.</a:t>
+            </a:r>
+            <a:endParaRPr lang="en-US" sz="1200" dirty="0"/>
+          </a:p>
+          <a:p>
+            <a:pPr algn="l" marL="342900" indent="-342900">
+              <a:lnSpc>
+                <a:spcPts val="1620"/>
+              </a:lnSpc>
+              <a:spcAft>
+                <a:spcPts val="300"/>
+              </a:spcAft>
+              <a:buSzPct val="100000"/>
+              <a:buChar char="•"/>
+            </a:pPr>
+            <a:r>
+              <a:rPr lang="en-US" sz="1200" dirty="0">
+                <a:solidFill>
+                  <a:srgbClr val="1C2833"/>
+                </a:solidFill>
+                <a:latin typeface="Arial" pitchFamily="34" charset="0"/>
+                <a:ea typeface="Arial" pitchFamily="34" charset="-122"/>
+                <a:cs typeface="Arial" pitchFamily="34" charset="-120"/>
+              </a:rPr>
+              <a:t>Journal entry: "Today I found ___ . The biggest surprise was ___ ."</a:t>
+            </a:r>
+            <a:endParaRPr lang="en-US" sz="1200" dirty="0"/>
+          </a:p>
+          <a:p>
+            <a:pPr algn="l" marL="342900" indent="-342900">
+              <a:lnSpc>
+                <a:spcPts val="1620"/>
+              </a:lnSpc>
+              <a:spcAft>
+                <a:spcPts val="300"/>
+              </a:spcAft>
+              <a:buSzPct val="100000"/>
+              <a:buChar char="•"/>
+            </a:pPr>
+            <a:r>
+              <a:rPr lang="en-US" sz="1200" dirty="0">
+                <a:solidFill>
+                  <a:srgbClr val="1C2833"/>
+                </a:solidFill>
+                <a:latin typeface="Arial" pitchFamily="34" charset="0"/>
+                <a:ea typeface="Arial" pitchFamily="34" charset="-122"/>
+                <a:cs typeface="Arial" pitchFamily="34" charset="-120"/>
+              </a:rPr>
+              <a:t>Preview Day 4: </a:t>
+            </a:r>
+            <a:pPr algn="l" indent="0" marL="0">
+              <a:lnSpc>
+                <a:spcPts val="1620"/>
+              </a:lnSpc>
+              <a:spcAft>
+                <a:spcPts val="300"/>
+              </a:spcAft>
+              <a:buNone/>
+            </a:pPr>
+            <a:r>
+              <a:rPr lang="en-US" sz="1200" i="1" dirty="0">
+                <a:solidFill>
+                  <a:srgbClr val="1C2833"/>
+                </a:solidFill>
+                <a:latin typeface="Arial" pitchFamily="34" charset="0"/>
+                <a:ea typeface="Arial" pitchFamily="34" charset="-122"/>
+                <a:cs typeface="Arial" pitchFamily="34" charset="-120"/>
+              </a:rPr>
+              <a:t>"Tomorrow we keep researching and you make your first design sketch. Bring whatever drawing tools you'll need."</a:t>
+            </a:r>
+            <a:endParaRPr lang="en-US" sz="1200" dirty="0"/>
+          </a:p>
+        </p:txBody>
+      </p:sp>
+      <p:sp>
+        <p:nvSpPr>
+          <p:cNvPr id="5" name="Text 3"/>
+          <p:cNvSpPr/>
+          <p:nvPr/>
+        </p:nvSpPr>
+        <p:spPr>
+          <a:xfrm>
+            <a:off x="406301" y="4434929"/>
+            <a:ext cx="8498026" cy="213271"/>
+          </a:xfrm>
+          <a:prstGeom prst="rect">
+            <a:avLst/>
+          </a:prstGeom>
+          <a:noFill/>
+          <a:ln/>
+        </p:spPr>
+        <p:txBody>
+          <a:bodyPr wrap="square" lIns="0" tIns="0" rIns="0" bIns="0" rtlCol="0" anchor="t"/>
+          <a:lstStyle/>
+          <a:p>
+            <a:pPr algn="l" indent="0" marL="0">
+              <a:lnSpc>
+                <a:spcPts val="1680"/>
+              </a:lnSpc>
+              <a:spcBef>
+                <a:spcPts val="300"/>
+              </a:spcBef>
+              <a:spcAft>
+                <a:spcPts val="300"/>
+              </a:spcAft>
+              <a:buNone/>
+            </a:pPr>
+            <a:r>
+              <a:rPr lang="en-US" sz="1200" dirty="0">
+                <a:solidFill>
+                  <a:srgbClr val="1C2833"/>
+                </a:solidFill>
+                <a:latin typeface="Arial" pitchFamily="34" charset="0"/>
+                <a:ea typeface="Arial" pitchFamily="34" charset="-122"/>
+                <a:cs typeface="Arial" pitchFamily="34" charset="-120"/>
+              </a:rPr>
+              <a:t>Middle ·  · IKS Curriculum</a:t>
+            </a:r>
+            <a:endParaRPr lang="en-US" sz="1200" dirty="0"/>
+          </a:p>
+        </p:txBody>
+      </p:sp>
+    </p:spTree>
+  </p:cSld>
+  <p:clrMapOvr>
+    <a:masterClrMapping/>
+  </p:clrMapOvr>
+</p:sld>
+</file>
+
+<file path=ppt/slides/slide15.xml><?xml version="1.0" encoding="utf-8"?>
+<p:sld xmlns:a="http://schemas.openxmlformats.org/drawingml/2006/main" xmlns:r="http://schemas.openxmlformats.org/officeDocument/2006/relationships" xmlns:p="http://schemas.openxmlformats.org/presentationml/2006/main">
+  <p:cSld name="Slide 15">
+    <p:bg>
+      <p:bgPr>
+        <a:solidFill>
+          <a:srgbClr val="FFFFFF"/>
+        </a:solidFill>
+      </p:bgPr>
+    </p:bg>
+    <p:spTree>
+      <p:nvGrpSpPr>
+        <p:cNvPr id="1" name=""/>
+        <p:cNvGrpSpPr/>
+        <p:nvPr/>
+      </p:nvGrpSpPr>
+      <p:grpSpPr>
+        <a:xfrm>
+          <a:off x="0" y="0"/>
+          <a:ext cx="0" cy="0"/>
+          <a:chOff x="0" y="0"/>
+          <a:chExt cx="0" cy="0"/>
+        </a:xfrm>
+      </p:grpSpPr>
+      <p:sp>
+        <p:nvSpPr>
+          <p:cNvPr id="2" name="Text 0"/>
+          <p:cNvSpPr/>
+          <p:nvPr/>
+        </p:nvSpPr>
+        <p:spPr>
+          <a:xfrm>
+            <a:off x="0" y="0"/>
+            <a:ext cx="9144000" cy="101501"/>
+          </a:xfrm>
+          <a:prstGeom prst="rect">
+            <a:avLst/>
+          </a:prstGeom>
+          <a:solidFill>
+            <a:srgbClr val="277884"/>
+          </a:solidFill>
+          <a:ln/>
+        </p:spPr>
+        <p:txBody>
+          <a:bodyPr wrap="square" rtlCol="0" anchor="ctr"/>
+          <a:lstStyle/>
+          <a:p>
+            <a:pPr indent="0" marL="0">
+              <a:buNone/>
+            </a:pPr>
+            <a:endParaRPr lang="en-US" dirty="0"/>
+          </a:p>
+        </p:txBody>
+      </p:sp>
+      <p:sp>
+        <p:nvSpPr>
+          <p:cNvPr id="3" name="Text 1"/>
+          <p:cNvSpPr/>
+          <p:nvPr/>
+        </p:nvSpPr>
+        <p:spPr>
+          <a:xfrm>
+            <a:off x="406301" y="457051"/>
+            <a:ext cx="8498026" cy="274290"/>
+          </a:xfrm>
+          <a:prstGeom prst="rect">
+            <a:avLst/>
+          </a:prstGeom>
+          <a:noFill/>
+          <a:ln/>
+        </p:spPr>
+        <p:txBody>
+          <a:bodyPr wrap="square" lIns="0" tIns="0" rIns="0" bIns="0" rtlCol="0" anchor="t"/>
+          <a:lstStyle/>
+          <a:p>
+            <a:pPr algn="l" indent="0" marL="0">
+              <a:lnSpc>
+                <a:spcPts val="2160"/>
+              </a:lnSpc>
+              <a:spcBef>
+                <a:spcPts val="600"/>
+              </a:spcBef>
+              <a:spcAft>
+                <a:spcPts val="800"/>
+              </a:spcAft>
+              <a:buNone/>
+            </a:pPr>
+            <a:r>
+              <a:rPr lang="en-US" sz="1800" b="1" dirty="0">
+                <a:solidFill>
+                  <a:srgbClr val="FE4447"/>
+                </a:solidFill>
+                <a:latin typeface="Georgia" pitchFamily="34" charset="0"/>
+                <a:ea typeface="Georgia" pitchFamily="34" charset="-122"/>
+                <a:cs typeface="Georgia" pitchFamily="34" charset="-120"/>
+              </a:rPr>
+              <a:t>Student-facing content</a:t>
+            </a:r>
+            <a:endParaRPr lang="en-US" sz="1800" dirty="0"/>
+          </a:p>
+        </p:txBody>
+      </p:sp>
+      <p:sp>
+        <p:nvSpPr>
+          <p:cNvPr id="4" name="Text 2"/>
+          <p:cNvSpPr/>
+          <p:nvPr/>
+        </p:nvSpPr>
+        <p:spPr>
+          <a:xfrm>
+            <a:off x="406301" y="883593"/>
+            <a:ext cx="8331398" cy="3302794"/>
+          </a:xfrm>
+          <a:prstGeom prst="rect">
+            <a:avLst/>
+          </a:prstGeom>
+          <a:solidFill>
+            <a:srgbClr val="F4F8F9"/>
+          </a:solidFill>
+          <a:ln/>
+        </p:spPr>
+        <p:txBody>
+          <a:bodyPr wrap="square" rtlCol="0" anchor="ctr"/>
+          <a:lstStyle/>
+          <a:p>
+            <a:pPr indent="0" marL="0">
+              <a:buNone/>
+            </a:pPr>
+            <a:endParaRPr lang="en-US" dirty="0"/>
+          </a:p>
+        </p:txBody>
+      </p:sp>
+      <p:sp>
+        <p:nvSpPr>
+          <p:cNvPr id="5" name="Shape 3"/>
+          <p:cNvSpPr/>
+          <p:nvPr/>
+        </p:nvSpPr>
+        <p:spPr>
+          <a:xfrm>
+            <a:off x="434876" y="883593"/>
+            <a:ext cx="0" cy="3302794"/>
+          </a:xfrm>
+          <a:prstGeom prst="line">
+            <a:avLst/>
+          </a:prstGeom>
+          <a:noFill/>
+          <a:ln w="57150">
+            <a:solidFill>
+              <a:srgbClr val="FE4447"/>
+            </a:solidFill>
+            <a:prstDash val="solid"/>
+          </a:ln>
+        </p:spPr>
+      </p:sp>
+      <p:sp>
+        <p:nvSpPr>
+          <p:cNvPr id="6" name="Text 4"/>
+          <p:cNvSpPr/>
+          <p:nvPr/>
+        </p:nvSpPr>
+        <p:spPr>
+          <a:xfrm>
+            <a:off x="692051" y="1074093"/>
+            <a:ext cx="7973389" cy="230981"/>
+          </a:xfrm>
+          <a:prstGeom prst="rect">
+            <a:avLst/>
+          </a:prstGeom>
+          <a:noFill/>
+          <a:ln/>
+        </p:spPr>
+        <p:txBody>
+          <a:bodyPr wrap="square" lIns="0" tIns="0" rIns="0" bIns="0" rtlCol="0" anchor="t"/>
+          <a:lstStyle/>
+          <a:p>
+            <a:pPr algn="l" indent="0" marL="0">
+              <a:lnSpc>
+                <a:spcPts val="1820"/>
+              </a:lnSpc>
+              <a:spcBef>
+                <a:spcPts val="300"/>
+              </a:spcBef>
+              <a:spcAft>
+                <a:spcPts val="300"/>
+              </a:spcAft>
+              <a:buNone/>
+            </a:pPr>
+            <a:r>
+              <a:rPr lang="en-US" sz="1300" b="1" i="1" dirty="0">
+                <a:solidFill>
+                  <a:srgbClr val="1C2833"/>
+                </a:solidFill>
+                <a:latin typeface="Georgia" pitchFamily="34" charset="0"/>
+                <a:ea typeface="Georgia" pitchFamily="34" charset="-122"/>
+                <a:cs typeface="Georgia" pitchFamily="34" charset="-120"/>
+              </a:rPr>
+              <a:t>Today you find your sources.</a:t>
+            </a:r>
+            <a:endParaRPr lang="en-US" sz="1300" dirty="0"/>
+          </a:p>
+        </p:txBody>
+      </p:sp>
+      <p:sp>
+        <p:nvSpPr>
+          <p:cNvPr id="7" name="Text 5"/>
+          <p:cNvSpPr/>
+          <p:nvPr/>
+        </p:nvSpPr>
+        <p:spPr>
+          <a:xfrm>
+            <a:off x="692051" y="1343174"/>
+            <a:ext cx="7973389" cy="230981"/>
+          </a:xfrm>
+          <a:prstGeom prst="rect">
+            <a:avLst/>
+          </a:prstGeom>
+          <a:noFill/>
+          <a:ln/>
+        </p:spPr>
+        <p:txBody>
+          <a:bodyPr wrap="square" lIns="0" tIns="0" rIns="0" bIns="0" rtlCol="0" anchor="t"/>
+          <a:lstStyle/>
+          <a:p>
+            <a:pPr algn="l" indent="0" marL="0">
+              <a:lnSpc>
+                <a:spcPts val="1820"/>
+              </a:lnSpc>
+              <a:spcBef>
+                <a:spcPts val="300"/>
+              </a:spcBef>
+              <a:spcAft>
+                <a:spcPts val="300"/>
+              </a:spcAft>
+              <a:buNone/>
+            </a:pPr>
+            <a:r>
+              <a:rPr lang="en-US" sz="1300" i="1" dirty="0">
+                <a:solidFill>
+                  <a:srgbClr val="1C2833"/>
+                </a:solidFill>
+                <a:latin typeface="Georgia" pitchFamily="34" charset="0"/>
+                <a:ea typeface="Georgia" pitchFamily="34" charset="-122"/>
+                <a:cs typeface="Georgia" pitchFamily="34" charset="-120"/>
+              </a:rPr>
+              <a:t>Three categories count:</a:t>
+            </a:r>
+            <a:endParaRPr lang="en-US" sz="1300" dirty="0"/>
+          </a:p>
+        </p:txBody>
+      </p:sp>
+      <p:sp>
+        <p:nvSpPr>
+          <p:cNvPr id="8" name="Text 6"/>
+          <p:cNvSpPr/>
+          <p:nvPr/>
+        </p:nvSpPr>
+        <p:spPr>
+          <a:xfrm>
+            <a:off x="692051" y="1612255"/>
+            <a:ext cx="7973389" cy="230981"/>
+          </a:xfrm>
+          <a:prstGeom prst="rect">
+            <a:avLst/>
+          </a:prstGeom>
+          <a:noFill/>
+          <a:ln/>
+        </p:spPr>
+        <p:txBody>
+          <a:bodyPr wrap="square" lIns="0" tIns="0" rIns="0" bIns="0" rtlCol="0" anchor="t"/>
+          <a:lstStyle/>
+          <a:p>
+            <a:pPr algn="l" indent="0" marL="0">
+              <a:lnSpc>
+                <a:spcPts val="1820"/>
+              </a:lnSpc>
+              <a:spcBef>
+                <a:spcPts val="300"/>
+              </a:spcBef>
+              <a:spcAft>
+                <a:spcPts val="300"/>
+              </a:spcAft>
+              <a:buNone/>
+            </a:pPr>
+            <a:r>
+              <a:rPr lang="en-US" sz="1300" i="1" dirty="0">
+                <a:solidFill>
+                  <a:srgbClr val="1C2833"/>
+                </a:solidFill>
+                <a:latin typeface="Georgia" pitchFamily="34" charset="0"/>
+                <a:ea typeface="Georgia" pitchFamily="34" charset="-122"/>
+                <a:cs typeface="Georgia" pitchFamily="34" charset="-120"/>
+              </a:rPr>
+              <a:t>A named verse, sūtra, or chapter from a real published text.</a:t>
+            </a:r>
+            <a:endParaRPr lang="en-US" sz="1300" dirty="0"/>
+          </a:p>
+        </p:txBody>
+      </p:sp>
+      <p:sp>
+        <p:nvSpPr>
+          <p:cNvPr id="9" name="Text 7"/>
+          <p:cNvSpPr/>
+          <p:nvPr/>
+        </p:nvSpPr>
+        <p:spPr>
+          <a:xfrm>
+            <a:off x="692051" y="1881336"/>
+            <a:ext cx="7973389" cy="230981"/>
+          </a:xfrm>
+          <a:prstGeom prst="rect">
+            <a:avLst/>
+          </a:prstGeom>
+          <a:noFill/>
+          <a:ln/>
+        </p:spPr>
+        <p:txBody>
+          <a:bodyPr wrap="square" lIns="0" tIns="0" rIns="0" bIns="0" rtlCol="0" anchor="t"/>
+          <a:lstStyle/>
+          <a:p>
+            <a:pPr algn="l" indent="0" marL="0">
+              <a:lnSpc>
+                <a:spcPts val="1820"/>
+              </a:lnSpc>
+              <a:spcBef>
+                <a:spcPts val="300"/>
+              </a:spcBef>
+              <a:spcAft>
+                <a:spcPts val="300"/>
+              </a:spcAft>
+              <a:buNone/>
+            </a:pPr>
+            <a:r>
+              <a:rPr lang="en-US" sz="1300" i="1" dirty="0">
+                <a:solidFill>
+                  <a:srgbClr val="1C2833"/>
+                </a:solidFill>
+                <a:latin typeface="Georgia" pitchFamily="34" charset="0"/>
+                <a:ea typeface="Georgia" pitchFamily="34" charset="-122"/>
+                <a:cs typeface="Georgia" pitchFamily="34" charset="-120"/>
+              </a:rPr>
+              <a:t>An NCERT chapter, field guide, or peer-reviewed article.</a:t>
+            </a:r>
+            <a:endParaRPr lang="en-US" sz="1300" dirty="0"/>
+          </a:p>
+        </p:txBody>
+      </p:sp>
+      <p:sp>
+        <p:nvSpPr>
+          <p:cNvPr id="10" name="Text 8"/>
+          <p:cNvSpPr/>
+          <p:nvPr/>
+        </p:nvSpPr>
+        <p:spPr>
+          <a:xfrm>
+            <a:off x="692051" y="2150418"/>
+            <a:ext cx="7973389" cy="230981"/>
+          </a:xfrm>
+          <a:prstGeom prst="rect">
+            <a:avLst/>
+          </a:prstGeom>
+          <a:noFill/>
+          <a:ln/>
+        </p:spPr>
+        <p:txBody>
+          <a:bodyPr wrap="square" lIns="0" tIns="0" rIns="0" bIns="0" rtlCol="0" anchor="t"/>
+          <a:lstStyle/>
+          <a:p>
+            <a:pPr algn="l" indent="0" marL="0">
+              <a:lnSpc>
+                <a:spcPts val="1820"/>
+              </a:lnSpc>
+              <a:spcBef>
+                <a:spcPts val="300"/>
+              </a:spcBef>
+              <a:spcAft>
+                <a:spcPts val="300"/>
+              </a:spcAft>
+              <a:buNone/>
+            </a:pPr>
+            <a:r>
+              <a:rPr lang="en-US" sz="1300" i="1" dirty="0">
+                <a:solidFill>
+                  <a:srgbClr val="1C2833"/>
+                </a:solidFill>
+                <a:latin typeface="Georgia" pitchFamily="34" charset="0"/>
+                <a:ea typeface="Georgia" pitchFamily="34" charset="-122"/>
+                <a:cs typeface="Georgia" pitchFamily="34" charset="-120"/>
+              </a:rPr>
+              <a:t>A primary observation you made yourself, with date and location.</a:t>
+            </a:r>
+            <a:endParaRPr lang="en-US" sz="1300" dirty="0"/>
+          </a:p>
+        </p:txBody>
+      </p:sp>
+      <p:sp>
+        <p:nvSpPr>
+          <p:cNvPr id="11" name="Text 9"/>
+          <p:cNvSpPr/>
+          <p:nvPr/>
+        </p:nvSpPr>
+        <p:spPr>
+          <a:xfrm>
+            <a:off x="692051" y="2419499"/>
+            <a:ext cx="7973389" cy="230981"/>
+          </a:xfrm>
+          <a:prstGeom prst="rect">
+            <a:avLst/>
+          </a:prstGeom>
+          <a:noFill/>
+          <a:ln/>
+        </p:spPr>
+        <p:txBody>
+          <a:bodyPr wrap="square" lIns="0" tIns="0" rIns="0" bIns="0" rtlCol="0" anchor="t"/>
+          <a:lstStyle/>
+          <a:p>
+            <a:pPr algn="l" indent="0" marL="0">
+              <a:lnSpc>
+                <a:spcPts val="1820"/>
+              </a:lnSpc>
+              <a:spcBef>
+                <a:spcPts val="300"/>
+              </a:spcBef>
+              <a:spcAft>
+                <a:spcPts val="300"/>
+              </a:spcAft>
+              <a:buNone/>
+            </a:pPr>
+            <a:r>
+              <a:rPr lang="en-US" sz="1300" i="1" dirty="0">
+                <a:solidFill>
+                  <a:srgbClr val="1C2833"/>
+                </a:solidFill>
+                <a:latin typeface="Georgia" pitchFamily="34" charset="0"/>
+                <a:ea typeface="Georgia" pitchFamily="34" charset="-122"/>
+                <a:cs typeface="Georgia" pitchFamily="34" charset="-120"/>
+              </a:rPr>
+              <a:t>You need at least two sources total, at least one from category 1 or 2.</a:t>
+            </a:r>
+            <a:endParaRPr lang="en-US" sz="1300" dirty="0"/>
+          </a:p>
+        </p:txBody>
+      </p:sp>
+      <p:sp>
+        <p:nvSpPr>
+          <p:cNvPr id="12" name="Text 10"/>
+          <p:cNvSpPr/>
+          <p:nvPr/>
+        </p:nvSpPr>
+        <p:spPr>
+          <a:xfrm>
+            <a:off x="692051" y="2688580"/>
+            <a:ext cx="7973389" cy="230981"/>
+          </a:xfrm>
+          <a:prstGeom prst="rect">
+            <a:avLst/>
+          </a:prstGeom>
+          <a:noFill/>
+          <a:ln/>
+        </p:spPr>
+        <p:txBody>
+          <a:bodyPr wrap="square" lIns="0" tIns="0" rIns="0" bIns="0" rtlCol="0" anchor="t"/>
+          <a:lstStyle/>
+          <a:p>
+            <a:pPr algn="l" indent="0" marL="0">
+              <a:lnSpc>
+                <a:spcPts val="1820"/>
+              </a:lnSpc>
+              <a:spcBef>
+                <a:spcPts val="300"/>
+              </a:spcBef>
+              <a:spcAft>
+                <a:spcPts val="300"/>
+              </a:spcAft>
+              <a:buNone/>
+            </a:pPr>
+            <a:r>
+              <a:rPr lang="en-US" sz="1300" i="1" dirty="0">
+                <a:solidFill>
+                  <a:srgbClr val="1C2833"/>
+                </a:solidFill>
+                <a:latin typeface="Georgia" pitchFamily="34" charset="0"/>
+                <a:ea typeface="Georgia" pitchFamily="34" charset="-122"/>
+                <a:cs typeface="Georgia" pitchFamily="34" charset="-120"/>
+              </a:rPr>
+              <a:t>What does NOT count:</a:t>
+            </a:r>
+            <a:endParaRPr lang="en-US" sz="1300" dirty="0"/>
+          </a:p>
+        </p:txBody>
+      </p:sp>
+      <p:sp>
+        <p:nvSpPr>
+          <p:cNvPr id="13" name="Text 11"/>
+          <p:cNvSpPr/>
+          <p:nvPr/>
+        </p:nvSpPr>
+        <p:spPr>
+          <a:xfrm>
+            <a:off x="692051" y="2957661"/>
+            <a:ext cx="7973389" cy="230981"/>
+          </a:xfrm>
+          <a:prstGeom prst="rect">
+            <a:avLst/>
+          </a:prstGeom>
+          <a:noFill/>
+          <a:ln/>
+        </p:spPr>
+        <p:txBody>
+          <a:bodyPr wrap="square" lIns="0" tIns="0" rIns="0" bIns="0" rtlCol="0" anchor="t"/>
+          <a:lstStyle/>
+          <a:p>
+            <a:pPr algn="l" indent="0" marL="0">
+              <a:lnSpc>
+                <a:spcPts val="1820"/>
+              </a:lnSpc>
+              <a:spcBef>
+                <a:spcPts val="300"/>
+              </a:spcBef>
+              <a:spcAft>
+                <a:spcPts val="300"/>
+              </a:spcAft>
+              <a:buNone/>
+            </a:pPr>
+            <a:r>
+              <a:rPr lang="en-US" sz="1300" i="1" dirty="0">
+                <a:solidFill>
+                  <a:srgbClr val="1C2833"/>
+                </a:solidFill>
+                <a:latin typeface="Georgia" pitchFamily="34" charset="0"/>
+                <a:ea typeface="Georgia" pitchFamily="34" charset="-122"/>
+                <a:cs typeface="Georgia" pitchFamily="34" charset="-120"/>
+              </a:rPr>
+              <a:t>"Some say…" without naming who.</a:t>
+            </a:r>
+            <a:endParaRPr lang="en-US" sz="1300" dirty="0"/>
+          </a:p>
+        </p:txBody>
+      </p:sp>
+      <p:sp>
+        <p:nvSpPr>
+          <p:cNvPr id="14" name="Text 12"/>
+          <p:cNvSpPr/>
+          <p:nvPr/>
+        </p:nvSpPr>
+        <p:spPr>
+          <a:xfrm>
+            <a:off x="692051" y="3226743"/>
+            <a:ext cx="7973389" cy="230981"/>
+          </a:xfrm>
+          <a:prstGeom prst="rect">
+            <a:avLst/>
+          </a:prstGeom>
+          <a:noFill/>
+          <a:ln/>
+        </p:spPr>
+        <p:txBody>
+          <a:bodyPr wrap="square" lIns="0" tIns="0" rIns="0" bIns="0" rtlCol="0" anchor="t"/>
+          <a:lstStyle/>
+          <a:p>
+            <a:pPr algn="l" indent="0" marL="0">
+              <a:lnSpc>
+                <a:spcPts val="1820"/>
+              </a:lnSpc>
+              <a:spcBef>
+                <a:spcPts val="300"/>
+              </a:spcBef>
+              <a:spcAft>
+                <a:spcPts val="300"/>
+              </a:spcAft>
+              <a:buNone/>
+            </a:pPr>
+            <a:r>
+              <a:rPr lang="en-US" sz="1300" i="1" dirty="0">
+                <a:solidFill>
+                  <a:srgbClr val="1C2833"/>
+                </a:solidFill>
+                <a:latin typeface="Georgia" pitchFamily="34" charset="0"/>
+                <a:ea typeface="Georgia" pitchFamily="34" charset="-122"/>
+                <a:cs typeface="Georgia" pitchFamily="34" charset="-120"/>
+              </a:rPr>
+              <a:t>A WhatsApp forward.</a:t>
+            </a:r>
+            <a:endParaRPr lang="en-US" sz="1300" dirty="0"/>
+          </a:p>
+        </p:txBody>
+      </p:sp>
+      <p:sp>
+        <p:nvSpPr>
+          <p:cNvPr id="15" name="Text 13"/>
+          <p:cNvSpPr/>
+          <p:nvPr/>
+        </p:nvSpPr>
+        <p:spPr>
+          <a:xfrm>
+            <a:off x="692051" y="3495824"/>
+            <a:ext cx="7973389" cy="230981"/>
+          </a:xfrm>
+          <a:prstGeom prst="rect">
+            <a:avLst/>
+          </a:prstGeom>
+          <a:noFill/>
+          <a:ln/>
+        </p:spPr>
+        <p:txBody>
+          <a:bodyPr wrap="square" lIns="0" tIns="0" rIns="0" bIns="0" rtlCol="0" anchor="t"/>
+          <a:lstStyle/>
+          <a:p>
+            <a:pPr algn="l" indent="0" marL="0">
+              <a:lnSpc>
+                <a:spcPts val="1820"/>
+              </a:lnSpc>
+              <a:spcBef>
+                <a:spcPts val="300"/>
+              </a:spcBef>
+              <a:spcAft>
+                <a:spcPts val="300"/>
+              </a:spcAft>
+              <a:buNone/>
+            </a:pPr>
+            <a:r>
+              <a:rPr lang="en-US" sz="1300" i="1" dirty="0">
+                <a:solidFill>
+                  <a:srgbClr val="1C2833"/>
+                </a:solidFill>
+                <a:latin typeface="Georgia" pitchFamily="34" charset="0"/>
+                <a:ea typeface="Georgia" pitchFamily="34" charset="-122"/>
+                <a:cs typeface="Georgia" pitchFamily="34" charset="-120"/>
+              </a:rPr>
+              <a:t>An AI paraphrase you can't trace.</a:t>
+            </a:r>
+            <a:endParaRPr lang="en-US" sz="1300" dirty="0"/>
+          </a:p>
+        </p:txBody>
+      </p:sp>
+      <p:sp>
+        <p:nvSpPr>
+          <p:cNvPr id="16" name="Text 14"/>
+          <p:cNvSpPr/>
+          <p:nvPr/>
+        </p:nvSpPr>
+        <p:spPr>
+          <a:xfrm>
+            <a:off x="692051" y="3764905"/>
+            <a:ext cx="7973389" cy="230981"/>
+          </a:xfrm>
+          <a:prstGeom prst="rect">
+            <a:avLst/>
+          </a:prstGeom>
+          <a:noFill/>
+          <a:ln/>
+        </p:spPr>
+        <p:txBody>
+          <a:bodyPr wrap="square" lIns="0" tIns="0" rIns="0" bIns="0" rtlCol="0" anchor="t"/>
+          <a:lstStyle/>
+          <a:p>
+            <a:pPr algn="l" indent="0" marL="0">
+              <a:lnSpc>
+                <a:spcPts val="1820"/>
+              </a:lnSpc>
+              <a:spcBef>
+                <a:spcPts val="300"/>
+              </a:spcBef>
+              <a:spcAft>
+                <a:spcPts val="300"/>
+              </a:spcAft>
+              <a:buNone/>
+            </a:pPr>
+            <a:r>
+              <a:rPr lang="en-US" sz="1300" i="1" dirty="0">
+                <a:solidFill>
+                  <a:srgbClr val="1C2833"/>
+                </a:solidFill>
+                <a:latin typeface="Georgia" pitchFamily="34" charset="0"/>
+                <a:ea typeface="Georgia" pitchFamily="34" charset="-122"/>
+                <a:cs typeface="Georgia" pitchFamily="34" charset="-120"/>
+              </a:rPr>
+              <a:t>Fill in two citation slips by end of class.</a:t>
+            </a:r>
+            <a:endParaRPr lang="en-US" sz="1300" dirty="0"/>
+          </a:p>
+        </p:txBody>
+      </p:sp>
+      <p:sp>
+        <p:nvSpPr>
+          <p:cNvPr id="17" name="Text 15"/>
+          <p:cNvSpPr/>
+          <p:nvPr/>
+        </p:nvSpPr>
+        <p:spPr>
+          <a:xfrm>
+            <a:off x="406301" y="4434929"/>
+            <a:ext cx="8498026" cy="213271"/>
+          </a:xfrm>
+          <a:prstGeom prst="rect">
+            <a:avLst/>
+          </a:prstGeom>
+          <a:noFill/>
+          <a:ln/>
+        </p:spPr>
+        <p:txBody>
+          <a:bodyPr wrap="square" lIns="0" tIns="0" rIns="0" bIns="0" rtlCol="0" anchor="t"/>
+          <a:lstStyle/>
+          <a:p>
+            <a:pPr algn="l" indent="0" marL="0">
+              <a:lnSpc>
+                <a:spcPts val="1680"/>
+              </a:lnSpc>
+              <a:spcBef>
+                <a:spcPts val="300"/>
+              </a:spcBef>
+              <a:spcAft>
+                <a:spcPts val="300"/>
+              </a:spcAft>
+              <a:buNone/>
+            </a:pPr>
+            <a:r>
+              <a:rPr lang="en-US" sz="1200" dirty="0">
+                <a:solidFill>
+                  <a:srgbClr val="1C2833"/>
+                </a:solidFill>
+                <a:latin typeface="Arial" pitchFamily="34" charset="0"/>
+                <a:ea typeface="Arial" pitchFamily="34" charset="-122"/>
+                <a:cs typeface="Arial" pitchFamily="34" charset="-120"/>
+              </a:rPr>
+              <a:t>Middle ·  · IKS Curriculum</a:t>
+            </a:r>
+            <a:endParaRPr lang="en-US" sz="1200" dirty="0"/>
+          </a:p>
+        </p:txBody>
+      </p:sp>
+    </p:spTree>
+  </p:cSld>
+  <p:clrMapOvr>
+    <a:masterClrMapping/>
+  </p:clrMapOvr>
+</p:sld>
+</file>
+
+<file path=ppt/slides/slide16.xml><?xml version="1.0" encoding="utf-8"?>
+<p:sld xmlns:a="http://schemas.openxmlformats.org/drawingml/2006/main" xmlns:r="http://schemas.openxmlformats.org/officeDocument/2006/relationships" xmlns:p="http://schemas.openxmlformats.org/presentationml/2006/main">
+  <p:cSld name="Slide 16">
+    <p:bg>
+      <p:bgPr>
+        <a:solidFill>
+          <a:srgbClr val="FFFFFF"/>
+        </a:solidFill>
+      </p:bgPr>
+    </p:bg>
+    <p:spTree>
+      <p:nvGrpSpPr>
+        <p:cNvPr id="1" name=""/>
+        <p:cNvGrpSpPr/>
+        <p:nvPr/>
+      </p:nvGrpSpPr>
+      <p:grpSpPr>
+        <a:xfrm>
+          <a:off x="0" y="0"/>
+          <a:ext cx="0" cy="0"/>
+          <a:chOff x="0" y="0"/>
+          <a:chExt cx="0" cy="0"/>
+        </a:xfrm>
+      </p:grpSpPr>
+      <p:sp>
+        <p:nvSpPr>
+          <p:cNvPr id="2" name="Text 0"/>
+          <p:cNvSpPr/>
+          <p:nvPr/>
+        </p:nvSpPr>
+        <p:spPr>
+          <a:xfrm>
+            <a:off x="0" y="0"/>
+            <a:ext cx="9144000" cy="101501"/>
+          </a:xfrm>
+          <a:prstGeom prst="rect">
+            <a:avLst/>
+          </a:prstGeom>
+          <a:solidFill>
+            <a:srgbClr val="277884"/>
+          </a:solidFill>
+          <a:ln/>
+        </p:spPr>
+        <p:txBody>
+          <a:bodyPr wrap="square" rtlCol="0" anchor="ctr"/>
+          <a:lstStyle/>
+          <a:p>
+            <a:pPr indent="0" marL="0">
+              <a:buNone/>
+            </a:pPr>
+            <a:endParaRPr lang="en-US" dirty="0"/>
+          </a:p>
+        </p:txBody>
+      </p:sp>
+      <p:sp>
+        <p:nvSpPr>
+          <p:cNvPr id="3" name="Text 1"/>
+          <p:cNvSpPr/>
+          <p:nvPr/>
+        </p:nvSpPr>
+        <p:spPr>
+          <a:xfrm>
+            <a:off x="406301" y="457051"/>
+            <a:ext cx="8498026" cy="274290"/>
+          </a:xfrm>
+          <a:prstGeom prst="rect">
+            <a:avLst/>
+          </a:prstGeom>
+          <a:noFill/>
+          <a:ln/>
+        </p:spPr>
+        <p:txBody>
+          <a:bodyPr wrap="square" lIns="0" tIns="0" rIns="0" bIns="0" rtlCol="0" anchor="t"/>
+          <a:lstStyle/>
+          <a:p>
+            <a:pPr algn="l" indent="0" marL="0">
+              <a:lnSpc>
+                <a:spcPts val="2160"/>
+              </a:lnSpc>
+              <a:spcBef>
+                <a:spcPts val="600"/>
+              </a:spcBef>
+              <a:spcAft>
+                <a:spcPts val="800"/>
+              </a:spcAft>
+              <a:buNone/>
+            </a:pPr>
+            <a:r>
+              <a:rPr lang="en-US" sz="1800" b="1" dirty="0">
+                <a:solidFill>
+                  <a:srgbClr val="FE4447"/>
+                </a:solidFill>
+                <a:latin typeface="Georgia" pitchFamily="34" charset="0"/>
+                <a:ea typeface="Georgia" pitchFamily="34" charset="-122"/>
+                <a:cs typeface="Georgia" pitchFamily="34" charset="-120"/>
+              </a:rPr>
+              <a:t>Homework</a:t>
+            </a:r>
+            <a:endParaRPr lang="en-US" sz="1800" dirty="0"/>
+          </a:p>
+        </p:txBody>
+      </p:sp>
+      <p:sp>
+        <p:nvSpPr>
+          <p:cNvPr id="4" name="Text 2"/>
+          <p:cNvSpPr/>
+          <p:nvPr/>
+        </p:nvSpPr>
+        <p:spPr>
+          <a:xfrm>
+            <a:off x="634901" y="883593"/>
+            <a:ext cx="8102798" cy="769441"/>
+          </a:xfrm>
+          <a:prstGeom prst="rect">
+            <a:avLst/>
+          </a:prstGeom>
+          <a:noFill/>
+          <a:ln/>
+        </p:spPr>
+        <p:txBody>
+          <a:bodyPr wrap="square" lIns="0" tIns="0" rIns="0" bIns="0" rtlCol="0" anchor="t"/>
+          <a:lstStyle/>
+          <a:p>
+            <a:pPr algn="l" marL="342900" indent="-342900">
+              <a:lnSpc>
+                <a:spcPts val="1620"/>
+              </a:lnSpc>
+              <a:spcAft>
+                <a:spcPts val="300"/>
+              </a:spcAft>
+              <a:buSzPct val="100000"/>
+              <a:buChar char="•"/>
+            </a:pPr>
+            <a:r>
+              <a:rPr lang="en-US" sz="1200" dirty="0">
+                <a:solidFill>
+                  <a:srgbClr val="1C2833"/>
+                </a:solidFill>
+                <a:latin typeface="Arial" pitchFamily="34" charset="0"/>
+                <a:ea typeface="Arial" pitchFamily="34" charset="-122"/>
+                <a:cs typeface="Arial" pitchFamily="34" charset="-120"/>
+              </a:rPr>
+              <a:t>Open the cache files on a computer at home if available. Read the full chunks (not just the summary).</a:t>
+            </a:r>
+            <a:endParaRPr lang="en-US" sz="1200" dirty="0"/>
+          </a:p>
+          <a:p>
+            <a:pPr algn="l" marL="342900" indent="-342900">
+              <a:lnSpc>
+                <a:spcPts val="1620"/>
+              </a:lnSpc>
+              <a:spcAft>
+                <a:spcPts val="300"/>
+              </a:spcAft>
+              <a:buSzPct val="100000"/>
+              <a:buChar char="•"/>
+            </a:pPr>
+            <a:r>
+              <a:rPr lang="en-US" sz="1200" dirty="0">
+                <a:solidFill>
+                  <a:srgbClr val="1C2833"/>
+                </a:solidFill>
+                <a:latin typeface="Arial" pitchFamily="34" charset="0"/>
+                <a:ea typeface="Arial" pitchFamily="34" charset="-122"/>
+                <a:cs typeface="Arial" pitchFamily="34" charset="-120"/>
+              </a:rPr>
+              <a:t>If a source you want isn't in the cache, search for the chapter in a school library or ask a parent.</a:t>
+            </a:r>
+            <a:endParaRPr lang="en-US" sz="1200" dirty="0"/>
+          </a:p>
+          <a:p>
+            <a:pPr algn="l" marL="342900" indent="-342900">
+              <a:lnSpc>
+                <a:spcPts val="1620"/>
+              </a:lnSpc>
+              <a:spcAft>
+                <a:spcPts val="300"/>
+              </a:spcAft>
+              <a:buSzPct val="100000"/>
+              <a:buChar char="•"/>
+            </a:pPr>
+            <a:r>
+              <a:rPr lang="en-US" sz="1200" dirty="0">
+                <a:solidFill>
+                  <a:srgbClr val="1C2833"/>
+                </a:solidFill>
+                <a:latin typeface="Arial" pitchFamily="34" charset="0"/>
+                <a:ea typeface="Arial" pitchFamily="34" charset="-122"/>
+                <a:cs typeface="Arial" pitchFamily="34" charset="-120"/>
+              </a:rPr>
+              <a:t>Bring drawing tools tomorrow.</a:t>
+            </a:r>
+            <a:endParaRPr lang="en-US" sz="1200" dirty="0"/>
+          </a:p>
+        </p:txBody>
+      </p:sp>
+      <p:sp>
+        <p:nvSpPr>
+          <p:cNvPr id="5" name="Text 3"/>
+          <p:cNvSpPr/>
+          <p:nvPr/>
+        </p:nvSpPr>
+        <p:spPr>
+          <a:xfrm>
+            <a:off x="406301" y="4434929"/>
+            <a:ext cx="8498026" cy="213271"/>
+          </a:xfrm>
+          <a:prstGeom prst="rect">
+            <a:avLst/>
+          </a:prstGeom>
+          <a:noFill/>
+          <a:ln/>
+        </p:spPr>
+        <p:txBody>
+          <a:bodyPr wrap="square" lIns="0" tIns="0" rIns="0" bIns="0" rtlCol="0" anchor="t"/>
+          <a:lstStyle/>
+          <a:p>
+            <a:pPr algn="l" indent="0" marL="0">
+              <a:lnSpc>
+                <a:spcPts val="1680"/>
+              </a:lnSpc>
+              <a:spcBef>
+                <a:spcPts val="300"/>
+              </a:spcBef>
+              <a:spcAft>
+                <a:spcPts val="300"/>
+              </a:spcAft>
+              <a:buNone/>
+            </a:pPr>
+            <a:r>
+              <a:rPr lang="en-US" sz="1200" dirty="0">
+                <a:solidFill>
+                  <a:srgbClr val="1C2833"/>
+                </a:solidFill>
+                <a:latin typeface="Arial" pitchFamily="34" charset="0"/>
+                <a:ea typeface="Arial" pitchFamily="34" charset="-122"/>
+                <a:cs typeface="Arial" pitchFamily="34" charset="-120"/>
+              </a:rPr>
+              <a:t>Middle ·  · IKS Curriculum</a:t>
+            </a:r>
+            <a:endParaRPr lang="en-US" sz="1200" dirty="0"/>
+          </a:p>
+        </p:txBody>
+      </p:sp>
+    </p:spTree>
+  </p:cSld>
+  <p:clrMapOvr>
+    <a:masterClrMapping/>
+  </p:clrMapOvr>
+</p:sld>
+</file>
+
+<file path=ppt/slides/slide17.xml><?xml version="1.0" encoding="utf-8"?>
+<p:sld xmlns:a="http://schemas.openxmlformats.org/drawingml/2006/main" xmlns:r="http://schemas.openxmlformats.org/officeDocument/2006/relationships" xmlns:p="http://schemas.openxmlformats.org/presentationml/2006/main">
+  <p:cSld name="Slide 17">
+    <p:bg>
+      <p:bgPr>
+        <a:solidFill>
+          <a:srgbClr val="FFFFFF"/>
+        </a:solidFill>
+      </p:bgPr>
+    </p:bg>
+    <p:spTree>
+      <p:nvGrpSpPr>
+        <p:cNvPr id="1" name=""/>
+        <p:cNvGrpSpPr/>
+        <p:nvPr/>
+      </p:nvGrpSpPr>
+      <p:grpSpPr>
+        <a:xfrm>
+          <a:off x="0" y="0"/>
+          <a:ext cx="0" cy="0"/>
+          <a:chOff x="0" y="0"/>
+          <a:chExt cx="0" cy="0"/>
+        </a:xfrm>
+      </p:grpSpPr>
+      <p:sp>
+        <p:nvSpPr>
+          <p:cNvPr id="2" name="Text 0"/>
+          <p:cNvSpPr/>
+          <p:nvPr/>
+        </p:nvSpPr>
+        <p:spPr>
+          <a:xfrm>
+            <a:off x="0" y="0"/>
+            <a:ext cx="9144000" cy="101501"/>
+          </a:xfrm>
+          <a:prstGeom prst="rect">
+            <a:avLst/>
+          </a:prstGeom>
+          <a:solidFill>
+            <a:srgbClr val="277884"/>
+          </a:solidFill>
+          <a:ln/>
+        </p:spPr>
+        <p:txBody>
+          <a:bodyPr wrap="square" rtlCol="0" anchor="ctr"/>
+          <a:lstStyle/>
+          <a:p>
+            <a:pPr indent="0" marL="0">
+              <a:buNone/>
+            </a:pPr>
+            <a:endParaRPr lang="en-US" dirty="0"/>
+          </a:p>
+        </p:txBody>
+      </p:sp>
+      <p:sp>
+        <p:nvSpPr>
+          <p:cNvPr id="3" name="Text 1"/>
+          <p:cNvSpPr/>
+          <p:nvPr/>
+        </p:nvSpPr>
+        <p:spPr>
+          <a:xfrm>
+            <a:off x="406301" y="457051"/>
+            <a:ext cx="8498026" cy="274290"/>
+          </a:xfrm>
+          <a:prstGeom prst="rect">
+            <a:avLst/>
+          </a:prstGeom>
+          <a:noFill/>
+          <a:ln/>
+        </p:spPr>
+        <p:txBody>
+          <a:bodyPr wrap="square" lIns="0" tIns="0" rIns="0" bIns="0" rtlCol="0" anchor="t"/>
+          <a:lstStyle/>
+          <a:p>
+            <a:pPr algn="l" indent="0" marL="0">
+              <a:lnSpc>
+                <a:spcPts val="2160"/>
+              </a:lnSpc>
+              <a:spcBef>
+                <a:spcPts val="600"/>
+              </a:spcBef>
+              <a:spcAft>
+                <a:spcPts val="800"/>
+              </a:spcAft>
+              <a:buNone/>
+            </a:pPr>
+            <a:r>
+              <a:rPr lang="en-US" sz="1800" b="1" dirty="0">
+                <a:solidFill>
+                  <a:srgbClr val="FE4447"/>
+                </a:solidFill>
+                <a:latin typeface="Georgia" pitchFamily="34" charset="0"/>
+                <a:ea typeface="Georgia" pitchFamily="34" charset="-122"/>
+                <a:cs typeface="Georgia" pitchFamily="34" charset="-120"/>
+              </a:rPr>
+              <a:t>Differentiation</a:t>
+            </a:r>
+            <a:endParaRPr lang="en-US" sz="1800" dirty="0"/>
+          </a:p>
+        </p:txBody>
+      </p:sp>
+      <p:sp>
+        <p:nvSpPr>
+          <p:cNvPr id="4" name="Text 2"/>
+          <p:cNvSpPr/>
+          <p:nvPr/>
+        </p:nvSpPr>
+        <p:spPr>
+          <a:xfrm>
+            <a:off x="634901" y="883593"/>
+            <a:ext cx="8102798" cy="937022"/>
+          </a:xfrm>
+          <a:prstGeom prst="rect">
+            <a:avLst/>
+          </a:prstGeom>
+          <a:noFill/>
+          <a:ln/>
+        </p:spPr>
+        <p:txBody>
+          <a:bodyPr wrap="square" lIns="0" tIns="0" rIns="0" bIns="0" rtlCol="0" anchor="t"/>
+          <a:lstStyle/>
+          <a:p>
+            <a:pPr algn="l" marL="342900" indent="-342900">
+              <a:lnSpc>
+                <a:spcPts val="1620"/>
+              </a:lnSpc>
+              <a:spcAft>
+                <a:spcPts val="300"/>
+              </a:spcAft>
+              <a:buSzPct val="100000"/>
+              <a:buChar char="•"/>
+            </a:pPr>
+            <a:r>
+              <a:rPr lang="en-US" sz="1200" b="1" dirty="0">
+                <a:solidFill>
+                  <a:srgbClr val="1C2833"/>
+                </a:solidFill>
+                <a:latin typeface="Arial" pitchFamily="34" charset="0"/>
+                <a:ea typeface="Arial" pitchFamily="34" charset="-122"/>
+                <a:cs typeface="Arial" pitchFamily="34" charset="-120"/>
+              </a:rPr>
+              <a:t>One tier up:</a:t>
+            </a:r>
+            <a:pPr algn="l" indent="0" marL="0">
+              <a:lnSpc>
+                <a:spcPts val="1620"/>
+              </a:lnSpc>
+              <a:spcAft>
+                <a:spcPts val="300"/>
+              </a:spcAft>
+              <a:buNone/>
+            </a:pPr>
+            <a:r>
+              <a:rPr lang="en-US" sz="1200" dirty="0">
+                <a:solidFill>
+                  <a:srgbClr val="1C2833"/>
+                </a:solidFill>
+                <a:latin typeface="Arial" pitchFamily="34" charset="0"/>
+                <a:ea typeface="Arial" pitchFamily="34" charset="-122"/>
+                <a:cs typeface="Arial" pitchFamily="34" charset="-120"/>
+              </a:rPr>
+              <a:t> Find a third source from a </a:t>
+            </a:r>
+            <a:pPr algn="l" indent="0" marL="0">
+              <a:lnSpc>
+                <a:spcPts val="1620"/>
+              </a:lnSpc>
+              <a:spcAft>
+                <a:spcPts val="300"/>
+              </a:spcAft>
+              <a:buNone/>
+            </a:pPr>
+            <a:r>
+              <a:rPr lang="en-US" sz="1200" i="1" dirty="0">
+                <a:solidFill>
+                  <a:srgbClr val="1C2833"/>
+                </a:solidFill>
+                <a:latin typeface="Arial" pitchFamily="34" charset="0"/>
+                <a:ea typeface="Arial" pitchFamily="34" charset="-122"/>
+                <a:cs typeface="Arial" pitchFamily="34" charset="-120"/>
+              </a:rPr>
+              <a:t>different</a:t>
+            </a:r>
+            <a:pPr algn="l" indent="0" marL="0">
+              <a:lnSpc>
+                <a:spcPts val="1620"/>
+              </a:lnSpc>
+              <a:spcAft>
+                <a:spcPts val="300"/>
+              </a:spcAft>
+              <a:buNone/>
+            </a:pPr>
+            <a:r>
+              <a:rPr lang="en-US" sz="1200" dirty="0">
+                <a:solidFill>
+                  <a:srgbClr val="1C2833"/>
+                </a:solidFill>
+                <a:latin typeface="Arial" pitchFamily="34" charset="0"/>
+                <a:ea typeface="Arial" pitchFamily="34" charset="-122"/>
+                <a:cs typeface="Arial" pitchFamily="34" charset="-120"/>
+              </a:rPr>
+              <a:t> category than your first two. For instance, if you have two cache verses, find one NCERT chapter or one primary observation to triangulate.</a:t>
+            </a:r>
+            <a:endParaRPr lang="en-US" sz="1200" dirty="0"/>
+          </a:p>
+          <a:p>
+            <a:pPr algn="l" marL="342900" indent="-342900">
+              <a:lnSpc>
+                <a:spcPts val="1620"/>
+              </a:lnSpc>
+              <a:spcAft>
+                <a:spcPts val="300"/>
+              </a:spcAft>
+              <a:buSzPct val="100000"/>
+              <a:buChar char="•"/>
+            </a:pPr>
+            <a:r>
+              <a:rPr lang="en-US" sz="1200" b="1" dirty="0">
+                <a:solidFill>
+                  <a:srgbClr val="1C2833"/>
+                </a:solidFill>
+                <a:latin typeface="Arial" pitchFamily="34" charset="0"/>
+                <a:ea typeface="Arial" pitchFamily="34" charset="-122"/>
+                <a:cs typeface="Arial" pitchFamily="34" charset="-120"/>
+              </a:rPr>
+              <a:t>One tier down:</a:t>
+            </a:r>
+            <a:pPr algn="l" indent="0" marL="0">
+              <a:lnSpc>
+                <a:spcPts val="1620"/>
+              </a:lnSpc>
+              <a:spcAft>
+                <a:spcPts val="300"/>
+              </a:spcAft>
+              <a:buNone/>
+            </a:pPr>
+            <a:r>
+              <a:rPr lang="en-US" sz="1200" dirty="0">
+                <a:solidFill>
+                  <a:srgbClr val="1C2833"/>
+                </a:solidFill>
+                <a:latin typeface="Arial" pitchFamily="34" charset="0"/>
+                <a:ea typeface="Arial" pitchFamily="34" charset="-122"/>
+                <a:cs typeface="Arial" pitchFamily="34" charset="-120"/>
+              </a:rPr>
+              <a:t> Stop at two solid sources rather than chasing more. Spend the saved time writing what each source contributes in 3 sentences — clarity beats volume.</a:t>
+            </a:r>
+            <a:endParaRPr lang="en-US" sz="1200" dirty="0"/>
+          </a:p>
+        </p:txBody>
+      </p:sp>
+      <p:sp>
+        <p:nvSpPr>
+          <p:cNvPr id="5" name="Text 3"/>
+          <p:cNvSpPr/>
+          <p:nvPr/>
+        </p:nvSpPr>
+        <p:spPr>
+          <a:xfrm>
+            <a:off x="406301" y="4434929"/>
+            <a:ext cx="8498026" cy="213271"/>
+          </a:xfrm>
+          <a:prstGeom prst="rect">
+            <a:avLst/>
+          </a:prstGeom>
+          <a:noFill/>
+          <a:ln/>
+        </p:spPr>
+        <p:txBody>
+          <a:bodyPr wrap="square" lIns="0" tIns="0" rIns="0" bIns="0" rtlCol="0" anchor="t"/>
+          <a:lstStyle/>
+          <a:p>
+            <a:pPr algn="l" indent="0" marL="0">
+              <a:lnSpc>
+                <a:spcPts val="1680"/>
+              </a:lnSpc>
+              <a:spcBef>
+                <a:spcPts val="300"/>
+              </a:spcBef>
+              <a:spcAft>
+                <a:spcPts val="300"/>
+              </a:spcAft>
+              <a:buNone/>
+            </a:pPr>
+            <a:r>
+              <a:rPr lang="en-US" sz="1200" dirty="0">
+                <a:solidFill>
+                  <a:srgbClr val="1C2833"/>
+                </a:solidFill>
+                <a:latin typeface="Arial" pitchFamily="34" charset="0"/>
+                <a:ea typeface="Arial" pitchFamily="34" charset="-122"/>
+                <a:cs typeface="Arial" pitchFamily="34" charset="-120"/>
+              </a:rPr>
+              <a:t>Middle ·  · IKS Curriculum</a:t>
+            </a:r>
+            <a:endParaRPr lang="en-US" sz="1200" dirty="0"/>
+          </a:p>
+        </p:txBody>
+      </p:sp>
+    </p:spTree>
+  </p:cSld>
+  <p:clrMapOvr>
+    <a:masterClrMapping/>
+  </p:clrMapOvr>
+</p:sld>
+</file>
+
+<file path=ppt/slides/slide18.xml><?xml version="1.0" encoding="utf-8"?>
+<p:sld xmlns:a="http://schemas.openxmlformats.org/drawingml/2006/main" xmlns:r="http://schemas.openxmlformats.org/officeDocument/2006/relationships" xmlns:p="http://schemas.openxmlformats.org/presentationml/2006/main">
+  <p:cSld name="Slide 18">
+    <p:bg>
+      <p:bgPr>
+        <a:solidFill>
+          <a:srgbClr val="FFFFFF"/>
+        </a:solidFill>
+      </p:bgPr>
+    </p:bg>
+    <p:spTree>
+      <p:nvGrpSpPr>
+        <p:cNvPr id="1" name=""/>
+        <p:cNvGrpSpPr/>
+        <p:nvPr/>
+      </p:nvGrpSpPr>
+      <p:grpSpPr>
+        <a:xfrm>
+          <a:off x="0" y="0"/>
+          <a:ext cx="0" cy="0"/>
+          <a:chOff x="0" y="0"/>
+          <a:chExt cx="0" cy="0"/>
+        </a:xfrm>
+      </p:grpSpPr>
+      <p:sp>
+        <p:nvSpPr>
+          <p:cNvPr id="2" name="Text 0"/>
+          <p:cNvSpPr/>
+          <p:nvPr/>
+        </p:nvSpPr>
+        <p:spPr>
+          <a:xfrm>
+            <a:off x="0" y="0"/>
+            <a:ext cx="9144000" cy="101501"/>
+          </a:xfrm>
+          <a:prstGeom prst="rect">
+            <a:avLst/>
+          </a:prstGeom>
+          <a:solidFill>
+            <a:srgbClr val="277884"/>
+          </a:solidFill>
+          <a:ln/>
+        </p:spPr>
+        <p:txBody>
+          <a:bodyPr wrap="square" rtlCol="0" anchor="ctr"/>
+          <a:lstStyle/>
+          <a:p>
+            <a:pPr indent="0" marL="0">
+              <a:buNone/>
+            </a:pPr>
+            <a:endParaRPr lang="en-US" dirty="0"/>
+          </a:p>
+        </p:txBody>
+      </p:sp>
+      <p:sp>
+        <p:nvSpPr>
+          <p:cNvPr id="3" name="Text 1"/>
+          <p:cNvSpPr/>
+          <p:nvPr/>
+        </p:nvSpPr>
+        <p:spPr>
+          <a:xfrm>
+            <a:off x="406301" y="457051"/>
+            <a:ext cx="8498026" cy="274290"/>
+          </a:xfrm>
+          <a:prstGeom prst="rect">
+            <a:avLst/>
+          </a:prstGeom>
+          <a:noFill/>
+          <a:ln/>
+        </p:spPr>
+        <p:txBody>
+          <a:bodyPr wrap="square" lIns="0" tIns="0" rIns="0" bIns="0" rtlCol="0" anchor="t"/>
+          <a:lstStyle/>
+          <a:p>
+            <a:pPr algn="l" indent="0" marL="0">
+              <a:lnSpc>
+                <a:spcPts val="2160"/>
+              </a:lnSpc>
+              <a:spcBef>
+                <a:spcPts val="600"/>
+              </a:spcBef>
+              <a:spcAft>
+                <a:spcPts val="800"/>
+              </a:spcAft>
+              <a:buNone/>
+            </a:pPr>
+            <a:r>
+              <a:rPr lang="en-US" sz="1800" b="1" dirty="0">
+                <a:solidFill>
+                  <a:srgbClr val="FE4447"/>
+                </a:solidFill>
+                <a:latin typeface="Georgia" pitchFamily="34" charset="0"/>
+                <a:ea typeface="Georgia" pitchFamily="34" charset="-122"/>
+                <a:cs typeface="Georgia" pitchFamily="34" charset="-120"/>
+              </a:rPr>
+              <a:t>Teacher notes</a:t>
+            </a:r>
+            <a:endParaRPr lang="en-US" sz="1800" dirty="0"/>
+          </a:p>
+        </p:txBody>
+      </p:sp>
+      <p:sp>
+        <p:nvSpPr>
+          <p:cNvPr id="4" name="Text 2"/>
+          <p:cNvSpPr/>
+          <p:nvPr/>
+        </p:nvSpPr>
+        <p:spPr>
+          <a:xfrm>
+            <a:off x="634901" y="883593"/>
+            <a:ext cx="8102798" cy="1405533"/>
+          </a:xfrm>
+          <a:prstGeom prst="rect">
+            <a:avLst/>
+          </a:prstGeom>
+          <a:noFill/>
+          <a:ln/>
+        </p:spPr>
+        <p:txBody>
+          <a:bodyPr wrap="square" lIns="0" tIns="0" rIns="0" bIns="0" rtlCol="0" anchor="t"/>
+          <a:lstStyle/>
+          <a:p>
+            <a:pPr algn="l" marL="342900" indent="-342900">
+              <a:lnSpc>
+                <a:spcPts val="1620"/>
+              </a:lnSpc>
+              <a:spcAft>
+                <a:spcPts val="300"/>
+              </a:spcAft>
+              <a:buSzPct val="100000"/>
+              <a:buChar char="•"/>
+            </a:pPr>
+            <a:r>
+              <a:rPr lang="en-US" sz="1200" dirty="0">
+                <a:solidFill>
+                  <a:srgbClr val="1C2833"/>
+                </a:solidFill>
+                <a:latin typeface="Arial" pitchFamily="34" charset="0"/>
+                <a:ea typeface="Arial" pitchFamily="34" charset="-122"/>
+                <a:cs typeface="Arial" pitchFamily="34" charset="-120"/>
+              </a:rPr>
+              <a:t>Some students will find no relevant sources in their anchor module's cache. Walk over and help — sometimes the relevant verse is in a </a:t>
+            </a:r>
+            <a:pPr algn="l" indent="0" marL="0">
+              <a:lnSpc>
+                <a:spcPts val="1620"/>
+              </a:lnSpc>
+              <a:spcAft>
+                <a:spcPts val="300"/>
+              </a:spcAft>
+              <a:buNone/>
+            </a:pPr>
+            <a:r>
+              <a:rPr lang="en-US" sz="1200" i="1" dirty="0">
+                <a:solidFill>
+                  <a:srgbClr val="1C2833"/>
+                </a:solidFill>
+                <a:latin typeface="Arial" pitchFamily="34" charset="0"/>
+                <a:ea typeface="Arial" pitchFamily="34" charset="-122"/>
+                <a:cs typeface="Arial" pitchFamily="34" charset="-120"/>
+              </a:rPr>
+              <a:t>different</a:t>
+            </a:r>
+            <a:pPr algn="l" indent="0" marL="0">
+              <a:lnSpc>
+                <a:spcPts val="1620"/>
+              </a:lnSpc>
+              <a:spcAft>
+                <a:spcPts val="300"/>
+              </a:spcAft>
+              <a:buNone/>
+            </a:pPr>
+            <a:r>
+              <a:rPr lang="en-US" sz="1200" dirty="0">
+                <a:solidFill>
+                  <a:srgbClr val="1C2833"/>
+                </a:solidFill>
+                <a:latin typeface="Arial" pitchFamily="34" charset="0"/>
+                <a:ea typeface="Arial" pitchFamily="34" charset="-122"/>
+                <a:cs typeface="Arial" pitchFamily="34" charset="-120"/>
+              </a:rPr>
+              <a:t> module (e.g. a Doṣa project may pull from Module 3 Ayurveda rather than Module 4).</a:t>
+            </a:r>
+            <a:endParaRPr lang="en-US" sz="1200" dirty="0"/>
+          </a:p>
+          <a:p>
+            <a:pPr algn="l" marL="342900" indent="-342900">
+              <a:lnSpc>
+                <a:spcPts val="1620"/>
+              </a:lnSpc>
+              <a:spcAft>
+                <a:spcPts val="300"/>
+              </a:spcAft>
+              <a:buSzPct val="100000"/>
+              <a:buChar char="•"/>
+            </a:pPr>
+            <a:r>
+              <a:rPr lang="en-US" sz="1200" dirty="0">
+                <a:solidFill>
+                  <a:srgbClr val="1C2833"/>
+                </a:solidFill>
+                <a:latin typeface="Arial" pitchFamily="34" charset="0"/>
+                <a:ea typeface="Arial" pitchFamily="34" charset="-122"/>
+                <a:cs typeface="Arial" pitchFamily="34" charset="-120"/>
+              </a:rPr>
+              <a:t>The Project 9 (multiplication comparison) anchor sources are slightly different — they include Tirthaji's book and the day-by-day worked examples from Modules 7, 9, 11. Help these students locate the right pages.</a:t>
+            </a:r>
+            <a:endParaRPr lang="en-US" sz="1200" dirty="0"/>
+          </a:p>
+          <a:p>
+            <a:pPr algn="l" marL="342900" indent="-342900">
+              <a:lnSpc>
+                <a:spcPts val="1620"/>
+              </a:lnSpc>
+              <a:spcAft>
+                <a:spcPts val="300"/>
+              </a:spcAft>
+              <a:buSzPct val="100000"/>
+              <a:buChar char="•"/>
+            </a:pPr>
+            <a:r>
+              <a:rPr lang="en-US" sz="1200" dirty="0">
+                <a:solidFill>
+                  <a:srgbClr val="1C2833"/>
+                </a:solidFill>
+                <a:latin typeface="Arial" pitchFamily="34" charset="0"/>
+                <a:ea typeface="Arial" pitchFamily="34" charset="-122"/>
+                <a:cs typeface="Arial" pitchFamily="34" charset="-120"/>
+              </a:rPr>
+              <a:t>Project 7 (sustainability audit) students often want to leap straight to primary observation. Hold them: they need at least one </a:t>
+            </a:r>
+            <a:pPr algn="l" indent="0" marL="0">
+              <a:lnSpc>
+                <a:spcPts val="1620"/>
+              </a:lnSpc>
+              <a:spcAft>
+                <a:spcPts val="300"/>
+              </a:spcAft>
+              <a:buNone/>
+            </a:pPr>
+            <a:r>
+              <a:rPr lang="en-US" sz="1200" i="1" dirty="0">
+                <a:solidFill>
+                  <a:srgbClr val="1C2833"/>
+                </a:solidFill>
+                <a:latin typeface="Arial" pitchFamily="34" charset="0"/>
+                <a:ea typeface="Arial" pitchFamily="34" charset="-122"/>
+                <a:cs typeface="Arial" pitchFamily="34" charset="-120"/>
+              </a:rPr>
+              <a:t>prior</a:t>
+            </a:r>
+            <a:pPr algn="l" indent="0" marL="0">
+              <a:lnSpc>
+                <a:spcPts val="1620"/>
+              </a:lnSpc>
+              <a:spcAft>
+                <a:spcPts val="300"/>
+              </a:spcAft>
+              <a:buNone/>
+            </a:pPr>
+            <a:r>
+              <a:rPr lang="en-US" sz="1200" dirty="0">
+                <a:solidFill>
+                  <a:srgbClr val="1C2833"/>
+                </a:solidFill>
+                <a:latin typeface="Arial" pitchFamily="34" charset="0"/>
+                <a:ea typeface="Arial" pitchFamily="34" charset="-122"/>
+                <a:cs typeface="Arial" pitchFamily="34" charset="-120"/>
+              </a:rPr>
+              <a:t> source to anchor their framework first. Module 13's </a:t>
+            </a:r>
+            <a:pPr algn="l" indent="0" marL="0">
+              <a:lnSpc>
+                <a:spcPts val="1620"/>
+              </a:lnSpc>
+              <a:spcAft>
+                <a:spcPts val="300"/>
+              </a:spcAft>
+              <a:buNone/>
+            </a:pPr>
+            <a:r>
+              <a:rPr lang="en-US" sz="1200" dirty="0">
+                <a:solidFill>
+                  <a:srgbClr val="1C2833"/>
+                </a:solidFill>
+                <a:latin typeface="Arial" pitchFamily="34" charset="0"/>
+                <a:ea typeface="Arial" pitchFamily="34" charset="-122"/>
+                <a:cs typeface="Arial" pitchFamily="34" charset="-120"/>
+              </a:rPr>
+              <a:t>sources.md</a:t>
+            </a:r>
+            <a:pPr algn="l" indent="0" marL="0">
+              <a:lnSpc>
+                <a:spcPts val="1620"/>
+              </a:lnSpc>
+              <a:spcAft>
+                <a:spcPts val="300"/>
+              </a:spcAft>
+              <a:buNone/>
+            </a:pPr>
+            <a:r>
+              <a:rPr lang="en-US" sz="1200" dirty="0">
+                <a:solidFill>
+                  <a:srgbClr val="1C2833"/>
+                </a:solidFill>
+                <a:latin typeface="Arial" pitchFamily="34" charset="0"/>
+                <a:ea typeface="Arial" pitchFamily="34" charset="-122"/>
+                <a:cs typeface="Arial" pitchFamily="34" charset="-120"/>
+              </a:rPr>
+              <a:t> (when available) is the place.</a:t>
+            </a:r>
+            <a:endParaRPr lang="en-US" sz="1200" dirty="0"/>
+          </a:p>
+        </p:txBody>
+      </p:sp>
+      <p:sp>
+        <p:nvSpPr>
+          <p:cNvPr id="5" name="Text 3"/>
+          <p:cNvSpPr/>
+          <p:nvPr/>
+        </p:nvSpPr>
+        <p:spPr>
+          <a:xfrm>
+            <a:off x="406301" y="4434929"/>
+            <a:ext cx="8498026" cy="213271"/>
+          </a:xfrm>
+          <a:prstGeom prst="rect">
+            <a:avLst/>
+          </a:prstGeom>
+          <a:noFill/>
+          <a:ln/>
+        </p:spPr>
+        <p:txBody>
+          <a:bodyPr wrap="square" lIns="0" tIns="0" rIns="0" bIns="0" rtlCol="0" anchor="t"/>
+          <a:lstStyle/>
+          <a:p>
+            <a:pPr algn="l" indent="0" marL="0">
+              <a:lnSpc>
+                <a:spcPts val="1680"/>
+              </a:lnSpc>
+              <a:spcBef>
+                <a:spcPts val="300"/>
+              </a:spcBef>
+              <a:spcAft>
+                <a:spcPts val="300"/>
+              </a:spcAft>
+              <a:buNone/>
+            </a:pPr>
+            <a:r>
+              <a:rPr lang="en-US" sz="1200" dirty="0">
+                <a:solidFill>
+                  <a:srgbClr val="1C2833"/>
+                </a:solidFill>
+                <a:latin typeface="Arial" pitchFamily="34" charset="0"/>
+                <a:ea typeface="Arial" pitchFamily="34" charset="-122"/>
+                <a:cs typeface="Arial" pitchFamily="34" charset="-120"/>
+              </a:rPr>
+              <a:t>Middle ·  · IKS Curriculum</a:t>
+            </a:r>
+            <a:endParaRPr lang="en-US" sz="1200" dirty="0"/>
+          </a:p>
+        </p:txBody>
+      </p:sp>
+    </p:spTree>
+  </p:cSld>
+  <p:clrMapOvr>
+    <a:masterClrMapping/>
+  </p:clrMapOvr>
+</p:sld>
+</file>
+
+<file path=ppt/slides/slide19.xml><?xml version="1.0" encoding="utf-8"?>
+<p:sld xmlns:a="http://schemas.openxmlformats.org/drawingml/2006/main" xmlns:r="http://schemas.openxmlformats.org/officeDocument/2006/relationships" xmlns:p="http://schemas.openxmlformats.org/presentationml/2006/main">
+  <p:cSld name="Slide 19">
+    <p:bg>
+      <p:bgPr>
+        <a:solidFill>
+          <a:srgbClr val="FFFFFF"/>
+        </a:solidFill>
+      </p:bgPr>
+    </p:bg>
+    <p:spTree>
+      <p:nvGrpSpPr>
+        <p:cNvPr id="1" name=""/>
+        <p:cNvGrpSpPr/>
+        <p:nvPr/>
+      </p:nvGrpSpPr>
+      <p:grpSpPr>
+        <a:xfrm>
+          <a:off x="0" y="0"/>
+          <a:ext cx="0" cy="0"/>
+          <a:chOff x="0" y="0"/>
+          <a:chExt cx="0" cy="0"/>
+        </a:xfrm>
+      </p:grpSpPr>
+      <p:sp>
+        <p:nvSpPr>
+          <p:cNvPr id="2" name="Text 0"/>
+          <p:cNvSpPr/>
+          <p:nvPr/>
+        </p:nvSpPr>
+        <p:spPr>
+          <a:xfrm>
+            <a:off x="0" y="0"/>
+            <a:ext cx="9144000" cy="101501"/>
+          </a:xfrm>
+          <a:prstGeom prst="rect">
+            <a:avLst/>
+          </a:prstGeom>
+          <a:solidFill>
+            <a:srgbClr val="277884"/>
+          </a:solidFill>
+          <a:ln/>
+        </p:spPr>
+        <p:txBody>
+          <a:bodyPr wrap="square" rtlCol="0" anchor="ctr"/>
+          <a:lstStyle/>
+          <a:p>
+            <a:pPr indent="0" marL="0">
+              <a:buNone/>
+            </a:pPr>
+            <a:endParaRPr lang="en-US" dirty="0"/>
+          </a:p>
+        </p:txBody>
+      </p:sp>
+      <p:sp>
+        <p:nvSpPr>
+          <p:cNvPr id="3" name="Text 1"/>
+          <p:cNvSpPr/>
+          <p:nvPr/>
+        </p:nvSpPr>
+        <p:spPr>
+          <a:xfrm>
+            <a:off x="406301" y="457051"/>
+            <a:ext cx="8498026" cy="274290"/>
+          </a:xfrm>
+          <a:prstGeom prst="rect">
+            <a:avLst/>
+          </a:prstGeom>
+          <a:noFill/>
+          <a:ln/>
+        </p:spPr>
+        <p:txBody>
+          <a:bodyPr wrap="square" lIns="0" tIns="0" rIns="0" bIns="0" rtlCol="0" anchor="t"/>
+          <a:lstStyle/>
+          <a:p>
+            <a:pPr algn="l" indent="0" marL="0">
+              <a:lnSpc>
+                <a:spcPts val="2160"/>
+              </a:lnSpc>
+              <a:spcBef>
+                <a:spcPts val="600"/>
+              </a:spcBef>
+              <a:spcAft>
+                <a:spcPts val="800"/>
+              </a:spcAft>
+              <a:buNone/>
+            </a:pPr>
+            <a:r>
+              <a:rPr lang="en-US" sz="1800" b="1" dirty="0">
+                <a:solidFill>
+                  <a:srgbClr val="FE4447"/>
+                </a:solidFill>
+                <a:latin typeface="Georgia" pitchFamily="34" charset="0"/>
+                <a:ea typeface="Georgia" pitchFamily="34" charset="-122"/>
+                <a:cs typeface="Georgia" pitchFamily="34" charset="-120"/>
+              </a:rPr>
               <a:t>Citation(s) used in this lesson</a:t>
             </a:r>
             <a:endParaRPr lang="en-US" sz="1800" dirty="0"/>
@@ -2609,8 +6284,8 @@
         </p:nvSpPr>
         <p:spPr>
           <a:xfrm>
-            <a:off x="406301" y="870942"/>
-            <a:ext cx="8498026" cy="213271"/>
+            <a:off x="634901" y="883593"/>
+            <a:ext cx="8102798" cy="281880"/>
           </a:xfrm>
           <a:prstGeom prst="rect">
             <a:avLst/>
@@ -2622,17 +6297,15 @@
           <a:bodyPr wrap="square" lIns="0" tIns="0" rIns="0" bIns="0" rtlCol="0" anchor="t"/>
           <a:lstStyle/>
           <a:p>
-            <a:pPr algn="l" indent="0" marL="0">
-              <a:lnSpc>
-                <a:spcPts val="1680"/>
-              </a:lnSpc>
-              <a:spcBef>
-                <a:spcPts val="300"/>
-              </a:spcBef>
-              <a:spcAft>
-                <a:spcPts val="300"/>
-              </a:spcAft>
-              <a:buNone/>
+            <a:pPr algn="l" marL="342900" indent="-342900">
+              <a:lnSpc>
+                <a:spcPts val="1620"/>
+              </a:lnSpc>
+              <a:spcAft>
+                <a:spcPts val="300"/>
+              </a:spcAft>
+              <a:buSzPct val="100000"/>
+              <a:buChar char="•"/>
             </a:pPr>
             <a:r>
               <a:rPr lang="en-US" sz="1200" dirty="0">
@@ -2643,7 +6316,7 @@
                 <a:ea typeface="Arial" pitchFamily="34" charset="-122"/>
                 <a:cs typeface="Arial" pitchFamily="34" charset="-120"/>
               </a:rPr>
-              <a:t>– The lesson references the citation discipline established from Module 2 onwards. No new scripture citation today.</a:t>
+              <a:t>The lesson references the citation discipline established from Module 2 onwards. No new scripture citation today.</a:t>
             </a:r>
             <a:endParaRPr lang="en-US" sz="1200" dirty="0"/>
           </a:p>
@@ -2801,7 +6474,7 @@
                 <a:ea typeface="Georgia" pitchFamily="34" charset="-122"/>
                 <a:cs typeface="Georgia" pitchFamily="34" charset="-120"/>
               </a:rPr>
-              <a:t>Materials</a:t>
+              <a:t>Learning objective</a:t>
             </a:r>
             <a:endParaRPr lang="en-US" sz="1800" dirty="0"/>
           </a:p>
@@ -2816,7 +6489,7 @@
         <p:spPr>
           <a:xfrm>
             <a:off x="406301" y="870942"/>
-            <a:ext cx="8498026" cy="436066"/>
+            <a:ext cx="8498026" cy="639812"/>
           </a:xfrm>
           <a:prstGeom prst="rect">
             <a:avLst/>
@@ -2849,53 +6522,7 @@
                 <a:ea typeface="Arial" pitchFamily="34" charset="-122"/>
                 <a:cs typeface="Arial" pitchFamily="34" charset="-120"/>
               </a:rPr>
-              <a:t>– Each anchor module's printed </a:t>
-            </a:r>
-            <a:pPr algn="l" indent="0" marL="0">
-              <a:lnSpc>
-                <a:spcPts val="1680"/>
-              </a:lnSpc>
-              <a:spcBef>
-                <a:spcPts val="300"/>
-              </a:spcBef>
-              <a:spcAft>
-                <a:spcPts val="300"/>
-              </a:spcAft>
-              <a:buNone/>
-            </a:pPr>
-            <a:r>
-              <a:rPr lang="en-US" sz="1200" dirty="0">
-                <a:solidFill>
-                  <a:srgbClr val="1C2833"/>
-                </a:solidFill>
-                <a:latin typeface="Arial" pitchFamily="34" charset="0"/>
-                <a:ea typeface="Arial" pitchFamily="34" charset="-122"/>
-                <a:cs typeface="Arial" pitchFamily="34" charset="-120"/>
-              </a:rPr>
-              <a:t>sources.md</a:t>
-            </a:r>
-            <a:pPr algn="l" indent="0" marL="0">
-              <a:lnSpc>
-                <a:spcPts val="1680"/>
-              </a:lnSpc>
-              <a:spcBef>
-                <a:spcPts val="300"/>
-              </a:spcBef>
-              <a:spcAft>
-                <a:spcPts val="300"/>
-              </a:spcAft>
-              <a:buNone/>
-            </a:pPr>
-            <a:r>
-              <a:rPr lang="en-US" sz="1200" dirty="0">
-                <a:solidFill>
-                  <a:srgbClr val="1C2833"/>
-                </a:solidFill>
-                <a:latin typeface="Arial" pitchFamily="34" charset="0"/>
-                <a:ea typeface="Arial" pitchFamily="34" charset="-122"/>
-                <a:cs typeface="Arial" pitchFamily="34" charset="-120"/>
-              </a:rPr>
-              <a:t> (teacher prepares a small shelf of these) – Notebook / project journal – Sticky tabs (for marking pages students will come back to) – Sample citation slips (see template below)</a:t>
+              <a:t>By the end of this lesson, students will have identified at least one verifiable source from their anchor module and one verifiable secondary source, recorded each in their journal with the exact citation, and made initial notes on what each source contributes to their project.</a:t>
             </a:r>
             <a:endParaRPr lang="en-US" sz="1200" dirty="0"/>
           </a:p>
@@ -3053,7 +6680,7 @@
                 <a:ea typeface="Georgia" pitchFamily="34" charset="-122"/>
                 <a:cs typeface="Georgia" pitchFamily="34" charset="-120"/>
               </a:rPr>
-              <a:t>Lesson flow</a:t>
+              <a:t>Materials</a:t>
             </a:r>
             <a:endParaRPr lang="en-US" sz="1800" dirty="0"/>
           </a:p>
@@ -3062,6 +6689,164 @@
       <p:sp>
         <p:nvSpPr>
           <p:cNvPr id="4" name="Text 2"/>
+          <p:cNvSpPr/>
+          <p:nvPr/>
+        </p:nvSpPr>
+        <p:spPr>
+          <a:xfrm>
+            <a:off x="634901" y="883593"/>
+            <a:ext cx="8102798" cy="1032272"/>
+          </a:xfrm>
+          <a:prstGeom prst="rect">
+            <a:avLst/>
+          </a:prstGeom>
+          <a:noFill/>
+          <a:ln/>
+        </p:spPr>
+        <p:txBody>
+          <a:bodyPr wrap="square" lIns="0" tIns="0" rIns="0" bIns="0" rtlCol="0" anchor="t"/>
+          <a:lstStyle/>
+          <a:p>
+            <a:pPr algn="l" marL="342900" indent="-342900">
+              <a:lnSpc>
+                <a:spcPts val="1620"/>
+              </a:lnSpc>
+              <a:spcAft>
+                <a:spcPts val="300"/>
+              </a:spcAft>
+              <a:buSzPct val="100000"/>
+              <a:buChar char="•"/>
+            </a:pPr>
+            <a:r>
+              <a:rPr lang="en-US" sz="1200" dirty="0">
+                <a:solidFill>
+                  <a:srgbClr val="1C2833"/>
+                </a:solidFill>
+                <a:latin typeface="Arial" pitchFamily="34" charset="0"/>
+                <a:ea typeface="Arial" pitchFamily="34" charset="-122"/>
+                <a:cs typeface="Arial" pitchFamily="34" charset="-120"/>
+              </a:rPr>
+              <a:t>Each anchor module's printed </a:t>
+            </a:r>
+            <a:pPr algn="l" indent="0" marL="0">
+              <a:lnSpc>
+                <a:spcPts val="1620"/>
+              </a:lnSpc>
+              <a:spcAft>
+                <a:spcPts val="300"/>
+              </a:spcAft>
+              <a:buNone/>
+            </a:pPr>
+            <a:r>
+              <a:rPr lang="en-US" sz="1200" dirty="0">
+                <a:solidFill>
+                  <a:srgbClr val="1C2833"/>
+                </a:solidFill>
+                <a:latin typeface="Arial" pitchFamily="34" charset="0"/>
+                <a:ea typeface="Arial" pitchFamily="34" charset="-122"/>
+                <a:cs typeface="Arial" pitchFamily="34" charset="-120"/>
+              </a:rPr>
+              <a:t>sources.md</a:t>
+            </a:r>
+            <a:pPr algn="l" indent="0" marL="0">
+              <a:lnSpc>
+                <a:spcPts val="1620"/>
+              </a:lnSpc>
+              <a:spcAft>
+                <a:spcPts val="300"/>
+              </a:spcAft>
+              <a:buNone/>
+            </a:pPr>
+            <a:r>
+              <a:rPr lang="en-US" sz="1200" dirty="0">
+                <a:solidFill>
+                  <a:srgbClr val="1C2833"/>
+                </a:solidFill>
+                <a:latin typeface="Arial" pitchFamily="34" charset="0"/>
+                <a:ea typeface="Arial" pitchFamily="34" charset="-122"/>
+                <a:cs typeface="Arial" pitchFamily="34" charset="-120"/>
+              </a:rPr>
+              <a:t> (teacher prepares a small shelf of these)</a:t>
+            </a:r>
+            <a:endParaRPr lang="en-US" sz="1200" dirty="0"/>
+          </a:p>
+          <a:p>
+            <a:pPr algn="l" marL="342900" indent="-342900">
+              <a:lnSpc>
+                <a:spcPts val="1620"/>
+              </a:lnSpc>
+              <a:spcAft>
+                <a:spcPts val="300"/>
+              </a:spcAft>
+              <a:buSzPct val="100000"/>
+              <a:buChar char="•"/>
+            </a:pPr>
+            <a:r>
+              <a:rPr lang="en-US" sz="1200" dirty="0">
+                <a:solidFill>
+                  <a:srgbClr val="1C2833"/>
+                </a:solidFill>
+                <a:latin typeface="Arial" pitchFamily="34" charset="0"/>
+                <a:ea typeface="Arial" pitchFamily="34" charset="-122"/>
+                <a:cs typeface="Arial" pitchFamily="34" charset="-120"/>
+              </a:rPr>
+              <a:t>Notebook / project journal</a:t>
+            </a:r>
+            <a:endParaRPr lang="en-US" sz="1200" dirty="0"/>
+          </a:p>
+          <a:p>
+            <a:pPr algn="l" marL="342900" indent="-342900">
+              <a:lnSpc>
+                <a:spcPts val="1620"/>
+              </a:lnSpc>
+              <a:spcAft>
+                <a:spcPts val="300"/>
+              </a:spcAft>
+              <a:buSzPct val="100000"/>
+              <a:buChar char="•"/>
+            </a:pPr>
+            <a:r>
+              <a:rPr lang="en-US" sz="1200" dirty="0">
+                <a:solidFill>
+                  <a:srgbClr val="1C2833"/>
+                </a:solidFill>
+                <a:latin typeface="Arial" pitchFamily="34" charset="0"/>
+                <a:ea typeface="Arial" pitchFamily="34" charset="-122"/>
+                <a:cs typeface="Arial" pitchFamily="34" charset="-120"/>
+              </a:rPr>
+              <a:t>Sticky tabs (for marking pages students will come back to)</a:t>
+            </a:r>
+            <a:endParaRPr lang="en-US" sz="1200" dirty="0"/>
+          </a:p>
+          <a:p>
+            <a:pPr algn="l" marL="342900" indent="-342900">
+              <a:lnSpc>
+                <a:spcPts val="1620"/>
+              </a:lnSpc>
+              <a:spcAft>
+                <a:spcPts val="300"/>
+              </a:spcAft>
+              <a:buSzPct val="100000"/>
+              <a:buChar char="•"/>
+            </a:pPr>
+            <a:r>
+              <a:rPr lang="en-US" sz="1200" dirty="0">
+                <a:solidFill>
+                  <a:srgbClr val="1C2833"/>
+                </a:solidFill>
+                <a:latin typeface="Arial" pitchFamily="34" charset="0"/>
+                <a:ea typeface="Arial" pitchFamily="34" charset="-122"/>
+                <a:cs typeface="Arial" pitchFamily="34" charset="-120"/>
+              </a:rPr>
+              <a:t>Sample citation slips (see template below)</a:t>
+            </a:r>
+            <a:endParaRPr lang="en-US" sz="1200" dirty="0"/>
+          </a:p>
+        </p:txBody>
+      </p:sp>
+      <p:sp>
+        <p:nvSpPr>
+          <p:cNvPr id="5" name="Text 3"/>
           <p:cNvSpPr/>
           <p:nvPr/>
         </p:nvSpPr>
@@ -3211,7 +6996,7 @@
                 <a:ea typeface="Georgia" pitchFamily="34" charset="-122"/>
                 <a:cs typeface="Georgia" pitchFamily="34" charset="-120"/>
               </a:rPr>
-              <a:t>Warm-up (5 min)</a:t>
+              <a:t>Lesson flow</a:t>
             </a:r>
             <a:endParaRPr lang="en-US" sz="1800" dirty="0"/>
           </a:p>
@@ -3220,146 +7005,6 @@
       <p:sp>
         <p:nvSpPr>
           <p:cNvPr id="4" name="Text 2"/>
-          <p:cNvSpPr/>
-          <p:nvPr/>
-        </p:nvSpPr>
-        <p:spPr>
-          <a:xfrm>
-            <a:off x="406301" y="870942"/>
-            <a:ext cx="8498026" cy="213271"/>
-          </a:xfrm>
-          <a:prstGeom prst="rect">
-            <a:avLst/>
-          </a:prstGeom>
-          <a:noFill/>
-          <a:ln/>
-        </p:spPr>
-        <p:txBody>
-          <a:bodyPr wrap="square" lIns="0" tIns="0" rIns="0" bIns="0" rtlCol="0" anchor="t"/>
-          <a:lstStyle/>
-          <a:p>
-            <a:pPr algn="l" indent="0" marL="0">
-              <a:lnSpc>
-                <a:spcPts val="1680"/>
-              </a:lnSpc>
-              <a:spcBef>
-                <a:spcPts val="300"/>
-              </a:spcBef>
-              <a:spcAft>
-                <a:spcPts val="300"/>
-              </a:spcAft>
-              <a:buNone/>
-            </a:pPr>
-            <a:r>
-              <a:rPr lang="en-US" sz="1200" dirty="0">
-                <a:solidFill>
-                  <a:srgbClr val="1C2833"/>
-                </a:solidFill>
-                <a:latin typeface="Arial" pitchFamily="34" charset="0"/>
-                <a:ea typeface="Arial" pitchFamily="34" charset="-122"/>
-                <a:cs typeface="Arial" pitchFamily="34" charset="-120"/>
-              </a:rPr>
-              <a:t>– Daily prompt: </a:t>
-            </a:r>
-            <a:pPr algn="l" indent="0" marL="0">
-              <a:lnSpc>
-                <a:spcPts val="1680"/>
-              </a:lnSpc>
-              <a:spcBef>
-                <a:spcPts val="300"/>
-              </a:spcBef>
-              <a:spcAft>
-                <a:spcPts val="300"/>
-              </a:spcAft>
-              <a:buNone/>
-            </a:pPr>
-            <a:r>
-              <a:rPr lang="en-US" sz="1200" i="1" dirty="0">
-                <a:solidFill>
-                  <a:srgbClr val="1C2833"/>
-                </a:solidFill>
-                <a:latin typeface="Arial" pitchFamily="34" charset="0"/>
-                <a:ea typeface="Arial" pitchFamily="34" charset="-122"/>
-                <a:cs typeface="Arial" pitchFamily="34" charset="-120"/>
-              </a:rPr>
-              <a:t>"What's one thing you're worried about with your project?"</a:t>
-            </a:r>
-            <a:pPr algn="l" indent="0" marL="0">
-              <a:lnSpc>
-                <a:spcPts val="1680"/>
-              </a:lnSpc>
-              <a:spcBef>
-                <a:spcPts val="300"/>
-              </a:spcBef>
-              <a:spcAft>
-                <a:spcPts val="300"/>
-              </a:spcAft>
-              <a:buNone/>
-            </a:pPr>
-            <a:r>
-              <a:rPr lang="en-US" sz="1200" dirty="0">
-                <a:solidFill>
-                  <a:srgbClr val="1C2833"/>
-                </a:solidFill>
-                <a:latin typeface="Arial" pitchFamily="34" charset="0"/>
-                <a:ea typeface="Arial" pitchFamily="34" charset="-122"/>
-                <a:cs typeface="Arial" pitchFamily="34" charset="-120"/>
-              </a:rPr>
-              <a:t> — 3 students share. Normalise the worry.</a:t>
-            </a:r>
-            <a:endParaRPr lang="en-US" sz="1200" dirty="0"/>
-          </a:p>
-        </p:txBody>
-      </p:sp>
-      <p:sp>
-        <p:nvSpPr>
-          <p:cNvPr id="5" name="Text 3"/>
-          <p:cNvSpPr/>
-          <p:nvPr/>
-        </p:nvSpPr>
-        <p:spPr>
-          <a:xfrm>
-            <a:off x="634901" y="1173063"/>
-            <a:ext cx="8102798" cy="281880"/>
-          </a:xfrm>
-          <a:prstGeom prst="rect">
-            <a:avLst/>
-          </a:prstGeom>
-          <a:noFill/>
-          <a:ln/>
-        </p:spPr>
-        <p:txBody>
-          <a:bodyPr wrap="square" lIns="0" tIns="0" rIns="0" bIns="0" rtlCol="0" anchor="t"/>
-          <a:lstStyle/>
-          <a:p>
-            <a:pPr algn="l" marL="342900" indent="-342900">
-              <a:lnSpc>
-                <a:spcPts val="1620"/>
-              </a:lnSpc>
-              <a:spcAft>
-                <a:spcPts val="300"/>
-              </a:spcAft>
-              <a:buSzPct val="100000"/>
-              <a:buChar char="•"/>
-            </a:pPr>
-            <a:r>
-              <a:rPr lang="en-US" sz="1200" dirty="0">
-                <a:solidFill>
-                  <a:srgbClr val="1C2833"/>
-                </a:solidFill>
-                <a:latin typeface="Arial" pitchFamily="34" charset="0"/>
-                <a:ea typeface="Arial" pitchFamily="34" charset="-122"/>
-                <a:cs typeface="Arial" pitchFamily="34" charset="-120"/>
-              </a:rPr>
-              <a:t>"Research is just finding the people who've already thought about your question. You're not the first."</a:t>
-            </a:r>
-            <a:endParaRPr lang="en-US" sz="1200" dirty="0"/>
-          </a:p>
-        </p:txBody>
-      </p:sp>
-      <p:sp>
-        <p:nvSpPr>
-          <p:cNvPr id="6" name="Text 4"/>
           <p:cNvSpPr/>
           <p:nvPr/>
         </p:nvSpPr>
@@ -3509,7 +7154,7 @@
                 <a:ea typeface="Georgia" pitchFamily="34" charset="-122"/>
                 <a:cs typeface="Georgia" pitchFamily="34" charset="-120"/>
               </a:rPr>
-              <a:t>Activity (25 min) — Source hunt</a:t>
+              <a:t>Warm-up (5 min)</a:t>
             </a:r>
             <a:endParaRPr lang="en-US" sz="1800" dirty="0"/>
           </a:p>
@@ -3523,8 +7168,8 @@
         </p:nvSpPr>
         <p:spPr>
           <a:xfrm>
-            <a:off x="406301" y="870942"/>
-            <a:ext cx="8498026" cy="222796"/>
+            <a:off x="634901" y="883593"/>
+            <a:ext cx="8102798" cy="525661"/>
           </a:xfrm>
           <a:prstGeom prst="rect">
             <a:avLst/>
@@ -3536,17 +7181,15 @@
           <a:bodyPr wrap="square" lIns="0" tIns="0" rIns="0" bIns="0" rtlCol="0" anchor="t"/>
           <a:lstStyle/>
           <a:p>
-            <a:pPr algn="l" indent="0" marL="0">
-              <a:lnSpc>
-                <a:spcPts val="1680"/>
-              </a:lnSpc>
-              <a:spcBef>
-                <a:spcPts val="300"/>
-              </a:spcBef>
-              <a:spcAft>
-                <a:spcPts val="300"/>
-              </a:spcAft>
-              <a:buNone/>
+            <a:pPr algn="l" marL="342900" indent="-342900">
+              <a:lnSpc>
+                <a:spcPts val="1620"/>
+              </a:lnSpc>
+              <a:spcAft>
+                <a:spcPts val="300"/>
+              </a:spcAft>
+              <a:buSzPct val="100000"/>
+              <a:buChar char="•"/>
             </a:pPr>
             <a:r>
               <a:rPr lang="en-US" sz="1200" dirty="0">
@@ -3557,15 +7200,32 @@
                 <a:ea typeface="Arial" pitchFamily="34" charset="-122"/>
                 <a:cs typeface="Arial" pitchFamily="34" charset="-120"/>
               </a:rPr>
-              <a:t>Refer to </a:t>
-            </a:r>
-            <a:pPr algn="l" indent="0" marL="0">
-              <a:lnSpc>
-                <a:spcPts val="1680"/>
-              </a:lnSpc>
-              <a:spcBef>
-                <a:spcPts val="300"/>
-              </a:spcBef>
+              <a:t>Daily prompt: </a:t>
+            </a:r>
+            <a:pPr algn="l" indent="0" marL="0">
+              <a:lnSpc>
+                <a:spcPts val="1620"/>
+              </a:lnSpc>
+              <a:spcAft>
+                <a:spcPts val="300"/>
+              </a:spcAft>
+              <a:buNone/>
+            </a:pPr>
+            <a:r>
+              <a:rPr lang="en-US" sz="1200" i="1" dirty="0">
+                <a:solidFill>
+                  <a:srgbClr val="1C2833"/>
+                </a:solidFill>
+                <a:latin typeface="Arial" pitchFamily="34" charset="0"/>
+                <a:ea typeface="Arial" pitchFamily="34" charset="-122"/>
+                <a:cs typeface="Arial" pitchFamily="34" charset="-120"/>
+              </a:rPr>
+              <a:t>"What's one thing you're worried about with your project?"</a:t>
+            </a:r>
+            <a:pPr algn="l" indent="0" marL="0">
+              <a:lnSpc>
+                <a:spcPts val="1620"/>
+              </a:lnSpc>
               <a:spcAft>
                 <a:spcPts val="300"/>
               </a:spcAft>
@@ -3580,19 +7240,20 @@
                 <a:ea typeface="Arial" pitchFamily="34" charset="-122"/>
                 <a:cs typeface="Arial" pitchFamily="34" charset="-120"/>
               </a:rPr>
-              <a:t>activities/activity-01-source-hunt.md</a:t>
-            </a:r>
-            <a:pPr algn="l" indent="0" marL="0">
-              <a:lnSpc>
-                <a:spcPts val="1680"/>
-              </a:lnSpc>
-              <a:spcBef>
-                <a:spcPts val="300"/>
-              </a:spcBef>
-              <a:spcAft>
-                <a:spcPts val="300"/>
-              </a:spcAft>
-              <a:buNone/>
+              <a:t> — 3 students share. Normalise the worry.</a:t>
+            </a:r>
+            <a:endParaRPr lang="en-US" sz="1200" dirty="0"/>
+          </a:p>
+          <a:p>
+            <a:pPr algn="l" marL="342900" indent="-342900">
+              <a:lnSpc>
+                <a:spcPts val="1620"/>
+              </a:lnSpc>
+              <a:spcAft>
+                <a:spcPts val="300"/>
+              </a:spcAft>
+              <a:buSzPct val="100000"/>
+              <a:buChar char="•"/>
             </a:pPr>
             <a:r>
               <a:rPr lang="en-US" sz="1200" dirty="0">
@@ -3603,7 +7264,7 @@
                 <a:ea typeface="Arial" pitchFamily="34" charset="-122"/>
                 <a:cs typeface="Arial" pitchFamily="34" charset="-120"/>
               </a:rPr>
-              <a:t> for the full activity. Quick summary:</a:t>
+              <a:t>"Research is just finding the people who've already thought about your question. You're not the first."</a:t>
             </a:r>
             <a:endParaRPr lang="en-US" sz="1200" dirty="0"/>
           </a:p>
@@ -3617,669 +7278,7 @@
         </p:nvSpPr>
         <p:spPr>
           <a:xfrm>
-            <a:off x="406301" y="1169938"/>
-            <a:ext cx="8498026" cy="862608"/>
-          </a:xfrm>
-          <a:prstGeom prst="rect">
-            <a:avLst/>
-          </a:prstGeom>
-          <a:noFill/>
-          <a:ln/>
-        </p:spPr>
-        <p:txBody>
-          <a:bodyPr wrap="square" lIns="0" tIns="0" rIns="0" bIns="0" rtlCol="0" anchor="t"/>
-          <a:lstStyle/>
-          <a:p>
-            <a:pPr algn="l" indent="0" marL="0">
-              <a:lnSpc>
-                <a:spcPts val="1680"/>
-              </a:lnSpc>
-              <a:spcBef>
-                <a:spcPts val="300"/>
-              </a:spcBef>
-              <a:spcAft>
-                <a:spcPts val="300"/>
-              </a:spcAft>
-              <a:buNone/>
-            </a:pPr>
-            <a:r>
-              <a:rPr lang="en-US" sz="1200" dirty="0">
-                <a:solidFill>
-                  <a:srgbClr val="1C2833"/>
-                </a:solidFill>
-                <a:latin typeface="Arial" pitchFamily="34" charset="0"/>
-                <a:ea typeface="Arial" pitchFamily="34" charset="-122"/>
-                <a:cs typeface="Arial" pitchFamily="34" charset="-120"/>
-              </a:rPr>
-              <a:t>– Students sit in clusters by anchor module (all Module 10 students together, all Module 4 together, etc.). This lets them help each other find the right cache file. – Each student opens their anchor module's </a:t>
-            </a:r>
-            <a:pPr algn="l" indent="0" marL="0">
-              <a:lnSpc>
-                <a:spcPts val="1680"/>
-              </a:lnSpc>
-              <a:spcBef>
-                <a:spcPts val="300"/>
-              </a:spcBef>
-              <a:spcAft>
-                <a:spcPts val="300"/>
-              </a:spcAft>
-              <a:buNone/>
-            </a:pPr>
-            <a:r>
-              <a:rPr lang="en-US" sz="1200" dirty="0">
-                <a:solidFill>
-                  <a:srgbClr val="1C2833"/>
-                </a:solidFill>
-                <a:latin typeface="Arial" pitchFamily="34" charset="0"/>
-                <a:ea typeface="Arial" pitchFamily="34" charset="-122"/>
-                <a:cs typeface="Arial" pitchFamily="34" charset="-120"/>
-              </a:rPr>
-              <a:t>sources.md</a:t>
-            </a:r>
-            <a:pPr algn="l" indent="0" marL="0">
-              <a:lnSpc>
-                <a:spcPts val="1680"/>
-              </a:lnSpc>
-              <a:spcBef>
-                <a:spcPts val="300"/>
-              </a:spcBef>
-              <a:spcAft>
-                <a:spcPts val="300"/>
-              </a:spcAft>
-              <a:buNone/>
-            </a:pPr>
-            <a:r>
-              <a:rPr lang="en-US" sz="1200" dirty="0">
-                <a:solidFill>
-                  <a:srgbClr val="1C2833"/>
-                </a:solidFill>
-                <a:latin typeface="Arial" pitchFamily="34" charset="0"/>
-                <a:ea typeface="Arial" pitchFamily="34" charset="-122"/>
-                <a:cs typeface="Arial" pitchFamily="34" charset="-120"/>
-              </a:rPr>
-              <a:t> and </a:t>
-            </a:r>
-            <a:pPr algn="l" indent="0" marL="0">
-              <a:lnSpc>
-                <a:spcPts val="1680"/>
-              </a:lnSpc>
-              <a:spcBef>
-                <a:spcPts val="300"/>
-              </a:spcBef>
-              <a:spcAft>
-                <a:spcPts val="300"/>
-              </a:spcAft>
-              <a:buNone/>
-            </a:pPr>
-            <a:r>
-              <a:rPr lang="en-US" sz="1200" dirty="0">
-                <a:solidFill>
-                  <a:srgbClr val="1C2833"/>
-                </a:solidFill>
-                <a:latin typeface="Arial" pitchFamily="34" charset="0"/>
-                <a:ea typeface="Arial" pitchFamily="34" charset="-122"/>
-                <a:cs typeface="Arial" pitchFamily="34" charset="-120"/>
-              </a:rPr>
-              <a:t>.rag-cache/</a:t>
-            </a:r>
-            <a:pPr algn="l" indent="0" marL="0">
-              <a:lnSpc>
-                <a:spcPts val="1680"/>
-              </a:lnSpc>
-              <a:spcBef>
-                <a:spcPts val="300"/>
-              </a:spcBef>
-              <a:spcAft>
-                <a:spcPts val="300"/>
-              </a:spcAft>
-              <a:buNone/>
-            </a:pPr>
-            <a:r>
-              <a:rPr lang="en-US" sz="1200" dirty="0">
-                <a:solidFill>
-                  <a:srgbClr val="1C2833"/>
-                </a:solidFill>
-                <a:latin typeface="Arial" pitchFamily="34" charset="0"/>
-                <a:ea typeface="Arial" pitchFamily="34" charset="-122"/>
-                <a:cs typeface="Arial" pitchFamily="34" charset="-120"/>
-              </a:rPr>
-              <a:t>. They scan for relevant entries. – For each candidate source they want to use, they fill in a </a:t>
-            </a:r>
-            <a:pPr algn="l" indent="0" marL="0">
-              <a:lnSpc>
-                <a:spcPts val="1680"/>
-              </a:lnSpc>
-              <a:spcBef>
-                <a:spcPts val="300"/>
-              </a:spcBef>
-              <a:spcAft>
-                <a:spcPts val="300"/>
-              </a:spcAft>
-              <a:buNone/>
-            </a:pPr>
-            <a:r>
-              <a:rPr lang="en-US" sz="1200" b="1" dirty="0">
-                <a:solidFill>
-                  <a:srgbClr val="1C2833"/>
-                </a:solidFill>
-                <a:latin typeface="Arial" pitchFamily="34" charset="0"/>
-                <a:ea typeface="Arial" pitchFamily="34" charset="-122"/>
-                <a:cs typeface="Arial" pitchFamily="34" charset="-120"/>
-              </a:rPr>
-              <a:t>citation slip</a:t>
-            </a:r>
-            <a:pPr algn="l" indent="0" marL="0">
-              <a:lnSpc>
-                <a:spcPts val="1680"/>
-              </a:lnSpc>
-              <a:spcBef>
-                <a:spcPts val="300"/>
-              </a:spcBef>
-              <a:spcAft>
-                <a:spcPts val="300"/>
-              </a:spcAft>
-              <a:buNone/>
-            </a:pPr>
-            <a:r>
-              <a:rPr lang="en-US" sz="1200" dirty="0">
-                <a:solidFill>
-                  <a:srgbClr val="1C2833"/>
-                </a:solidFill>
-                <a:latin typeface="Arial" pitchFamily="34" charset="0"/>
-                <a:ea typeface="Arial" pitchFamily="34" charset="-122"/>
-                <a:cs typeface="Arial" pitchFamily="34" charset="-120"/>
-              </a:rPr>
-              <a:t> (template below). – Minimum: 2 completed slips by end of class.</a:t>
-            </a:r>
-            <a:endParaRPr lang="en-US" sz="1200" dirty="0"/>
-          </a:p>
-        </p:txBody>
-      </p:sp>
-      <p:sp>
-        <p:nvSpPr>
-          <p:cNvPr id="6" name="Text 4"/>
-          <p:cNvSpPr/>
-          <p:nvPr/>
-        </p:nvSpPr>
-        <p:spPr>
-          <a:xfrm>
-            <a:off x="406301" y="2146846"/>
-            <a:ext cx="8498026" cy="209550"/>
-          </a:xfrm>
-          <a:prstGeom prst="rect">
-            <a:avLst/>
-          </a:prstGeom>
-          <a:noFill/>
-          <a:ln/>
-        </p:spPr>
-        <p:txBody>
-          <a:bodyPr wrap="square" lIns="0" tIns="0" rIns="0" bIns="0" rtlCol="0" anchor="t"/>
-          <a:lstStyle/>
-          <a:p>
-            <a:pPr algn="l" indent="0" marL="0">
-              <a:spcBef>
-                <a:spcPts val="600"/>
-              </a:spcBef>
-              <a:spcAft>
-                <a:spcPts val="400"/>
-              </a:spcAft>
-              <a:buNone/>
-            </a:pPr>
-            <a:r>
-              <a:rPr lang="en-US" sz="1400" b="1" dirty="0">
-                <a:solidFill>
-                  <a:srgbClr val="1C2833"/>
-                </a:solidFill>
-                <a:latin typeface="Arial" pitchFamily="34" charset="0"/>
-                <a:ea typeface="Arial" pitchFamily="34" charset="-122"/>
-                <a:cs typeface="Arial" pitchFamily="34" charset="-120"/>
-              </a:rPr>
-              <a:t>Citation slip template</a:t>
-            </a:r>
-            <a:endParaRPr lang="en-US" sz="1400" dirty="0"/>
-          </a:p>
-        </p:txBody>
-      </p:sp>
-      <p:sp>
-        <p:nvSpPr>
-          <p:cNvPr id="7" name="Text 5"/>
-          <p:cNvSpPr/>
-          <p:nvPr/>
-        </p:nvSpPr>
-        <p:spPr>
-          <a:xfrm>
-            <a:off x="406301" y="2457896"/>
-            <a:ext cx="8331398" cy="2697956"/>
-          </a:xfrm>
-          <a:prstGeom prst="rect">
-            <a:avLst/>
-          </a:prstGeom>
-          <a:solidFill>
-            <a:srgbClr val="F4F8F9"/>
-          </a:solidFill>
-          <a:ln/>
-        </p:spPr>
-        <p:txBody>
-          <a:bodyPr wrap="square" rtlCol="0" anchor="ctr"/>
-          <a:lstStyle/>
-          <a:p>
-            <a:pPr indent="0" marL="0">
-              <a:buNone/>
-            </a:pPr>
-            <a:endParaRPr lang="en-US" dirty="0"/>
-          </a:p>
-        </p:txBody>
-      </p:sp>
-      <p:sp>
-        <p:nvSpPr>
-          <p:cNvPr id="8" name="Shape 6"/>
-          <p:cNvSpPr/>
-          <p:nvPr/>
-        </p:nvSpPr>
-        <p:spPr>
-          <a:xfrm>
-            <a:off x="430113" y="2457896"/>
-            <a:ext cx="0" cy="2697956"/>
-          </a:xfrm>
-          <a:prstGeom prst="line">
-            <a:avLst/>
-          </a:prstGeom>
-          <a:noFill/>
-          <a:ln w="47625">
-            <a:solidFill>
-              <a:srgbClr val="277884"/>
-            </a:solidFill>
-            <a:prstDash val="solid"/>
-          </a:ln>
-        </p:spPr>
-      </p:sp>
-      <p:sp>
-        <p:nvSpPr>
-          <p:cNvPr id="9" name="Text 7"/>
-          <p:cNvSpPr/>
-          <p:nvPr/>
-        </p:nvSpPr>
-        <p:spPr>
-          <a:xfrm>
-            <a:off x="631627" y="2584847"/>
-            <a:ext cx="8086939" cy="174575"/>
-          </a:xfrm>
-          <a:prstGeom prst="rect">
-            <a:avLst/>
-          </a:prstGeom>
-          <a:noFill/>
-          <a:ln/>
-        </p:spPr>
-        <p:txBody>
-          <a:bodyPr wrap="square" lIns="0" tIns="0" rIns="0" bIns="0" rtlCol="0" anchor="t"/>
-          <a:lstStyle/>
-          <a:p>
-            <a:pPr algn="l" indent="0" marL="0">
-              <a:lnSpc>
-                <a:spcPts val="1375"/>
-              </a:lnSpc>
-              <a:buNone/>
-            </a:pPr>
-            <a:r>
-              <a:rPr lang="en-US" sz="1100" dirty="0">
-                <a:solidFill>
-                  <a:srgbClr val="1C2833"/>
-                </a:solidFill>
-                <a:latin typeface="Courier New" pitchFamily="34" charset="0"/>
-                <a:ea typeface="Courier New" pitchFamily="34" charset="-122"/>
-                <a:cs typeface="Courier New" pitchFamily="34" charset="-120"/>
-              </a:rPr>
-              <a:t>CITATION SLIP — Source #__</a:t>
-            </a:r>
-            <a:endParaRPr lang="en-US" sz="1100" dirty="0"/>
-          </a:p>
-        </p:txBody>
-      </p:sp>
-      <p:sp>
-        <p:nvSpPr>
-          <p:cNvPr id="10" name="Text 8"/>
-          <p:cNvSpPr/>
-          <p:nvPr/>
-        </p:nvSpPr>
-        <p:spPr>
-          <a:xfrm>
-            <a:off x="631627" y="2933998"/>
-            <a:ext cx="8086939" cy="174575"/>
-          </a:xfrm>
-          <a:prstGeom prst="rect">
-            <a:avLst/>
-          </a:prstGeom>
-          <a:noFill/>
-          <a:ln/>
-        </p:spPr>
-        <p:txBody>
-          <a:bodyPr wrap="square" lIns="0" tIns="0" rIns="0" bIns="0" rtlCol="0" anchor="t"/>
-          <a:lstStyle/>
-          <a:p>
-            <a:pPr algn="l" indent="0" marL="0">
-              <a:lnSpc>
-                <a:spcPts val="1375"/>
-              </a:lnSpc>
-              <a:buNone/>
-            </a:pPr>
-            <a:r>
-              <a:rPr lang="en-US" sz="1100" dirty="0">
-                <a:solidFill>
-                  <a:srgbClr val="1C2833"/>
-                </a:solidFill>
-                <a:latin typeface="Courier New" pitchFamily="34" charset="0"/>
-                <a:ea typeface="Courier New" pitchFamily="34" charset="-122"/>
-                <a:cs typeface="Courier New" pitchFamily="34" charset="-120"/>
-              </a:rPr>
-              <a:t>Source identifier: __________________________________</a:t>
-            </a:r>
-            <a:endParaRPr lang="en-US" sz="1100" dirty="0"/>
-          </a:p>
-        </p:txBody>
-      </p:sp>
-      <p:sp>
-        <p:nvSpPr>
-          <p:cNvPr id="11" name="Text 9"/>
-          <p:cNvSpPr/>
-          <p:nvPr/>
-        </p:nvSpPr>
-        <p:spPr>
-          <a:xfrm>
-            <a:off x="631627" y="3283148"/>
-            <a:ext cx="8086939" cy="174575"/>
-          </a:xfrm>
-          <a:prstGeom prst="rect">
-            <a:avLst/>
-          </a:prstGeom>
-          <a:noFill/>
-          <a:ln/>
-        </p:spPr>
-        <p:txBody>
-          <a:bodyPr wrap="square" lIns="0" tIns="0" rIns="0" bIns="0" rtlCol="0" anchor="t"/>
-          <a:lstStyle/>
-          <a:p>
-            <a:pPr algn="l" indent="0" marL="0">
-              <a:lnSpc>
-                <a:spcPts val="1375"/>
-              </a:lnSpc>
-              <a:buNone/>
-            </a:pPr>
-            <a:r>
-              <a:rPr lang="en-US" sz="1100" dirty="0">
-                <a:solidFill>
-                  <a:srgbClr val="1C2833"/>
-                </a:solidFill>
-                <a:latin typeface="Courier New" pitchFamily="34" charset="0"/>
-                <a:ea typeface="Courier New" pitchFamily="34" charset="-122"/>
-                <a:cs typeface="Courier New" pitchFamily="34" charset="-120"/>
-              </a:rPr>
-              <a:t>Where I found it: __________________________________</a:t>
-            </a:r>
-            <a:endParaRPr lang="en-US" sz="1100" dirty="0"/>
-          </a:p>
-        </p:txBody>
-      </p:sp>
-      <p:sp>
-        <p:nvSpPr>
-          <p:cNvPr id="12" name="Text 10"/>
-          <p:cNvSpPr/>
-          <p:nvPr/>
-        </p:nvSpPr>
-        <p:spPr>
-          <a:xfrm>
-            <a:off x="631627" y="3632299"/>
-            <a:ext cx="8086939" cy="174575"/>
-          </a:xfrm>
-          <a:prstGeom prst="rect">
-            <a:avLst/>
-          </a:prstGeom>
-          <a:noFill/>
-          <a:ln/>
-        </p:spPr>
-        <p:txBody>
-          <a:bodyPr wrap="square" lIns="0" tIns="0" rIns="0" bIns="0" rtlCol="0" anchor="t"/>
-          <a:lstStyle/>
-          <a:p>
-            <a:pPr algn="l" indent="0" marL="0">
-              <a:lnSpc>
-                <a:spcPts val="1375"/>
-              </a:lnSpc>
-              <a:buNone/>
-            </a:pPr>
-            <a:r>
-              <a:rPr lang="en-US" sz="1100" dirty="0">
-                <a:solidFill>
-                  <a:srgbClr val="1C2833"/>
-                </a:solidFill>
-                <a:latin typeface="Courier New" pitchFamily="34" charset="0"/>
-                <a:ea typeface="Courier New" pitchFamily="34" charset="-122"/>
-                <a:cs typeface="Courier New" pitchFamily="34" charset="-120"/>
-              </a:rPr>
-              <a:t>What it says (1–2 sentences in my own words):</a:t>
-            </a:r>
-            <a:endParaRPr lang="en-US" sz="1100" dirty="0"/>
-          </a:p>
-        </p:txBody>
-      </p:sp>
-      <p:sp>
-        <p:nvSpPr>
-          <p:cNvPr id="13" name="Text 11"/>
-          <p:cNvSpPr/>
-          <p:nvPr/>
-        </p:nvSpPr>
-        <p:spPr>
-          <a:xfrm>
-            <a:off x="631627" y="3806875"/>
-            <a:ext cx="8086939" cy="174575"/>
-          </a:xfrm>
-          <a:prstGeom prst="rect">
-            <a:avLst/>
-          </a:prstGeom>
-          <a:noFill/>
-          <a:ln/>
-        </p:spPr>
-        <p:txBody>
-          <a:bodyPr wrap="square" lIns="0" tIns="0" rIns="0" bIns="0" rtlCol="0" anchor="t"/>
-          <a:lstStyle/>
-          <a:p>
-            <a:pPr algn="l" indent="0" marL="0">
-              <a:lnSpc>
-                <a:spcPts val="1375"/>
-              </a:lnSpc>
-              <a:buNone/>
-            </a:pPr>
-            <a:r>
-              <a:rPr lang="en-US" sz="1100" dirty="0">
-                <a:solidFill>
-                  <a:srgbClr val="1C2833"/>
-                </a:solidFill>
-                <a:latin typeface="Courier New" pitchFamily="34" charset="0"/>
-                <a:ea typeface="Courier New" pitchFamily="34" charset="-122"/>
-                <a:cs typeface="Courier New" pitchFamily="34" charset="-120"/>
-              </a:rPr>
-              <a:t>_______________________________________________</a:t>
-            </a:r>
-            <a:endParaRPr lang="en-US" sz="1100" dirty="0"/>
-          </a:p>
-        </p:txBody>
-      </p:sp>
-      <p:sp>
-        <p:nvSpPr>
-          <p:cNvPr id="14" name="Text 12"/>
-          <p:cNvSpPr/>
-          <p:nvPr/>
-        </p:nvSpPr>
-        <p:spPr>
-          <a:xfrm>
-            <a:off x="631627" y="3981450"/>
-            <a:ext cx="8086939" cy="174575"/>
-          </a:xfrm>
-          <a:prstGeom prst="rect">
-            <a:avLst/>
-          </a:prstGeom>
-          <a:noFill/>
-          <a:ln/>
-        </p:spPr>
-        <p:txBody>
-          <a:bodyPr wrap="square" lIns="0" tIns="0" rIns="0" bIns="0" rtlCol="0" anchor="t"/>
-          <a:lstStyle/>
-          <a:p>
-            <a:pPr algn="l" indent="0" marL="0">
-              <a:lnSpc>
-                <a:spcPts val="1375"/>
-              </a:lnSpc>
-              <a:buNone/>
-            </a:pPr>
-            <a:r>
-              <a:rPr lang="en-US" sz="1100" dirty="0">
-                <a:solidFill>
-                  <a:srgbClr val="1C2833"/>
-                </a:solidFill>
-                <a:latin typeface="Courier New" pitchFamily="34" charset="0"/>
-                <a:ea typeface="Courier New" pitchFamily="34" charset="-122"/>
-                <a:cs typeface="Courier New" pitchFamily="34" charset="-120"/>
-              </a:rPr>
-              <a:t>_______________________________________________</a:t>
-            </a:r>
-            <a:endParaRPr lang="en-US" sz="1100" dirty="0"/>
-          </a:p>
-        </p:txBody>
-      </p:sp>
-      <p:sp>
-        <p:nvSpPr>
-          <p:cNvPr id="15" name="Text 13"/>
-          <p:cNvSpPr/>
-          <p:nvPr/>
-        </p:nvSpPr>
-        <p:spPr>
-          <a:xfrm>
-            <a:off x="631627" y="4330601"/>
-            <a:ext cx="8086939" cy="174575"/>
-          </a:xfrm>
-          <a:prstGeom prst="rect">
-            <a:avLst/>
-          </a:prstGeom>
-          <a:noFill/>
-          <a:ln/>
-        </p:spPr>
-        <p:txBody>
-          <a:bodyPr wrap="square" lIns="0" tIns="0" rIns="0" bIns="0" rtlCol="0" anchor="t"/>
-          <a:lstStyle/>
-          <a:p>
-            <a:pPr algn="l" indent="0" marL="0">
-              <a:lnSpc>
-                <a:spcPts val="1375"/>
-              </a:lnSpc>
-              <a:buNone/>
-            </a:pPr>
-            <a:r>
-              <a:rPr lang="en-US" sz="1100" dirty="0">
-                <a:solidFill>
-                  <a:srgbClr val="1C2833"/>
-                </a:solidFill>
-                <a:latin typeface="Courier New" pitchFamily="34" charset="0"/>
-                <a:ea typeface="Courier New" pitchFamily="34" charset="-122"/>
-                <a:cs typeface="Courier New" pitchFamily="34" charset="-120"/>
-              </a:rPr>
-              <a:t>How this relates to my project (1 sentence):</a:t>
-            </a:r>
-            <a:endParaRPr lang="en-US" sz="1100" dirty="0"/>
-          </a:p>
-        </p:txBody>
-      </p:sp>
-      <p:sp>
-        <p:nvSpPr>
-          <p:cNvPr id="16" name="Text 14"/>
-          <p:cNvSpPr/>
-          <p:nvPr/>
-        </p:nvSpPr>
-        <p:spPr>
-          <a:xfrm>
-            <a:off x="631627" y="4505176"/>
-            <a:ext cx="8086939" cy="174575"/>
-          </a:xfrm>
-          <a:prstGeom prst="rect">
-            <a:avLst/>
-          </a:prstGeom>
-          <a:noFill/>
-          <a:ln/>
-        </p:spPr>
-        <p:txBody>
-          <a:bodyPr wrap="square" lIns="0" tIns="0" rIns="0" bIns="0" rtlCol="0" anchor="t"/>
-          <a:lstStyle/>
-          <a:p>
-            <a:pPr algn="l" indent="0" marL="0">
-              <a:lnSpc>
-                <a:spcPts val="1375"/>
-              </a:lnSpc>
-              <a:buNone/>
-            </a:pPr>
-            <a:r>
-              <a:rPr lang="en-US" sz="1100" dirty="0">
-                <a:solidFill>
-                  <a:srgbClr val="1C2833"/>
-                </a:solidFill>
-                <a:latin typeface="Courier New" pitchFamily="34" charset="0"/>
-                <a:ea typeface="Courier New" pitchFamily="34" charset="-122"/>
-                <a:cs typeface="Courier New" pitchFamily="34" charset="-120"/>
-              </a:rPr>
-              <a:t>_______________________________________________</a:t>
-            </a:r>
-            <a:endParaRPr lang="en-US" sz="1100" dirty="0"/>
-          </a:p>
-        </p:txBody>
-      </p:sp>
-      <p:sp>
-        <p:nvSpPr>
-          <p:cNvPr id="17" name="Text 15"/>
-          <p:cNvSpPr/>
-          <p:nvPr/>
-        </p:nvSpPr>
-        <p:spPr>
-          <a:xfrm>
-            <a:off x="631627" y="4854327"/>
-            <a:ext cx="8086939" cy="174575"/>
-          </a:xfrm>
-          <a:prstGeom prst="rect">
-            <a:avLst/>
-          </a:prstGeom>
-          <a:noFill/>
-          <a:ln/>
-        </p:spPr>
-        <p:txBody>
-          <a:bodyPr wrap="square" lIns="0" tIns="0" rIns="0" bIns="0" rtlCol="0" anchor="t"/>
-          <a:lstStyle/>
-          <a:p>
-            <a:pPr algn="l" indent="0" marL="0">
-              <a:lnSpc>
-                <a:spcPts val="1375"/>
-              </a:lnSpc>
-              <a:buNone/>
-            </a:pPr>
-            <a:r>
-              <a:rPr lang="en-US" sz="1100" dirty="0">
-                <a:solidFill>
-                  <a:srgbClr val="1C2833"/>
-                </a:solidFill>
-                <a:latin typeface="Courier New" pitchFamily="34" charset="0"/>
-                <a:ea typeface="Courier New" pitchFamily="34" charset="-122"/>
-                <a:cs typeface="Courier New" pitchFamily="34" charset="-120"/>
-              </a:rPr>
-              <a:t>This is a [primary text / secondary reference / primary observation] source.</a:t>
-            </a:r>
-            <a:endParaRPr lang="en-US" sz="1100" dirty="0"/>
-          </a:p>
-        </p:txBody>
-      </p:sp>
-      <p:sp>
-        <p:nvSpPr>
-          <p:cNvPr id="18" name="Text 16"/>
-          <p:cNvSpPr/>
-          <p:nvPr/>
-        </p:nvSpPr>
-        <p:spPr>
-          <a:xfrm>
-            <a:off x="406301" y="5320903"/>
+            <a:off x="406301" y="4434929"/>
             <a:ext cx="8498026" cy="213271"/>
           </a:xfrm>
           <a:prstGeom prst="rect">
@@ -4423,7 +7422,7 @@
                 <a:ea typeface="Georgia" pitchFamily="34" charset="-122"/>
                 <a:cs typeface="Georgia" pitchFamily="34" charset="-120"/>
               </a:rPr>
-              <a:t>Wrap-up (5 min)</a:t>
+              <a:t>Core (10 min)</a:t>
             </a:r>
             <a:endParaRPr lang="en-US" sz="1800" dirty="0"/>
           </a:p>
@@ -4469,7 +7468,7 @@
                 <a:ea typeface="Arial" pitchFamily="34" charset="-122"/>
                 <a:cs typeface="Arial" pitchFamily="34" charset="-120"/>
               </a:rPr>
-              <a:t>Submit citation slips</a:t>
+              <a:t>What counts as a source</a:t>
             </a:r>
             <a:pPr algn="l" indent="0" marL="0">
               <a:lnSpc>
@@ -4489,7 +7488,7 @@
                 <a:ea typeface="Arial" pitchFamily="34" charset="-122"/>
                 <a:cs typeface="Arial" pitchFamily="34" charset="-120"/>
               </a:rPr>
-              <a:t> at the in-tray. Teacher reviews tonight.</a:t>
+              <a:t> (3 min). Three categories:</a:t>
             </a:r>
             <a:endParaRPr lang="en-US" sz="1200" dirty="0"/>
           </a:p>
@@ -4503,8 +7502,8 @@
         </p:nvSpPr>
         <p:spPr>
           <a:xfrm>
-            <a:off x="406301" y="1254323"/>
-            <a:ext cx="8498026" cy="426541"/>
+            <a:off x="634901" y="1266974"/>
+            <a:ext cx="8102798" cy="1443633"/>
           </a:xfrm>
           <a:prstGeom prst="rect">
             <a:avLst/>
@@ -4516,13 +7515,31 @@
           <a:bodyPr wrap="square" lIns="0" tIns="0" rIns="0" bIns="0" rtlCol="0" anchor="t"/>
           <a:lstStyle/>
           <a:p>
-            <a:pPr algn="l" indent="0" marL="0">
-              <a:lnSpc>
-                <a:spcPts val="1680"/>
-              </a:lnSpc>
-              <a:spcBef>
-                <a:spcPts val="300"/>
-              </a:spcBef>
+            <a:pPr algn="l" marL="342900" indent="-342900">
+              <a:lnSpc>
+                <a:spcPts val="1620"/>
+              </a:lnSpc>
+              <a:spcAft>
+                <a:spcPts val="300"/>
+              </a:spcAft>
+              <a:buSzPct val="100000"/>
+              <a:buChar char="•"/>
+            </a:pPr>
+            <a:r>
+              <a:rPr lang="en-US" sz="1200" b="1" dirty="0">
+                <a:solidFill>
+                  <a:srgbClr val="1C2833"/>
+                </a:solidFill>
+                <a:latin typeface="Arial" pitchFamily="34" charset="0"/>
+                <a:ea typeface="Arial" pitchFamily="34" charset="-122"/>
+                <a:cs typeface="Arial" pitchFamily="34" charset="-120"/>
+              </a:rPr>
+              <a:t>Primary scriptural / textual source</a:t>
+            </a:r>
+            <a:pPr algn="l" indent="0" marL="0">
+              <a:lnSpc>
+                <a:spcPts val="1620"/>
+              </a:lnSpc>
               <a:spcAft>
                 <a:spcPts val="300"/>
               </a:spcAft>
@@ -4537,15 +7554,12 @@
                 <a:ea typeface="Arial" pitchFamily="34" charset="-122"/>
                 <a:cs typeface="Arial" pitchFamily="34" charset="-120"/>
               </a:rPr>
-              <a:t>– Journal entry: "Today I found ___ . The biggest surprise was ___ ." – Preview Day 4: </a:t>
-            </a:r>
-            <a:pPr algn="l" indent="0" marL="0">
-              <a:lnSpc>
-                <a:spcPts val="1680"/>
-              </a:lnSpc>
-              <a:spcBef>
-                <a:spcPts val="300"/>
-              </a:spcBef>
+              <a:t> — a named verse, </a:t>
+            </a:r>
+            <a:pPr algn="l" indent="0" marL="0">
+              <a:lnSpc>
+                <a:spcPts val="1620"/>
+              </a:lnSpc>
               <a:spcAft>
                 <a:spcPts val="300"/>
               </a:spcAft>
@@ -4560,7 +7574,315 @@
                 <a:ea typeface="Arial" pitchFamily="34" charset="-122"/>
                 <a:cs typeface="Arial" pitchFamily="34" charset="-120"/>
               </a:rPr>
-              <a:t>"Tomorrow we keep researching and you make your first design sketch. Bring whatever drawing tools you'll need."</a:t>
+              <a:t>sūtra</a:t>
+            </a:r>
+            <a:pPr algn="l" indent="0" marL="0">
+              <a:lnSpc>
+                <a:spcPts val="1620"/>
+              </a:lnSpc>
+              <a:spcAft>
+                <a:spcPts val="300"/>
+              </a:spcAft>
+              <a:buNone/>
+            </a:pPr>
+            <a:r>
+              <a:rPr lang="en-US" sz="1200" dirty="0">
+                <a:solidFill>
+                  <a:srgbClr val="1C2833"/>
+                </a:solidFill>
+                <a:latin typeface="Arial" pitchFamily="34" charset="0"/>
+                <a:ea typeface="Arial" pitchFamily="34" charset="-122"/>
+                <a:cs typeface="Arial" pitchFamily="34" charset="-120"/>
+              </a:rPr>
+              <a:t>, or chapter from a real published text (e.g. Bhāgavatam 3.26.36; </a:t>
+            </a:r>
+            <a:pPr algn="l" indent="0" marL="0">
+              <a:lnSpc>
+                <a:spcPts val="1620"/>
+              </a:lnSpc>
+              <a:spcAft>
+                <a:spcPts val="300"/>
+              </a:spcAft>
+              <a:buNone/>
+            </a:pPr>
+            <a:r>
+              <a:rPr lang="en-US" sz="1200" i="1" dirty="0">
+                <a:solidFill>
+                  <a:srgbClr val="1C2833"/>
+                </a:solidFill>
+                <a:latin typeface="Arial" pitchFamily="34" charset="0"/>
+                <a:ea typeface="Arial" pitchFamily="34" charset="-122"/>
+                <a:cs typeface="Arial" pitchFamily="34" charset="-120"/>
+              </a:rPr>
+              <a:t>Caraka Saṁhitā</a:t>
+            </a:r>
+            <a:pPr algn="l" indent="0" marL="0">
+              <a:lnSpc>
+                <a:spcPts val="1620"/>
+              </a:lnSpc>
+              <a:spcAft>
+                <a:spcPts val="300"/>
+              </a:spcAft>
+              <a:buNone/>
+            </a:pPr>
+            <a:r>
+              <a:rPr lang="en-US" sz="1200" dirty="0">
+                <a:solidFill>
+                  <a:srgbClr val="1C2833"/>
+                </a:solidFill>
+                <a:latin typeface="Arial" pitchFamily="34" charset="0"/>
+                <a:ea typeface="Arial" pitchFamily="34" charset="-122"/>
+                <a:cs typeface="Arial" pitchFamily="34" charset="-120"/>
+              </a:rPr>
+              <a:t> Sūtrasthāna 1.41; Tirthaji </a:t>
+            </a:r>
+            <a:pPr algn="l" indent="0" marL="0">
+              <a:lnSpc>
+                <a:spcPts val="1620"/>
+              </a:lnSpc>
+              <a:spcAft>
+                <a:spcPts val="300"/>
+              </a:spcAft>
+              <a:buNone/>
+            </a:pPr>
+            <a:r>
+              <a:rPr lang="en-US" sz="1200" i="1" dirty="0">
+                <a:solidFill>
+                  <a:srgbClr val="1C2833"/>
+                </a:solidFill>
+                <a:latin typeface="Arial" pitchFamily="34" charset="0"/>
+                <a:ea typeface="Arial" pitchFamily="34" charset="-122"/>
+                <a:cs typeface="Arial" pitchFamily="34" charset="-120"/>
+              </a:rPr>
+              <a:t>Vedic Mathematics</a:t>
+            </a:r>
+            <a:pPr algn="l" indent="0" marL="0">
+              <a:lnSpc>
+                <a:spcPts val="1620"/>
+              </a:lnSpc>
+              <a:spcAft>
+                <a:spcPts val="300"/>
+              </a:spcAft>
+              <a:buNone/>
+            </a:pPr>
+            <a:r>
+              <a:rPr lang="en-US" sz="1200" dirty="0">
+                <a:solidFill>
+                  <a:srgbClr val="1C2833"/>
+                </a:solidFill>
+                <a:latin typeface="Arial" pitchFamily="34" charset="0"/>
+                <a:ea typeface="Arial" pitchFamily="34" charset="-122"/>
+                <a:cs typeface="Arial" pitchFamily="34" charset="-120"/>
+              </a:rPr>
+              <a:t> p. 56). Found in any prior module's </a:t>
+            </a:r>
+            <a:pPr algn="l" indent="0" marL="0">
+              <a:lnSpc>
+                <a:spcPts val="1620"/>
+              </a:lnSpc>
+              <a:spcAft>
+                <a:spcPts val="300"/>
+              </a:spcAft>
+              <a:buNone/>
+            </a:pPr>
+            <a:r>
+              <a:rPr lang="en-US" sz="1200" dirty="0">
+                <a:solidFill>
+                  <a:srgbClr val="1C2833"/>
+                </a:solidFill>
+                <a:latin typeface="Arial" pitchFamily="34" charset="0"/>
+                <a:ea typeface="Arial" pitchFamily="34" charset="-122"/>
+                <a:cs typeface="Arial" pitchFamily="34" charset="-120"/>
+              </a:rPr>
+              <a:t>.rag-cache/</a:t>
+            </a:r>
+            <a:pPr algn="l" indent="0" marL="0">
+              <a:lnSpc>
+                <a:spcPts val="1620"/>
+              </a:lnSpc>
+              <a:spcAft>
+                <a:spcPts val="300"/>
+              </a:spcAft>
+              <a:buNone/>
+            </a:pPr>
+            <a:r>
+              <a:rPr lang="en-US" sz="1200" dirty="0">
+                <a:solidFill>
+                  <a:srgbClr val="1C2833"/>
+                </a:solidFill>
+                <a:latin typeface="Arial" pitchFamily="34" charset="0"/>
+                <a:ea typeface="Arial" pitchFamily="34" charset="-122"/>
+                <a:cs typeface="Arial" pitchFamily="34" charset="-120"/>
+              </a:rPr>
+              <a:t> or </a:t>
+            </a:r>
+            <a:pPr algn="l" indent="0" marL="0">
+              <a:lnSpc>
+                <a:spcPts val="1620"/>
+              </a:lnSpc>
+              <a:spcAft>
+                <a:spcPts val="300"/>
+              </a:spcAft>
+              <a:buNone/>
+            </a:pPr>
+            <a:r>
+              <a:rPr lang="en-US" sz="1200" dirty="0">
+                <a:solidFill>
+                  <a:srgbClr val="1C2833"/>
+                </a:solidFill>
+                <a:latin typeface="Arial" pitchFamily="34" charset="0"/>
+                <a:ea typeface="Arial" pitchFamily="34" charset="-122"/>
+                <a:cs typeface="Arial" pitchFamily="34" charset="-120"/>
+              </a:rPr>
+              <a:t>sources.md</a:t>
+            </a:r>
+            <a:pPr algn="l" indent="0" marL="0">
+              <a:lnSpc>
+                <a:spcPts val="1620"/>
+              </a:lnSpc>
+              <a:spcAft>
+                <a:spcPts val="300"/>
+              </a:spcAft>
+              <a:buNone/>
+            </a:pPr>
+            <a:r>
+              <a:rPr lang="en-US" sz="1200" dirty="0">
+                <a:solidFill>
+                  <a:srgbClr val="1C2833"/>
+                </a:solidFill>
+                <a:latin typeface="Arial" pitchFamily="34" charset="0"/>
+                <a:ea typeface="Arial" pitchFamily="34" charset="-122"/>
+                <a:cs typeface="Arial" pitchFamily="34" charset="-120"/>
+              </a:rPr>
+              <a:t>.</a:t>
+            </a:r>
+            <a:endParaRPr lang="en-US" sz="1200" dirty="0"/>
+          </a:p>
+          <a:p>
+            <a:pPr algn="l" marL="342900" indent="-342900">
+              <a:lnSpc>
+                <a:spcPts val="1620"/>
+              </a:lnSpc>
+              <a:spcAft>
+                <a:spcPts val="300"/>
+              </a:spcAft>
+              <a:buSzPct val="100000"/>
+              <a:buChar char="•"/>
+            </a:pPr>
+            <a:r>
+              <a:rPr lang="en-US" sz="1200" b="1" dirty="0">
+                <a:solidFill>
+                  <a:srgbClr val="1C2833"/>
+                </a:solidFill>
+                <a:latin typeface="Arial" pitchFamily="34" charset="0"/>
+                <a:ea typeface="Arial" pitchFamily="34" charset="-122"/>
+                <a:cs typeface="Arial" pitchFamily="34" charset="-120"/>
+              </a:rPr>
+              <a:t>Secondary reference</a:t>
+            </a:r>
+            <a:pPr algn="l" indent="0" marL="0">
+              <a:lnSpc>
+                <a:spcPts val="1620"/>
+              </a:lnSpc>
+              <a:spcAft>
+                <a:spcPts val="300"/>
+              </a:spcAft>
+              <a:buNone/>
+            </a:pPr>
+            <a:r>
+              <a:rPr lang="en-US" sz="1200" dirty="0">
+                <a:solidFill>
+                  <a:srgbClr val="1C2833"/>
+                </a:solidFill>
+                <a:latin typeface="Arial" pitchFamily="34" charset="0"/>
+                <a:ea typeface="Arial" pitchFamily="34" charset="-122"/>
+                <a:cs typeface="Arial" pitchFamily="34" charset="-120"/>
+              </a:rPr>
+              <a:t> — an NCERT textbook chapter, a published field guide, or a peer-reviewed article. Found in your anchor module's </a:t>
+            </a:r>
+            <a:pPr algn="l" indent="0" marL="0">
+              <a:lnSpc>
+                <a:spcPts val="1620"/>
+              </a:lnSpc>
+              <a:spcAft>
+                <a:spcPts val="300"/>
+              </a:spcAft>
+              <a:buNone/>
+            </a:pPr>
+            <a:r>
+              <a:rPr lang="en-US" sz="1200" dirty="0">
+                <a:solidFill>
+                  <a:srgbClr val="1C2833"/>
+                </a:solidFill>
+                <a:latin typeface="Arial" pitchFamily="34" charset="0"/>
+                <a:ea typeface="Arial" pitchFamily="34" charset="-122"/>
+                <a:cs typeface="Arial" pitchFamily="34" charset="-120"/>
+              </a:rPr>
+              <a:t>sources.md</a:t>
+            </a:r>
+            <a:pPr algn="l" indent="0" marL="0">
+              <a:lnSpc>
+                <a:spcPts val="1620"/>
+              </a:lnSpc>
+              <a:spcAft>
+                <a:spcPts val="300"/>
+              </a:spcAft>
+              <a:buNone/>
+            </a:pPr>
+            <a:r>
+              <a:rPr lang="en-US" sz="1200" dirty="0">
+                <a:solidFill>
+                  <a:srgbClr val="1C2833"/>
+                </a:solidFill>
+                <a:latin typeface="Arial" pitchFamily="34" charset="0"/>
+                <a:ea typeface="Arial" pitchFamily="34" charset="-122"/>
+                <a:cs typeface="Arial" pitchFamily="34" charset="-120"/>
+              </a:rPr>
+              <a:t>.</a:t>
+            </a:r>
+            <a:endParaRPr lang="en-US" sz="1200" dirty="0"/>
+          </a:p>
+          <a:p>
+            <a:pPr algn="l" marL="342900" indent="-342900">
+              <a:lnSpc>
+                <a:spcPts val="1620"/>
+              </a:lnSpc>
+              <a:spcAft>
+                <a:spcPts val="300"/>
+              </a:spcAft>
+              <a:buSzPct val="100000"/>
+              <a:buChar char="•"/>
+            </a:pPr>
+            <a:r>
+              <a:rPr lang="en-US" sz="1200" b="1" dirty="0">
+                <a:solidFill>
+                  <a:srgbClr val="1C2833"/>
+                </a:solidFill>
+                <a:latin typeface="Arial" pitchFamily="34" charset="0"/>
+                <a:ea typeface="Arial" pitchFamily="34" charset="-122"/>
+                <a:cs typeface="Arial" pitchFamily="34" charset="-120"/>
+              </a:rPr>
+              <a:t>Primary observation</a:t>
+            </a:r>
+            <a:pPr algn="l" indent="0" marL="0">
+              <a:lnSpc>
+                <a:spcPts val="1620"/>
+              </a:lnSpc>
+              <a:spcAft>
+                <a:spcPts val="300"/>
+              </a:spcAft>
+              <a:buNone/>
+            </a:pPr>
+            <a:r>
+              <a:rPr lang="en-US" sz="1200" dirty="0">
+                <a:solidFill>
+                  <a:srgbClr val="1C2833"/>
+                </a:solidFill>
+                <a:latin typeface="Arial" pitchFamily="34" charset="0"/>
+                <a:ea typeface="Arial" pitchFamily="34" charset="-122"/>
+                <a:cs typeface="Arial" pitchFamily="34" charset="-120"/>
+              </a:rPr>
+              <a:t> — something you saw, measured, or photographed yourself, with date and location.</a:t>
             </a:r>
             <a:endParaRPr lang="en-US" sz="1200" dirty="0"/>
           </a:p>
@@ -4718,7 +8040,7 @@
                 <a:ea typeface="Georgia" pitchFamily="34" charset="-122"/>
                 <a:cs typeface="Georgia" pitchFamily="34" charset="-120"/>
               </a:rPr>
-              <a:t>Student-facing content</a:t>
+              <a:t>Core (10 min) (cont.)</a:t>
             </a:r>
             <a:endParaRPr lang="en-US" sz="1800" dirty="0"/>
           </a:p>
@@ -4732,50 +8054,111 @@
         </p:nvSpPr>
         <p:spPr>
           <a:xfrm>
-            <a:off x="406301" y="883593"/>
-            <a:ext cx="8331398" cy="2381250"/>
-          </a:xfrm>
-          <a:prstGeom prst="rect">
-            <a:avLst/>
-          </a:prstGeom>
-          <a:solidFill>
-            <a:srgbClr val="F4F8F9"/>
-          </a:solidFill>
-          <a:ln/>
-        </p:spPr>
-        <p:txBody>
-          <a:bodyPr wrap="square" rtlCol="0" anchor="ctr"/>
-          <a:lstStyle/>
-          <a:p>
-            <a:pPr indent="0" marL="0">
-              <a:buNone/>
-            </a:pPr>
-            <a:endParaRPr lang="en-US" dirty="0"/>
-          </a:p>
-        </p:txBody>
-      </p:sp>
-      <p:sp>
-        <p:nvSpPr>
-          <p:cNvPr id="5" name="Shape 3"/>
-          <p:cNvSpPr/>
-          <p:nvPr/>
-        </p:nvSpPr>
-        <p:spPr>
-          <a:xfrm>
-            <a:off x="434876" y="883593"/>
-            <a:ext cx="0" cy="2381250"/>
-          </a:xfrm>
-          <a:prstGeom prst="line">
+            <a:off x="406301" y="870942"/>
+            <a:ext cx="8498026" cy="426541"/>
+          </a:xfrm>
+          <a:prstGeom prst="rect">
             <a:avLst/>
           </a:prstGeom>
           <a:noFill/>
-          <a:ln w="57150">
-            <a:solidFill>
-              <a:srgbClr val="FE4447"/>
-            </a:solidFill>
-            <a:prstDash val="solid"/>
-          </a:ln>
-        </p:spPr>
+          <a:ln/>
+        </p:spPr>
+        <p:txBody>
+          <a:bodyPr wrap="square" lIns="0" tIns="0" rIns="0" bIns="0" rtlCol="0" anchor="t"/>
+          <a:lstStyle/>
+          <a:p>
+            <a:pPr algn="l" indent="0" marL="0">
+              <a:lnSpc>
+                <a:spcPts val="1680"/>
+              </a:lnSpc>
+              <a:spcBef>
+                <a:spcPts val="300"/>
+              </a:spcBef>
+              <a:spcAft>
+                <a:spcPts val="300"/>
+              </a:spcAft>
+              <a:buNone/>
+            </a:pPr>
+            <a:r>
+              <a:rPr lang="en-US" sz="1200" dirty="0">
+                <a:solidFill>
+                  <a:srgbClr val="1C2833"/>
+                </a:solidFill>
+                <a:latin typeface="Arial" pitchFamily="34" charset="0"/>
+                <a:ea typeface="Arial" pitchFamily="34" charset="-122"/>
+                <a:cs typeface="Arial" pitchFamily="34" charset="-120"/>
+              </a:rPr>
+              <a:t>At least one source from category 1 or 2. Primary observations count toward your minimum two but cannot be the only source.</a:t>
+            </a:r>
+            <a:endParaRPr lang="en-US" sz="1200" dirty="0"/>
+          </a:p>
+        </p:txBody>
+      </p:sp>
+      <p:sp>
+        <p:nvSpPr>
+          <p:cNvPr id="5" name="Text 3"/>
+          <p:cNvSpPr/>
+          <p:nvPr/>
+        </p:nvSpPr>
+        <p:spPr>
+          <a:xfrm>
+            <a:off x="634901" y="1386334"/>
+            <a:ext cx="8102798" cy="281880"/>
+          </a:xfrm>
+          <a:prstGeom prst="rect">
+            <a:avLst/>
+          </a:prstGeom>
+          <a:noFill/>
+          <a:ln/>
+        </p:spPr>
+        <p:txBody>
+          <a:bodyPr wrap="square" lIns="0" tIns="0" rIns="0" bIns="0" rtlCol="0" anchor="t"/>
+          <a:lstStyle/>
+          <a:p>
+            <a:pPr algn="l" marL="342900" indent="-342900">
+              <a:lnSpc>
+                <a:spcPts val="1620"/>
+              </a:lnSpc>
+              <a:spcAft>
+                <a:spcPts val="300"/>
+              </a:spcAft>
+              <a:buSzPct val="100000"/>
+              <a:buChar char="•"/>
+            </a:pPr>
+            <a:r>
+              <a:rPr lang="en-US" sz="1200" b="1" dirty="0">
+                <a:solidFill>
+                  <a:srgbClr val="1C2833"/>
+                </a:solidFill>
+                <a:latin typeface="Arial" pitchFamily="34" charset="0"/>
+                <a:ea typeface="Arial" pitchFamily="34" charset="-122"/>
+                <a:cs typeface="Arial" pitchFamily="34" charset="-120"/>
+              </a:rPr>
+              <a:t>What does NOT count</a:t>
+            </a:r>
+            <a:pPr algn="l" indent="0" marL="0">
+              <a:lnSpc>
+                <a:spcPts val="1620"/>
+              </a:lnSpc>
+              <a:spcAft>
+                <a:spcPts val="300"/>
+              </a:spcAft>
+              <a:buNone/>
+            </a:pPr>
+            <a:r>
+              <a:rPr lang="en-US" sz="1200" dirty="0">
+                <a:solidFill>
+                  <a:srgbClr val="1C2833"/>
+                </a:solidFill>
+                <a:latin typeface="Arial" pitchFamily="34" charset="0"/>
+                <a:ea typeface="Arial" pitchFamily="34" charset="-122"/>
+                <a:cs typeface="Arial" pitchFamily="34" charset="-120"/>
+              </a:rPr>
+              <a:t> (2 min):</a:t>
+            </a:r>
+            <a:endParaRPr lang="en-US" sz="1200" dirty="0"/>
+          </a:p>
+        </p:txBody>
       </p:sp>
       <p:sp>
         <p:nvSpPr>
@@ -4785,8 +8168,8 @@
         </p:nvSpPr>
         <p:spPr>
           <a:xfrm>
-            <a:off x="692051" y="1074093"/>
-            <a:ext cx="7973389" cy="230981"/>
+            <a:off x="634901" y="1769715"/>
+            <a:ext cx="8102798" cy="1013222"/>
           </a:xfrm>
           <a:prstGeom prst="rect">
             <a:avLst/>
@@ -4798,228 +8181,106 @@
           <a:bodyPr wrap="square" lIns="0" tIns="0" rIns="0" bIns="0" rtlCol="0" anchor="t"/>
           <a:lstStyle/>
           <a:p>
-            <a:pPr algn="l" indent="0" marL="0">
-              <a:lnSpc>
-                <a:spcPts val="1820"/>
-              </a:lnSpc>
-              <a:spcBef>
-                <a:spcPts val="300"/>
-              </a:spcBef>
-              <a:spcAft>
-                <a:spcPts val="300"/>
-              </a:spcAft>
-              <a:buNone/>
-            </a:pPr>
-            <a:r>
-              <a:rPr lang="en-US" sz="1300" b="1" i="1" dirty="0">
-                <a:solidFill>
-                  <a:srgbClr val="1C2833"/>
-                </a:solidFill>
-                <a:latin typeface="Georgia" pitchFamily="34" charset="0"/>
-                <a:ea typeface="Georgia" pitchFamily="34" charset="-122"/>
-                <a:cs typeface="Georgia" pitchFamily="34" charset="-120"/>
-              </a:rPr>
-              <a:t>Today you find your sources.</a:t>
-            </a:r>
-            <a:endParaRPr lang="en-US" sz="1300" dirty="0"/>
+            <a:pPr algn="l" marL="342900" indent="-342900">
+              <a:lnSpc>
+                <a:spcPts val="1620"/>
+              </a:lnSpc>
+              <a:spcAft>
+                <a:spcPts val="300"/>
+              </a:spcAft>
+              <a:buSzPct val="100000"/>
+              <a:buChar char="•"/>
+            </a:pPr>
+            <a:r>
+              <a:rPr lang="en-US" sz="1200" dirty="0">
+                <a:solidFill>
+                  <a:srgbClr val="1C2833"/>
+                </a:solidFill>
+                <a:latin typeface="Arial" pitchFamily="34" charset="0"/>
+                <a:ea typeface="Arial" pitchFamily="34" charset="-122"/>
+                <a:cs typeface="Arial" pitchFamily="34" charset="-120"/>
+              </a:rPr>
+              <a:t>"Some say…" without naming who.</a:t>
+            </a:r>
+            <a:endParaRPr lang="en-US" sz="1200" dirty="0"/>
+          </a:p>
+          <a:p>
+            <a:pPr algn="l" marL="342900" indent="-342900">
+              <a:lnSpc>
+                <a:spcPts val="1620"/>
+              </a:lnSpc>
+              <a:spcAft>
+                <a:spcPts val="300"/>
+              </a:spcAft>
+              <a:buSzPct val="100000"/>
+              <a:buChar char="•"/>
+            </a:pPr>
+            <a:r>
+              <a:rPr lang="en-US" sz="1200" dirty="0">
+                <a:solidFill>
+                  <a:srgbClr val="1C2833"/>
+                </a:solidFill>
+                <a:latin typeface="Arial" pitchFamily="34" charset="0"/>
+                <a:ea typeface="Arial" pitchFamily="34" charset="-122"/>
+                <a:cs typeface="Arial" pitchFamily="34" charset="-120"/>
+              </a:rPr>
+              <a:t>A WhatsApp forward.</a:t>
+            </a:r>
+            <a:endParaRPr lang="en-US" sz="1200" dirty="0"/>
+          </a:p>
+          <a:p>
+            <a:pPr algn="l" marL="342900" indent="-342900">
+              <a:lnSpc>
+                <a:spcPts val="1620"/>
+              </a:lnSpc>
+              <a:spcAft>
+                <a:spcPts val="300"/>
+              </a:spcAft>
+              <a:buSzPct val="100000"/>
+              <a:buChar char="•"/>
+            </a:pPr>
+            <a:r>
+              <a:rPr lang="en-US" sz="1200" dirty="0">
+                <a:solidFill>
+                  <a:srgbClr val="1C2833"/>
+                </a:solidFill>
+                <a:latin typeface="Arial" pitchFamily="34" charset="0"/>
+                <a:ea typeface="Arial" pitchFamily="34" charset="-122"/>
+                <a:cs typeface="Arial" pitchFamily="34" charset="-120"/>
+              </a:rPr>
+              <a:t>An AI-generated paraphrase you can't trace.</a:t>
+            </a:r>
+            <a:endParaRPr lang="en-US" sz="1200" dirty="0"/>
+          </a:p>
+          <a:p>
+            <a:pPr algn="l" marL="342900" indent="-342900">
+              <a:lnSpc>
+                <a:spcPts val="1620"/>
+              </a:lnSpc>
+              <a:spcAft>
+                <a:spcPts val="300"/>
+              </a:spcAft>
+              <a:buSzPct val="100000"/>
+              <a:buChar char="•"/>
+            </a:pPr>
+            <a:r>
+              <a:rPr lang="en-US" sz="1200" dirty="0">
+                <a:solidFill>
+                  <a:srgbClr val="1C2833"/>
+                </a:solidFill>
+                <a:latin typeface="Arial" pitchFamily="34" charset="0"/>
+                <a:ea typeface="Arial" pitchFamily="34" charset="-122"/>
+                <a:cs typeface="Arial" pitchFamily="34" charset="-120"/>
+              </a:rPr>
+              <a:t>A YouTube video without references in its description.</a:t>
+            </a:r>
+            <a:endParaRPr lang="en-US" sz="1200" dirty="0"/>
           </a:p>
         </p:txBody>
       </p:sp>
       <p:sp>
         <p:nvSpPr>
           <p:cNvPr id="7" name="Text 5"/>
-          <p:cNvSpPr/>
-          <p:nvPr/>
-        </p:nvSpPr>
-        <p:spPr>
-          <a:xfrm>
-            <a:off x="692051" y="1343174"/>
-            <a:ext cx="7973389" cy="692944"/>
-          </a:xfrm>
-          <a:prstGeom prst="rect">
-            <a:avLst/>
-          </a:prstGeom>
-          <a:noFill/>
-          <a:ln/>
-        </p:spPr>
-        <p:txBody>
-          <a:bodyPr wrap="square" lIns="0" tIns="0" rIns="0" bIns="0" rtlCol="0" anchor="t"/>
-          <a:lstStyle/>
-          <a:p>
-            <a:pPr algn="l" indent="0" marL="0">
-              <a:lnSpc>
-                <a:spcPts val="1820"/>
-              </a:lnSpc>
-              <a:spcBef>
-                <a:spcPts val="300"/>
-              </a:spcBef>
-              <a:spcAft>
-                <a:spcPts val="300"/>
-              </a:spcAft>
-              <a:buNone/>
-            </a:pPr>
-            <a:r>
-              <a:rPr lang="en-US" sz="1300" i="1" dirty="0">
-                <a:solidFill>
-                  <a:srgbClr val="1C2833"/>
-                </a:solidFill>
-                <a:latin typeface="Georgia" pitchFamily="34" charset="0"/>
-                <a:ea typeface="Georgia" pitchFamily="34" charset="-122"/>
-                <a:cs typeface="Georgia" pitchFamily="34" charset="-120"/>
-              </a:rPr>
-              <a:t>Three categories count: 1. A named verse, sūtra, or chapter from a real published text. 2. An NCERT chapter, field guide, or peer-reviewed article. 3. A primary observation you made yourself, with date and location.</a:t>
-            </a:r>
-            <a:endParaRPr lang="en-US" sz="1300" dirty="0"/>
-          </a:p>
-        </p:txBody>
-      </p:sp>
-      <p:sp>
-        <p:nvSpPr>
-          <p:cNvPr id="8" name="Text 6"/>
-          <p:cNvSpPr/>
-          <p:nvPr/>
-        </p:nvSpPr>
-        <p:spPr>
-          <a:xfrm>
-            <a:off x="692051" y="2074218"/>
-            <a:ext cx="7973389" cy="230981"/>
-          </a:xfrm>
-          <a:prstGeom prst="rect">
-            <a:avLst/>
-          </a:prstGeom>
-          <a:noFill/>
-          <a:ln/>
-        </p:spPr>
-        <p:txBody>
-          <a:bodyPr wrap="square" lIns="0" tIns="0" rIns="0" bIns="0" rtlCol="0" anchor="t"/>
-          <a:lstStyle/>
-          <a:p>
-            <a:pPr algn="l" indent="0" marL="0">
-              <a:lnSpc>
-                <a:spcPts val="1820"/>
-              </a:lnSpc>
-              <a:spcBef>
-                <a:spcPts val="300"/>
-              </a:spcBef>
-              <a:spcAft>
-                <a:spcPts val="300"/>
-              </a:spcAft>
-              <a:buNone/>
-            </a:pPr>
-            <a:r>
-              <a:rPr lang="en-US" sz="1300" i="1" dirty="0">
-                <a:solidFill>
-                  <a:srgbClr val="1C2833"/>
-                </a:solidFill>
-                <a:latin typeface="Georgia" pitchFamily="34" charset="0"/>
-                <a:ea typeface="Georgia" pitchFamily="34" charset="-122"/>
-                <a:cs typeface="Georgia" pitchFamily="34" charset="-120"/>
-              </a:rPr>
-              <a:t>You need at least two sources total, at least one from category 1 or 2.</a:t>
-            </a:r>
-            <a:endParaRPr lang="en-US" sz="1300" dirty="0"/>
-          </a:p>
-        </p:txBody>
-      </p:sp>
-      <p:sp>
-        <p:nvSpPr>
-          <p:cNvPr id="9" name="Text 7"/>
-          <p:cNvSpPr/>
-          <p:nvPr/>
-        </p:nvSpPr>
-        <p:spPr>
-          <a:xfrm>
-            <a:off x="692051" y="2343299"/>
-            <a:ext cx="7973389" cy="461963"/>
-          </a:xfrm>
-          <a:prstGeom prst="rect">
-            <a:avLst/>
-          </a:prstGeom>
-          <a:noFill/>
-          <a:ln/>
-        </p:spPr>
-        <p:txBody>
-          <a:bodyPr wrap="square" lIns="0" tIns="0" rIns="0" bIns="0" rtlCol="0" anchor="t"/>
-          <a:lstStyle/>
-          <a:p>
-            <a:pPr algn="l" indent="0" marL="0">
-              <a:lnSpc>
-                <a:spcPts val="1820"/>
-              </a:lnSpc>
-              <a:spcBef>
-                <a:spcPts val="300"/>
-              </a:spcBef>
-              <a:spcAft>
-                <a:spcPts val="300"/>
-              </a:spcAft>
-              <a:buNone/>
-            </a:pPr>
-            <a:r>
-              <a:rPr lang="en-US" sz="1300" i="1" dirty="0">
-                <a:solidFill>
-                  <a:srgbClr val="1C2833"/>
-                </a:solidFill>
-                <a:latin typeface="Georgia" pitchFamily="34" charset="0"/>
-                <a:ea typeface="Georgia" pitchFamily="34" charset="-122"/>
-                <a:cs typeface="Georgia" pitchFamily="34" charset="-120"/>
-              </a:rPr>
-              <a:t>What does NOT count: - "Some say…" without naming who. - A WhatsApp forward. - An AI paraphrase you can't trace.</a:t>
-            </a:r>
-            <a:endParaRPr lang="en-US" sz="1300" dirty="0"/>
-          </a:p>
-        </p:txBody>
-      </p:sp>
-      <p:sp>
-        <p:nvSpPr>
-          <p:cNvPr id="10" name="Text 8"/>
-          <p:cNvSpPr/>
-          <p:nvPr/>
-        </p:nvSpPr>
-        <p:spPr>
-          <a:xfrm>
-            <a:off x="692051" y="2843361"/>
-            <a:ext cx="7973389" cy="230981"/>
-          </a:xfrm>
-          <a:prstGeom prst="rect">
-            <a:avLst/>
-          </a:prstGeom>
-          <a:noFill/>
-          <a:ln/>
-        </p:spPr>
-        <p:txBody>
-          <a:bodyPr wrap="square" lIns="0" tIns="0" rIns="0" bIns="0" rtlCol="0" anchor="t"/>
-          <a:lstStyle/>
-          <a:p>
-            <a:pPr algn="l" indent="0" marL="0">
-              <a:lnSpc>
-                <a:spcPts val="1820"/>
-              </a:lnSpc>
-              <a:spcBef>
-                <a:spcPts val="300"/>
-              </a:spcBef>
-              <a:spcAft>
-                <a:spcPts val="300"/>
-              </a:spcAft>
-              <a:buNone/>
-            </a:pPr>
-            <a:r>
-              <a:rPr lang="en-US" sz="1300" i="1" dirty="0">
-                <a:solidFill>
-                  <a:srgbClr val="1C2833"/>
-                </a:solidFill>
-                <a:latin typeface="Georgia" pitchFamily="34" charset="0"/>
-                <a:ea typeface="Georgia" pitchFamily="34" charset="-122"/>
-                <a:cs typeface="Georgia" pitchFamily="34" charset="-120"/>
-              </a:rPr>
-              <a:t>Fill in two citation slips by end of class.</a:t>
-            </a:r>
-            <a:endParaRPr lang="en-US" sz="1300" dirty="0"/>
-          </a:p>
-        </p:txBody>
-      </p:sp>
-      <p:sp>
-        <p:nvSpPr>
-          <p:cNvPr id="11" name="Text 9"/>
           <p:cNvSpPr/>
           <p:nvPr/>
         </p:nvSpPr>
@@ -5169,7 +8430,7 @@
                 <a:ea typeface="Georgia" pitchFamily="34" charset="-122"/>
                 <a:cs typeface="Georgia" pitchFamily="34" charset="-120"/>
               </a:rPr>
-              <a:t>Homework</a:t>
+              <a:t>Core (10 min) (cont.)</a:t>
             </a:r>
             <a:endParaRPr lang="en-US" sz="1800" dirty="0"/>
           </a:p>
@@ -5183,8 +8444,8 @@
         </p:nvSpPr>
         <p:spPr>
           <a:xfrm>
-            <a:off x="406301" y="870942"/>
-            <a:ext cx="8498026" cy="426541"/>
+            <a:off x="634901" y="883593"/>
+            <a:ext cx="8102798" cy="281880"/>
           </a:xfrm>
           <a:prstGeom prst="rect">
             <a:avLst/>
@@ -5196,13 +8457,31 @@
           <a:bodyPr wrap="square" lIns="0" tIns="0" rIns="0" bIns="0" rtlCol="0" anchor="t"/>
           <a:lstStyle/>
           <a:p>
-            <a:pPr algn="l" indent="0" marL="0">
-              <a:lnSpc>
-                <a:spcPts val="1680"/>
-              </a:lnSpc>
-              <a:spcBef>
-                <a:spcPts val="300"/>
-              </a:spcBef>
+            <a:pPr algn="l" marL="342900" indent="-342900">
+              <a:lnSpc>
+                <a:spcPts val="1620"/>
+              </a:lnSpc>
+              <a:spcAft>
+                <a:spcPts val="300"/>
+              </a:spcAft>
+              <a:buSzPct val="100000"/>
+              <a:buChar char="•"/>
+            </a:pPr>
+            <a:r>
+              <a:rPr lang="en-US" sz="1200" b="1" dirty="0">
+                <a:solidFill>
+                  <a:srgbClr val="1C2833"/>
+                </a:solidFill>
+                <a:latin typeface="Arial" pitchFamily="34" charset="0"/>
+                <a:ea typeface="Arial" pitchFamily="34" charset="-122"/>
+                <a:cs typeface="Arial" pitchFamily="34" charset="-120"/>
+              </a:rPr>
+              <a:t>Citation format</a:t>
+            </a:r>
+            <a:pPr algn="l" indent="0" marL="0">
+              <a:lnSpc>
+                <a:spcPts val="1620"/>
+              </a:lnSpc>
               <a:spcAft>
                 <a:spcPts val="300"/>
               </a:spcAft>
@@ -5217,7 +8496,7 @@
                 <a:ea typeface="Arial" pitchFamily="34" charset="-122"/>
                 <a:cs typeface="Arial" pitchFamily="34" charset="-120"/>
               </a:rPr>
-              <a:t>– Open the cache files on a computer at home if available. Read the full chunks (not just the summary). – If a source you want isn't in the cache, search for the chapter in a school library or ask a parent. – Bring drawing tools tomorrow.</a:t>
+              <a:t> (3 min). For each source, your journal slip needs:</a:t>
             </a:r>
             <a:endParaRPr lang="en-US" sz="1200" dirty="0"/>
           </a:p>
@@ -5226,6 +8505,204 @@
       <p:sp>
         <p:nvSpPr>
           <p:cNvPr id="5" name="Text 3"/>
+          <p:cNvSpPr/>
+          <p:nvPr/>
+        </p:nvSpPr>
+        <p:spPr>
+          <a:xfrm>
+            <a:off x="634901" y="1266974"/>
+            <a:ext cx="8102798" cy="1013222"/>
+          </a:xfrm>
+          <a:prstGeom prst="rect">
+            <a:avLst/>
+          </a:prstGeom>
+          <a:noFill/>
+          <a:ln/>
+        </p:spPr>
+        <p:txBody>
+          <a:bodyPr wrap="square" lIns="0" tIns="0" rIns="0" bIns="0" rtlCol="0" anchor="t"/>
+          <a:lstStyle/>
+          <a:p>
+            <a:pPr algn="l" marL="342900" indent="-342900">
+              <a:lnSpc>
+                <a:spcPts val="1620"/>
+              </a:lnSpc>
+              <a:spcAft>
+                <a:spcPts val="300"/>
+              </a:spcAft>
+              <a:buSzPct val="100000"/>
+              <a:buChar char="•"/>
+            </a:pPr>
+            <a:r>
+              <a:rPr lang="en-US" sz="1200" b="1" dirty="0">
+                <a:solidFill>
+                  <a:srgbClr val="1C2833"/>
+                </a:solidFill>
+                <a:latin typeface="Arial" pitchFamily="34" charset="0"/>
+                <a:ea typeface="Arial" pitchFamily="34" charset="-122"/>
+                <a:cs typeface="Arial" pitchFamily="34" charset="-120"/>
+              </a:rPr>
+              <a:t>Source identifier</a:t>
+            </a:r>
+            <a:pPr algn="l" indent="0" marL="0">
+              <a:lnSpc>
+                <a:spcPts val="1620"/>
+              </a:lnSpc>
+              <a:spcAft>
+                <a:spcPts val="300"/>
+              </a:spcAft>
+              <a:buNone/>
+            </a:pPr>
+            <a:r>
+              <a:rPr lang="en-US" sz="1200" dirty="0">
+                <a:solidFill>
+                  <a:srgbClr val="1C2833"/>
+                </a:solidFill>
+                <a:latin typeface="Arial" pitchFamily="34" charset="0"/>
+                <a:ea typeface="Arial" pitchFamily="34" charset="-122"/>
+                <a:cs typeface="Arial" pitchFamily="34" charset="-120"/>
+              </a:rPr>
+              <a:t> (e.g. "SB 3.26.36" or "NCERT Class 7 Science Ch. 2")</a:t>
+            </a:r>
+            <a:endParaRPr lang="en-US" sz="1200" dirty="0"/>
+          </a:p>
+          <a:p>
+            <a:pPr algn="l" marL="342900" indent="-342900">
+              <a:lnSpc>
+                <a:spcPts val="1620"/>
+              </a:lnSpc>
+              <a:spcAft>
+                <a:spcPts val="300"/>
+              </a:spcAft>
+              <a:buSzPct val="100000"/>
+              <a:buChar char="•"/>
+            </a:pPr>
+            <a:r>
+              <a:rPr lang="en-US" sz="1200" b="1" dirty="0">
+                <a:solidFill>
+                  <a:srgbClr val="1C2833"/>
+                </a:solidFill>
+                <a:latin typeface="Arial" pitchFamily="34" charset="0"/>
+                <a:ea typeface="Arial" pitchFamily="34" charset="-122"/>
+                <a:cs typeface="Arial" pitchFamily="34" charset="-120"/>
+              </a:rPr>
+              <a:t>Where you found it</a:t>
+            </a:r>
+            <a:pPr algn="l" indent="0" marL="0">
+              <a:lnSpc>
+                <a:spcPts val="1620"/>
+              </a:lnSpc>
+              <a:spcAft>
+                <a:spcPts val="300"/>
+              </a:spcAft>
+              <a:buNone/>
+            </a:pPr>
+            <a:r>
+              <a:rPr lang="en-US" sz="1200" dirty="0">
+                <a:solidFill>
+                  <a:srgbClr val="1C2833"/>
+                </a:solidFill>
+                <a:latin typeface="Arial" pitchFamily="34" charset="0"/>
+                <a:ea typeface="Arial" pitchFamily="34" charset="-122"/>
+                <a:cs typeface="Arial" pitchFamily="34" charset="-120"/>
+              </a:rPr>
+              <a:t> (e.g. "module-04-doshas/.rag-cache/day-02-dosha-basics.json")</a:t>
+            </a:r>
+            <a:endParaRPr lang="en-US" sz="1200" dirty="0"/>
+          </a:p>
+          <a:p>
+            <a:pPr algn="l" marL="342900" indent="-342900">
+              <a:lnSpc>
+                <a:spcPts val="1620"/>
+              </a:lnSpc>
+              <a:spcAft>
+                <a:spcPts val="300"/>
+              </a:spcAft>
+              <a:buSzPct val="100000"/>
+              <a:buChar char="•"/>
+            </a:pPr>
+            <a:r>
+              <a:rPr lang="en-US" sz="1200" b="1" dirty="0">
+                <a:solidFill>
+                  <a:srgbClr val="1C2833"/>
+                </a:solidFill>
+                <a:latin typeface="Arial" pitchFamily="34" charset="0"/>
+                <a:ea typeface="Arial" pitchFamily="34" charset="-122"/>
+                <a:cs typeface="Arial" pitchFamily="34" charset="-120"/>
+              </a:rPr>
+              <a:t>What it says, in your words</a:t>
+            </a:r>
+            <a:pPr algn="l" indent="0" marL="0">
+              <a:lnSpc>
+                <a:spcPts val="1620"/>
+              </a:lnSpc>
+              <a:spcAft>
+                <a:spcPts val="300"/>
+              </a:spcAft>
+              <a:buNone/>
+            </a:pPr>
+            <a:r>
+              <a:rPr lang="en-US" sz="1200" dirty="0">
+                <a:solidFill>
+                  <a:srgbClr val="1C2833"/>
+                </a:solidFill>
+                <a:latin typeface="Arial" pitchFamily="34" charset="0"/>
+                <a:ea typeface="Arial" pitchFamily="34" charset="-122"/>
+                <a:cs typeface="Arial" pitchFamily="34" charset="-120"/>
+              </a:rPr>
+              <a:t> (1-2 sentences)</a:t>
+            </a:r>
+            <a:endParaRPr lang="en-US" sz="1200" dirty="0"/>
+          </a:p>
+          <a:p>
+            <a:pPr algn="l" marL="342900" indent="-342900">
+              <a:lnSpc>
+                <a:spcPts val="1620"/>
+              </a:lnSpc>
+              <a:spcAft>
+                <a:spcPts val="300"/>
+              </a:spcAft>
+              <a:buSzPct val="100000"/>
+              <a:buChar char="•"/>
+            </a:pPr>
+            <a:r>
+              <a:rPr lang="en-US" sz="1200" b="1" dirty="0">
+                <a:solidFill>
+                  <a:srgbClr val="1C2833"/>
+                </a:solidFill>
+                <a:latin typeface="Arial" pitchFamily="34" charset="0"/>
+                <a:ea typeface="Arial" pitchFamily="34" charset="-122"/>
+                <a:cs typeface="Arial" pitchFamily="34" charset="-120"/>
+              </a:rPr>
+              <a:t>How it relates to your project</a:t>
+            </a:r>
+            <a:pPr algn="l" indent="0" marL="0">
+              <a:lnSpc>
+                <a:spcPts val="1620"/>
+              </a:lnSpc>
+              <a:spcAft>
+                <a:spcPts val="300"/>
+              </a:spcAft>
+              <a:buNone/>
+            </a:pPr>
+            <a:r>
+              <a:rPr lang="en-US" sz="1200" dirty="0">
+                <a:solidFill>
+                  <a:srgbClr val="1C2833"/>
+                </a:solidFill>
+                <a:latin typeface="Arial" pitchFamily="34" charset="0"/>
+                <a:ea typeface="Arial" pitchFamily="34" charset="-122"/>
+                <a:cs typeface="Arial" pitchFamily="34" charset="-120"/>
+              </a:rPr>
+              <a:t> (1 sentence)</a:t>
+            </a:r>
+            <a:endParaRPr lang="en-US" sz="1200" dirty="0"/>
+          </a:p>
+        </p:txBody>
+      </p:sp>
+      <p:sp>
+        <p:nvSpPr>
+          <p:cNvPr id="6" name="Text 4"/>
           <p:cNvSpPr/>
           <p:nvPr/>
         </p:nvSpPr>
@@ -5375,7 +8852,7 @@
                 <a:ea typeface="Georgia" pitchFamily="34" charset="-122"/>
                 <a:cs typeface="Georgia" pitchFamily="34" charset="-120"/>
               </a:rPr>
-              <a:t>Differentiation</a:t>
+              <a:t>Core (10 min) (cont.)</a:t>
             </a:r>
             <a:endParaRPr lang="en-US" sz="1800" dirty="0"/>
           </a:p>
@@ -5390,7 +8867,7 @@
         <p:spPr>
           <a:xfrm>
             <a:off x="634901" y="883593"/>
-            <a:ext cx="8102798" cy="937022"/>
+            <a:ext cx="8102798" cy="487561"/>
           </a:xfrm>
           <a:prstGeom prst="rect">
             <a:avLst/>
@@ -5421,7 +8898,7 @@
                 <a:ea typeface="Arial" pitchFamily="34" charset="-122"/>
                 <a:cs typeface="Arial" pitchFamily="34" charset="-120"/>
               </a:rPr>
-              <a:t>One tier up:</a:t>
+              <a:t>Two-source minimum, three is comfortable</a:t>
             </a:r>
             <a:pPr algn="l" indent="0" marL="0">
               <a:lnSpc>
@@ -5441,91 +8918,7 @@
                 <a:ea typeface="Arial" pitchFamily="34" charset="-122"/>
                 <a:cs typeface="Arial" pitchFamily="34" charset="-120"/>
               </a:rPr>
-              <a:t> Find a third source from a </a:t>
-            </a:r>
-            <a:pPr algn="l" indent="0" marL="0">
-              <a:lnSpc>
-                <a:spcPts val="1620"/>
-              </a:lnSpc>
-              <a:spcAft>
-                <a:spcPts val="300"/>
-              </a:spcAft>
-              <a:buNone/>
-            </a:pPr>
-            <a:r>
-              <a:rPr lang="en-US" sz="1200" i="1" dirty="0">
-                <a:solidFill>
-                  <a:srgbClr val="1C2833"/>
-                </a:solidFill>
-                <a:latin typeface="Arial" pitchFamily="34" charset="0"/>
-                <a:ea typeface="Arial" pitchFamily="34" charset="-122"/>
-                <a:cs typeface="Arial" pitchFamily="34" charset="-120"/>
-              </a:rPr>
-              <a:t>different</a:t>
-            </a:r>
-            <a:pPr algn="l" indent="0" marL="0">
-              <a:lnSpc>
-                <a:spcPts val="1620"/>
-              </a:lnSpc>
-              <a:spcAft>
-                <a:spcPts val="300"/>
-              </a:spcAft>
-              <a:buNone/>
-            </a:pPr>
-            <a:r>
-              <a:rPr lang="en-US" sz="1200" dirty="0">
-                <a:solidFill>
-                  <a:srgbClr val="1C2833"/>
-                </a:solidFill>
-                <a:latin typeface="Arial" pitchFamily="34" charset="0"/>
-                <a:ea typeface="Arial" pitchFamily="34" charset="-122"/>
-                <a:cs typeface="Arial" pitchFamily="34" charset="-120"/>
-              </a:rPr>
-              <a:t> category than your first two. For instance, if you have two cache verses, find one NCERT chapter or one primary observation to triangulate.</a:t>
-            </a:r>
-            <a:endParaRPr lang="en-US" sz="1200" dirty="0"/>
-          </a:p>
-          <a:p>
-            <a:pPr algn="l" marL="342900" indent="-342900">
-              <a:lnSpc>
-                <a:spcPts val="1620"/>
-              </a:lnSpc>
-              <a:spcAft>
-                <a:spcPts val="300"/>
-              </a:spcAft>
-              <a:buSzPct val="100000"/>
-              <a:buChar char="•"/>
-            </a:pPr>
-            <a:r>
-              <a:rPr lang="en-US" sz="1200" b="1" dirty="0">
-                <a:solidFill>
-                  <a:srgbClr val="1C2833"/>
-                </a:solidFill>
-                <a:latin typeface="Arial" pitchFamily="34" charset="0"/>
-                <a:ea typeface="Arial" pitchFamily="34" charset="-122"/>
-                <a:cs typeface="Arial" pitchFamily="34" charset="-120"/>
-              </a:rPr>
-              <a:t>One tier down:</a:t>
-            </a:r>
-            <a:pPr algn="l" indent="0" marL="0">
-              <a:lnSpc>
-                <a:spcPts val="1620"/>
-              </a:lnSpc>
-              <a:spcAft>
-                <a:spcPts val="300"/>
-              </a:spcAft>
-              <a:buNone/>
-            </a:pPr>
-            <a:r>
-              <a:rPr lang="en-US" sz="1200" dirty="0">
-                <a:solidFill>
-                  <a:srgbClr val="1C2833"/>
-                </a:solidFill>
-                <a:latin typeface="Arial" pitchFamily="34" charset="0"/>
-                <a:ea typeface="Arial" pitchFamily="34" charset="-122"/>
-                <a:cs typeface="Arial" pitchFamily="34" charset="-120"/>
-              </a:rPr>
-              <a:t> Stop at two solid sources rather than chasing more. Spend the saved time writing what each source contributes in 3 sentences — clarity beats volume.</a:t>
+              <a:t> (2 min). Hit at least one of category 1 or 2, plus one more. Three sources is the sweet spot for a Middle-band project — more becomes hard to manage.</a:t>
             </a:r>
             <a:endParaRPr lang="en-US" sz="1200" dirty="0"/>
           </a:p>
